--- a/docs/PROPOSAL.pptx
+++ b/docs/PROPOSAL.pptx
@@ -15,15 +15,6 @@
     <p:sldId id="263" r:id="rId14"/>
     <p:sldId id="264" r:id="rId15"/>
     <p:sldId id="265" r:id="rId16"/>
-    <p:sldId id="266" r:id="rId17"/>
-    <p:sldId id="267" r:id="rId18"/>
-    <p:sldId id="268" r:id="rId19"/>
-    <p:sldId id="269" r:id="rId20"/>
-    <p:sldId id="270" r:id="rId21"/>
-    <p:sldId id="271" r:id="rId22"/>
-    <p:sldId id="272" r:id="rId23"/>
-    <p:sldId id="273" r:id="rId24"/>
-    <p:sldId id="274" r:id="rId25"/>
   </p:sldIdLst>
   <p:sldSz cx="12191695" cy="6858000" type="screen4x3"/>
   <p:notesSz cx="6858000" cy="9144000"/>
@@ -3106,16 +3097,40 @@
         <p:nvPr/>
       </p:nvGrpSpPr>
       <p:grpSpPr/>
-      <p:sp>
-        <p:nvSpPr>
-          <p:cNvPr id="2" name="Rectangle 1"/>
+      <p:pic>
+        <p:nvPicPr>
+          <p:cNvPr id="2" name="Picture 1" descr="logo.png"/>
+          <p:cNvPicPr>
+            <a:picLocks noChangeAspect="1"/>
+          </p:cNvPicPr>
+          <p:nvPr/>
+        </p:nvPicPr>
+        <p:blipFill>
+          <a:blip r:embed="rId2"/>
+          <a:stretch>
+            <a:fillRect/>
+          </a:stretch>
+        </p:blipFill>
+        <p:spPr>
+          <a:xfrm>
+            <a:off x="4022427" y="640080"/>
+            <a:ext cx="4146840" cy="2194560"/>
+          </a:xfrm>
+          <a:prstGeom prst="rect">
+            <a:avLst/>
+          </a:prstGeom>
+        </p:spPr>
+      </p:pic>
+      <p:sp>
+        <p:nvSpPr>
+          <p:cNvPr id="3" name="Rectangle 2"/>
           <p:cNvSpPr/>
           <p:nvPr/>
         </p:nvSpPr>
         <p:spPr>
           <a:xfrm>
-            <a:off x="0" y="2377440"/>
-            <a:ext cx="12191695" cy="109728"/>
+            <a:off x="0" y="3246120"/>
+            <a:ext cx="12191695" cy="91440"/>
           </a:xfrm>
           <a:prstGeom prst="rect">
             <a:avLst/>
@@ -3151,14 +3166,14 @@
       </p:sp>
       <p:sp>
         <p:nvSpPr>
-          <p:cNvPr id="3" name="TextBox 2"/>
+          <p:cNvPr id="4" name="TextBox 3"/>
           <p:cNvSpPr txBox="1"/>
           <p:nvPr/>
         </p:nvSpPr>
         <p:spPr>
           <a:xfrm>
-            <a:off x="640080" y="2606040"/>
-            <a:ext cx="10881360" cy="1463040"/>
+            <a:off x="640080" y="3520440"/>
+            <a:ext cx="10881360" cy="1097280"/>
           </a:xfrm>
           <a:prstGeom prst="rect">
             <a:avLst/>
@@ -3171,7 +3186,7 @@
           </a:bodyPr>
           <a:lstStyle/>
           <a:p>
-            <a:pPr algn="l"/>
+            <a:pPr algn="ctr"/>
             <a:r>
               <a:rPr sz="4400" b="1">
                 <a:solidFill>
@@ -3179,21 +3194,21 @@
                 </a:solidFill>
                 <a:latin typeface="Yu Gothic UI"/>
               </a:rPr>
-              <a:t>走ログ (Hashilog) 事業提案書</a:t>
-            </a:r>
-          </a:p>
-        </p:txBody>
-      </p:sp>
-      <p:sp>
-        <p:nvSpPr>
-          <p:cNvPr id="4" name="TextBox 3"/>
+              <a:t>事業提案書</a:t>
+            </a:r>
+          </a:p>
+        </p:txBody>
+      </p:sp>
+      <p:sp>
+        <p:nvSpPr>
+          <p:cNvPr id="5" name="TextBox 4"/>
           <p:cNvSpPr txBox="1"/>
           <p:nvPr/>
         </p:nvSpPr>
         <p:spPr>
           <a:xfrm>
-            <a:off x="640080" y="4023360"/>
-            <a:ext cx="10881360" cy="731520"/>
+            <a:off x="640080" y="4663440"/>
+            <a:ext cx="10881360" cy="640080"/>
           </a:xfrm>
           <a:prstGeom prst="rect">
             <a:avLst/>
@@ -3206,8 +3221,9 @@
           </a:bodyPr>
           <a:lstStyle/>
           <a:p>
-            <a:r>
-              <a:rPr sz="2000" b="0">
+            <a:pPr algn="ctr"/>
+            <a:r>
+              <a:rPr sz="1800" b="0">
                 <a:solidFill>
                   <a:srgbClr val="71717A"/>
                 </a:solidFill>
@@ -3220,14 +3236,14 @@
       </p:sp>
       <p:sp>
         <p:nvSpPr>
-          <p:cNvPr id="5" name="TextBox 4"/>
+          <p:cNvPr id="6" name="TextBox 5"/>
           <p:cNvSpPr txBox="1"/>
           <p:nvPr/>
         </p:nvSpPr>
         <p:spPr>
           <a:xfrm>
-            <a:off x="640080" y="5486400"/>
-            <a:ext cx="10881360" cy="822960"/>
+            <a:off x="640080" y="5669280"/>
+            <a:ext cx="10881360" cy="731520"/>
           </a:xfrm>
           <a:prstGeom prst="rect">
             <a:avLst/>
@@ -3240,25 +3256,15 @@
           </a:bodyPr>
           <a:lstStyle/>
           <a:p>
-            <a:r>
-              <a:rPr sz="1400" b="1">
-                <a:solidFill>
-                  <a:srgbClr val="18181B"/>
-                </a:solidFill>
-                <a:latin typeface="Yu Gothic UI"/>
-              </a:rPr>
-              <a:t>RBS  /  久米田 昴</a:t>
-            </a:r>
-          </a:p>
-          <a:p>
+            <a:pPr algn="ctr"/>
             <a:r>
               <a:rPr sz="1200" b="0">
                 <a:solidFill>
-                  <a:srgbClr val="71717A"/>
-                </a:solidFill>
-                <a:latin typeface="Yu Gothic UI"/>
-              </a:rPr>
-              <a:t>https://hashilog.jp    hashilog2024@gmail.com</a:t>
+                  <a:srgbClr val="3F3F46"/>
+                </a:solidFill>
+                <a:latin typeface="Yu Gothic UI"/>
+              </a:rPr>
+              <a:t>RBS  /  久米田 昴       https://hashilog.jp       hashilog2024@gmail.com</a:t>
             </a:r>
           </a:p>
         </p:txBody>
@@ -3317,25 +3323,40 @@
           </a:fontRef>
         </p:style>
         <p:txBody>
-          <a:bodyPr rtlCol="0" anchor="ctr" lIns="457200"/>
-          <a:lstStyle/>
-          <a:p>
-            <a:pPr algn="l"/>
-            <a:r>
-              <a:rPr sz="1800" b="1">
-                <a:solidFill>
-                  <a:srgbClr val="FFFFFF"/>
-                </a:solidFill>
-                <a:latin typeface="Yu Gothic UI"/>
-              </a:rPr>
-              <a:t>  5.  B2B パートナー候補</a:t>
-            </a:r>
-          </a:p>
-        </p:txBody>
-      </p:sp>
-      <p:sp>
-        <p:nvSpPr>
-          <p:cNvPr id="3" name="TextBox 2"/>
+          <a:bodyPr rtlCol="0" anchor="ctr"/>
+          <a:lstStyle/>
+          <a:p>
+            <a:pPr algn="ctr"/>
+          </a:p>
+        </p:txBody>
+      </p:sp>
+      <p:pic>
+        <p:nvPicPr>
+          <p:cNvPr id="3" name="Picture 2" descr="logo.png"/>
+          <p:cNvPicPr>
+            <a:picLocks noChangeAspect="1"/>
+          </p:cNvPicPr>
+          <p:nvPr/>
+        </p:nvPicPr>
+        <p:blipFill>
+          <a:blip r:embed="rId2"/>
+          <a:stretch>
+            <a:fillRect/>
+          </a:stretch>
+        </p:blipFill>
+        <p:spPr>
+          <a:xfrm>
+            <a:off x="11094123" y="228600"/>
+            <a:ext cx="777532" cy="411480"/>
+          </a:xfrm>
+          <a:prstGeom prst="rect">
+            <a:avLst/>
+          </a:prstGeom>
+        </p:spPr>
+      </p:pic>
+      <p:sp>
+        <p:nvSpPr>
+          <p:cNvPr id="4" name="TextBox 3"/>
           <p:cNvSpPr txBox="1"/>
           <p:nvPr/>
         </p:nvSpPr>
@@ -3363,22 +3384,2172 @@
                 </a:solidFill>
                 <a:latin typeface="Yu Gothic UI"/>
               </a:rPr>
-              <a:t>走ログ (Hashilog) 事業提案書  v1.0  /  RBS  /  hashilog2024@gmail.com</a:t>
+              <a:t>走ログ (Hashilog)  v1.0  /  RBS  /  hashilog2024@gmail.com  /  https://hashilog.jp</a:t>
+            </a:r>
+          </a:p>
+        </p:txBody>
+      </p:sp>
+      <p:sp>
+        <p:nvSpPr>
+          <p:cNvPr id="5" name="TextBox 4"/>
+          <p:cNvSpPr txBox="1"/>
+          <p:nvPr/>
+        </p:nvSpPr>
+        <p:spPr>
+          <a:xfrm>
+            <a:off x="640080" y="1097280"/>
+            <a:ext cx="10881360" cy="2103120"/>
+          </a:xfrm>
+          <a:prstGeom prst="rect">
+            <a:avLst/>
+          </a:prstGeom>
+          <a:noFill/>
+        </p:spPr>
+        <p:txBody>
+          <a:bodyPr wrap="none">
+            <a:spAutoFit/>
+          </a:bodyPr>
+          <a:lstStyle/>
+          <a:p>
+            <a:pPr algn="l"/>
+            <a:r>
+              <a:rPr sz="3200" b="1">
+                <a:solidFill>
+                  <a:srgbClr val="18181B"/>
+                </a:solidFill>
+                <a:latin typeface="Yu Gothic UI"/>
+              </a:rPr>
+              <a:t>サーキットを走るすべての人が、</a:t>
+            </a:r>
+          </a:p>
+          <a:p>
+            <a:pPr algn="l"/>
+            <a:r>
+              <a:rPr sz="3200" b="1">
+                <a:solidFill>
+                  <a:srgbClr val="E10600"/>
+                </a:solidFill>
+                <a:latin typeface="Yu Gothic UI"/>
+              </a:rPr>
+              <a:t>自分のタイムをもっと誇れる場所へ。</a:t>
+            </a:r>
+          </a:p>
+        </p:txBody>
+      </p:sp>
+      <p:sp>
+        <p:nvSpPr>
+          <p:cNvPr id="6" name="TextBox 5"/>
+          <p:cNvSpPr txBox="1"/>
+          <p:nvPr/>
+        </p:nvSpPr>
+        <p:spPr>
+          <a:xfrm>
+            <a:off x="640080" y="3291840"/>
+            <a:ext cx="10881360" cy="914400"/>
+          </a:xfrm>
+          <a:prstGeom prst="rect">
+            <a:avLst/>
+          </a:prstGeom>
+          <a:noFill/>
+        </p:spPr>
+        <p:txBody>
+          <a:bodyPr wrap="none">
+            <a:spAutoFit/>
+          </a:bodyPr>
+          <a:lstStyle/>
+          <a:p>
+            <a:pPr algn="l"/>
+            <a:r>
+              <a:rPr sz="1600" b="0">
+                <a:solidFill>
+                  <a:srgbClr val="3F3F46"/>
+                </a:solidFill>
+                <a:latin typeface="Yu Gothic UI"/>
+              </a:rPr>
+              <a:t>ぜひ一度、サービスを実際に触っていただき、提携の可能性についてお話しさせてください。</a:t>
+            </a:r>
+          </a:p>
+        </p:txBody>
+      </p:sp>
+      <p:sp>
+        <p:nvSpPr>
+          <p:cNvPr id="7" name="Rounded Rectangle 6"/>
+          <p:cNvSpPr/>
+          <p:nvPr/>
+        </p:nvSpPr>
+        <p:spPr>
+          <a:xfrm>
+            <a:off x="640080" y="4297680"/>
+            <a:ext cx="10881360" cy="1828800"/>
+          </a:xfrm>
+          <a:prstGeom prst="roundRect">
+            <a:avLst/>
+          </a:prstGeom>
+          <a:solidFill>
+            <a:srgbClr val="FAFAFA"/>
+          </a:solidFill>
+          <a:ln>
+            <a:solidFill>
+              <a:srgbClr val="E4E4E7"/>
+            </a:solidFill>
+          </a:ln>
+        </p:spPr>
+        <p:style>
+          <a:lnRef idx="1">
+            <a:schemeClr val="accent1"/>
+          </a:lnRef>
+          <a:fillRef idx="3">
+            <a:schemeClr val="accent1"/>
+          </a:fillRef>
+          <a:effectRef idx="2">
+            <a:schemeClr val="accent1"/>
+          </a:effectRef>
+          <a:fontRef idx="minor">
+            <a:schemeClr val="lt1"/>
+          </a:fontRef>
+        </p:style>
+        <p:txBody>
+          <a:bodyPr rtlCol="0" anchor="ctr" lIns="365760" tIns="274320"/>
+          <a:lstStyle/>
+          <a:p>
+            <a:pPr algn="l"/>
+            <a:r>
+              <a:rPr sz="2200" b="1">
+                <a:solidFill>
+                  <a:srgbClr val="18181B"/>
+                </a:solidFill>
+                <a:latin typeface="Yu Gothic UI"/>
+              </a:rPr>
+              <a:t>走ログ (Hashilog)</a:t>
+            </a:r>
+          </a:p>
+          <a:p>
+            <a:pPr algn="l"/>
+            <a:r>
+              <a:rPr sz="1400" b="0">
+                <a:solidFill>
+                  <a:srgbClr val="3F3F46"/>
+                </a:solidFill>
+                <a:latin typeface="Yu Gothic UI"/>
+              </a:rPr>
+              <a:t>Web   :  https://hashilog.jp</a:t>
+            </a:r>
+          </a:p>
+          <a:p>
+            <a:pPr algn="l"/>
+            <a:r>
+              <a:rPr sz="1400" b="0">
+                <a:solidFill>
+                  <a:srgbClr val="3F3F46"/>
+                </a:solidFill>
+                <a:latin typeface="Yu Gothic UI"/>
+              </a:rPr>
+              <a:t>事業者:  RBS</a:t>
+            </a:r>
+          </a:p>
+          <a:p>
+            <a:pPr algn="l"/>
+            <a:r>
+              <a:rPr sz="1400" b="0">
+                <a:solidFill>
+                  <a:srgbClr val="3F3F46"/>
+                </a:solidFill>
+                <a:latin typeface="Yu Gothic UI"/>
+              </a:rPr>
+              <a:t>責任者:  久米田 昴</a:t>
+            </a:r>
+          </a:p>
+          <a:p>
+            <a:pPr algn="l"/>
+            <a:r>
+              <a:rPr sz="1400" b="0">
+                <a:solidFill>
+                  <a:srgbClr val="3F3F46"/>
+                </a:solidFill>
+                <a:latin typeface="Yu Gothic UI"/>
+              </a:rPr>
+              <a:t>お問い合わせ:  hashilog2024@gmail.com</a:t>
+            </a:r>
+          </a:p>
+        </p:txBody>
+      </p:sp>
+    </p:spTree>
+  </p:cSld>
+  <p:clrMapOvr>
+    <a:masterClrMapping/>
+  </p:clrMapOvr>
+</p:sld>
+</file>
+
+<file path=ppt/slides/slide2.xml><?xml version="1.0" encoding="utf-8"?>
+<p:sld xmlns:a="http://schemas.openxmlformats.org/drawingml/2006/main" xmlns:p="http://schemas.openxmlformats.org/presentationml/2006/main" xmlns:r="http://schemas.openxmlformats.org/officeDocument/2006/relationships">
+  <p:cSld>
+    <p:spTree>
+      <p:nvGrpSpPr>
+        <p:cNvPr id="1" name=""/>
+        <p:cNvGrpSpPr/>
+        <p:nvPr/>
+      </p:nvGrpSpPr>
+      <p:grpSpPr/>
+      <p:sp>
+        <p:nvSpPr>
+          <p:cNvPr id="2" name="Rectangle 1"/>
+          <p:cNvSpPr/>
+          <p:nvPr/>
+        </p:nvSpPr>
+        <p:spPr>
+          <a:xfrm>
+            <a:off x="0" y="0"/>
+            <a:ext cx="12191695" cy="868680"/>
+          </a:xfrm>
+          <a:prstGeom prst="rect">
+            <a:avLst/>
+          </a:prstGeom>
+          <a:solidFill>
+            <a:srgbClr val="E10600"/>
+          </a:solidFill>
+          <a:ln>
+            <a:noFill/>
+          </a:ln>
+        </p:spPr>
+        <p:style>
+          <a:lnRef idx="1">
+            <a:schemeClr val="accent1"/>
+          </a:lnRef>
+          <a:fillRef idx="3">
+            <a:schemeClr val="accent1"/>
+          </a:fillRef>
+          <a:effectRef idx="2">
+            <a:schemeClr val="accent1"/>
+          </a:effectRef>
+          <a:fontRef idx="minor">
+            <a:schemeClr val="lt1"/>
+          </a:fontRef>
+        </p:style>
+        <p:txBody>
+          <a:bodyPr rtlCol="0" anchor="ctr" lIns="502920" tIns="164592"/>
+          <a:lstStyle/>
+          <a:p>
+            <a:pPr algn="l"/>
+            <a:r>
+              <a:rPr sz="2200" b="1">
+                <a:solidFill>
+                  <a:srgbClr val="FFFFFF"/>
+                </a:solidFill>
+                <a:latin typeface="Yu Gothic UI"/>
+              </a:rPr>
+              <a:t>1.  サービス概要・提供価値</a:t>
+            </a:r>
+          </a:p>
+        </p:txBody>
+      </p:sp>
+      <p:pic>
+        <p:nvPicPr>
+          <p:cNvPr id="3" name="Picture 2" descr="logo.png"/>
+          <p:cNvPicPr>
+            <a:picLocks noChangeAspect="1"/>
+          </p:cNvPicPr>
+          <p:nvPr/>
+        </p:nvPicPr>
+        <p:blipFill>
+          <a:blip r:embed="rId2"/>
+          <a:stretch>
+            <a:fillRect/>
+          </a:stretch>
+        </p:blipFill>
+        <p:spPr>
+          <a:xfrm>
+            <a:off x="11094123" y="228600"/>
+            <a:ext cx="777532" cy="411480"/>
+          </a:xfrm>
+          <a:prstGeom prst="rect">
+            <a:avLst/>
+          </a:prstGeom>
+        </p:spPr>
+      </p:pic>
+      <p:sp>
+        <p:nvSpPr>
+          <p:cNvPr id="4" name="TextBox 3"/>
+          <p:cNvSpPr txBox="1"/>
+          <p:nvPr/>
+        </p:nvSpPr>
+        <p:spPr>
+          <a:xfrm>
+            <a:off x="0" y="6446520"/>
+            <a:ext cx="12191695" cy="365760"/>
+          </a:xfrm>
+          <a:prstGeom prst="rect">
+            <a:avLst/>
+          </a:prstGeom>
+          <a:noFill/>
+        </p:spPr>
+        <p:txBody>
+          <a:bodyPr wrap="none">
+            <a:spAutoFit/>
+          </a:bodyPr>
+          <a:lstStyle/>
+          <a:p>
+            <a:pPr algn="ctr"/>
+            <a:r>
+              <a:rPr sz="900" b="0">
+                <a:solidFill>
+                  <a:srgbClr val="71717A"/>
+                </a:solidFill>
+                <a:latin typeface="Yu Gothic UI"/>
+              </a:rPr>
+              <a:t>走ログ (Hashilog)  v1.0  /  RBS  /  hashilog2024@gmail.com  /  https://hashilog.jp</a:t>
+            </a:r>
+          </a:p>
+        </p:txBody>
+      </p:sp>
+      <p:sp>
+        <p:nvSpPr>
+          <p:cNvPr id="5" name="TextBox 4"/>
+          <p:cNvSpPr txBox="1"/>
+          <p:nvPr/>
+        </p:nvSpPr>
+        <p:spPr>
+          <a:xfrm>
+            <a:off x="640080" y="1097280"/>
+            <a:ext cx="10972800" cy="731520"/>
+          </a:xfrm>
+          <a:prstGeom prst="rect">
+            <a:avLst/>
+          </a:prstGeom>
+          <a:noFill/>
+        </p:spPr>
+        <p:txBody>
+          <a:bodyPr wrap="none">
+            <a:spAutoFit/>
+          </a:bodyPr>
+          <a:lstStyle/>
+          <a:p>
+            <a:pPr algn="l"/>
+            <a:r>
+              <a:rPr sz="1400" b="0">
+                <a:solidFill>
+                  <a:srgbClr val="3F3F46"/>
+                </a:solidFill>
+                <a:latin typeface="Yu Gothic UI"/>
+              </a:rPr>
+              <a:t>サーキットで刻んだタイムを、愛車情報と一緒に共有できる Web サービス。本番稼働中。</a:t>
+            </a:r>
+          </a:p>
+        </p:txBody>
+      </p:sp>
+      <p:sp>
+        <p:nvSpPr>
+          <p:cNvPr id="6" name="TextBox 5"/>
+          <p:cNvSpPr txBox="1"/>
+          <p:nvPr/>
+        </p:nvSpPr>
+        <p:spPr>
+          <a:xfrm>
+            <a:off x="640080" y="1828800"/>
+            <a:ext cx="5486400" cy="548640"/>
+          </a:xfrm>
+          <a:prstGeom prst="rect">
+            <a:avLst/>
+          </a:prstGeom>
+          <a:noFill/>
+        </p:spPr>
+        <p:txBody>
+          <a:bodyPr wrap="none">
+            <a:spAutoFit/>
+          </a:bodyPr>
+          <a:lstStyle/>
+          <a:p>
+            <a:pPr algn="l"/>
+            <a:r>
+              <a:rPr sz="1800" b="1">
+                <a:solidFill>
+                  <a:srgbClr val="E10600"/>
+                </a:solidFill>
+                <a:latin typeface="Yu Gothic UI"/>
+              </a:rPr>
+              <a:t>ドライバーに</a:t>
+            </a:r>
+          </a:p>
+        </p:txBody>
+      </p:sp>
+      <p:sp>
+        <p:nvSpPr>
+          <p:cNvPr id="7" name="TextBox 6"/>
+          <p:cNvSpPr txBox="1"/>
+          <p:nvPr/>
+        </p:nvSpPr>
+        <p:spPr>
+          <a:xfrm>
+            <a:off x="640080" y="2377440"/>
+            <a:ext cx="5486400" cy="4114800"/>
+          </a:xfrm>
+          <a:prstGeom prst="rect">
+            <a:avLst/>
+          </a:prstGeom>
+          <a:noFill/>
+        </p:spPr>
+        <p:txBody>
+          <a:bodyPr wrap="none">
+            <a:spAutoFit/>
+          </a:bodyPr>
+          <a:lstStyle/>
+          <a:p>
+            <a:pPr algn="l">
+              <a:lnSpc>
+                <a:spcPct val="120000"/>
+              </a:lnSpc>
+            </a:pPr>
+            <a:r>
+              <a:rPr sz="1300" b="0">
+                <a:solidFill>
+                  <a:srgbClr val="18181B"/>
+                </a:solidFill>
+                <a:latin typeface="Yu Gothic UI"/>
+              </a:rPr>
+              <a:t>・ タイム履歴・改造履歴・タイヤ履歴を1か所で管理</a:t>
+            </a:r>
+          </a:p>
+          <a:p>
+            <a:pPr algn="l">
+              <a:lnSpc>
+                <a:spcPct val="120000"/>
+              </a:lnSpc>
+            </a:pPr>
+            <a:r>
+              <a:rPr sz="1300" b="0">
+                <a:solidFill>
+                  <a:srgbClr val="18181B"/>
+                </a:solidFill>
+                <a:latin typeface="Yu Gothic UI"/>
+              </a:rPr>
+              <a:t>・ X / Insta / Threads / FB / LINE で 1-click シェア</a:t>
+            </a:r>
+          </a:p>
+          <a:p>
+            <a:pPr algn="l">
+              <a:lnSpc>
+                <a:spcPct val="120000"/>
+              </a:lnSpc>
+            </a:pPr>
+            <a:r>
+              <a:rPr sz="1300" b="0">
+                <a:solidFill>
+                  <a:srgbClr val="18181B"/>
+                </a:solidFill>
+                <a:latin typeface="Yu Gothic UI"/>
+              </a:rPr>
+              <a:t>・ 同条件ドライバーのセッティングを参考にできる</a:t>
+            </a:r>
+          </a:p>
+          <a:p>
+            <a:pPr algn="l">
+              <a:lnSpc>
+                <a:spcPct val="120000"/>
+              </a:lnSpc>
+            </a:pPr>
+            <a:r>
+              <a:rPr sz="1300" b="0">
+                <a:solidFill>
+                  <a:srgbClr val="18181B"/>
+                </a:solidFill>
+                <a:latin typeface="Yu Gothic UI"/>
+              </a:rPr>
+              <a:t>・ 前後別タイヤ・気温・路温まで記録できる細かさ</a:t>
+            </a:r>
+          </a:p>
+        </p:txBody>
+      </p:sp>
+      <p:sp>
+        <p:nvSpPr>
+          <p:cNvPr id="8" name="TextBox 7"/>
+          <p:cNvSpPr txBox="1"/>
+          <p:nvPr/>
+        </p:nvSpPr>
+        <p:spPr>
+          <a:xfrm>
+            <a:off x="6400800" y="1828800"/>
+            <a:ext cx="5486400" cy="548640"/>
+          </a:xfrm>
+          <a:prstGeom prst="rect">
+            <a:avLst/>
+          </a:prstGeom>
+          <a:noFill/>
+        </p:spPr>
+        <p:txBody>
+          <a:bodyPr wrap="none">
+            <a:spAutoFit/>
+          </a:bodyPr>
+          <a:lstStyle/>
+          <a:p>
+            <a:pPr algn="l"/>
+            <a:r>
+              <a:rPr sz="1800" b="1">
+                <a:solidFill>
+                  <a:srgbClr val="E10600"/>
+                </a:solidFill>
+                <a:latin typeface="Yu Gothic UI"/>
+              </a:rPr>
+              <a:t>事業者に</a:t>
+            </a:r>
+          </a:p>
+        </p:txBody>
+      </p:sp>
+      <p:sp>
+        <p:nvSpPr>
+          <p:cNvPr id="9" name="TextBox 8"/>
+          <p:cNvSpPr txBox="1"/>
+          <p:nvPr/>
+        </p:nvSpPr>
+        <p:spPr>
+          <a:xfrm>
+            <a:off x="6400800" y="2377440"/>
+            <a:ext cx="5486400" cy="4114800"/>
+          </a:xfrm>
+          <a:prstGeom prst="rect">
+            <a:avLst/>
+          </a:prstGeom>
+          <a:noFill/>
+        </p:spPr>
+        <p:txBody>
+          <a:bodyPr wrap="none">
+            <a:spAutoFit/>
+          </a:bodyPr>
+          <a:lstStyle/>
+          <a:p>
+            <a:pPr algn="l">
+              <a:lnSpc>
+                <a:spcPct val="120000"/>
+              </a:lnSpc>
+            </a:pPr>
+            <a:r>
+              <a:rPr sz="1300" b="0">
+                <a:solidFill>
+                  <a:srgbClr val="18181B"/>
+                </a:solidFill>
+                <a:latin typeface="Yu Gothic UI"/>
+              </a:rPr>
+              <a:t>・ サーキット運営: 公式ページ + 走行会告知 (無料)</a:t>
+            </a:r>
+          </a:p>
+          <a:p>
+            <a:pPr algn="l">
+              <a:lnSpc>
+                <a:spcPct val="120000"/>
+              </a:lnSpc>
+            </a:pPr>
+            <a:r>
+              <a:rPr sz="1300" b="0">
+                <a:solidFill>
+                  <a:srgbClr val="18181B"/>
+                </a:solidFill>
+                <a:latin typeface="Yu Gothic UI"/>
+              </a:rPr>
+              <a:t>・ タイヤ・パーツメーカー: 自社銘柄の使用実績データ</a:t>
+            </a:r>
+          </a:p>
+          <a:p>
+            <a:pPr algn="l">
+              <a:lnSpc>
+                <a:spcPct val="120000"/>
+              </a:lnSpc>
+            </a:pPr>
+            <a:r>
+              <a:rPr sz="1300" b="0">
+                <a:solidFill>
+                  <a:srgbClr val="18181B"/>
+                </a:solidFill>
+                <a:latin typeface="Yu Gothic UI"/>
+              </a:rPr>
+              <a:t>・ イベント主催者: 走行会の集客チャネル</a:t>
+            </a:r>
+          </a:p>
+          <a:p>
+            <a:pPr algn="l">
+              <a:lnSpc>
+                <a:spcPct val="120000"/>
+              </a:lnSpc>
+            </a:pPr>
+            <a:r>
+              <a:rPr sz="1300" b="0">
+                <a:solidFill>
+                  <a:srgbClr val="18181B"/>
+                </a:solidFill>
+                <a:latin typeface="Yu Gothic UI"/>
+              </a:rPr>
+              <a:t>・ 媒体: 走行データの記事引用・共同企画</a:t>
+            </a:r>
+          </a:p>
+        </p:txBody>
+      </p:sp>
+    </p:spTree>
+  </p:cSld>
+  <p:clrMapOvr>
+    <a:masterClrMapping/>
+  </p:clrMapOvr>
+</p:sld>
+</file>
+
+<file path=ppt/slides/slide3.xml><?xml version="1.0" encoding="utf-8"?>
+<p:sld xmlns:a="http://schemas.openxmlformats.org/drawingml/2006/main" xmlns:p="http://schemas.openxmlformats.org/presentationml/2006/main" xmlns:r="http://schemas.openxmlformats.org/officeDocument/2006/relationships">
+  <p:cSld>
+    <p:spTree>
+      <p:nvGrpSpPr>
+        <p:cNvPr id="1" name=""/>
+        <p:cNvGrpSpPr/>
+        <p:nvPr/>
+      </p:nvGrpSpPr>
+      <p:grpSpPr/>
+      <p:sp>
+        <p:nvSpPr>
+          <p:cNvPr id="2" name="Rectangle 1"/>
+          <p:cNvSpPr/>
+          <p:nvPr/>
+        </p:nvSpPr>
+        <p:spPr>
+          <a:xfrm>
+            <a:off x="0" y="0"/>
+            <a:ext cx="12191695" cy="868680"/>
+          </a:xfrm>
+          <a:prstGeom prst="rect">
+            <a:avLst/>
+          </a:prstGeom>
+          <a:solidFill>
+            <a:srgbClr val="E10600"/>
+          </a:solidFill>
+          <a:ln>
+            <a:noFill/>
+          </a:ln>
+        </p:spPr>
+        <p:style>
+          <a:lnRef idx="1">
+            <a:schemeClr val="accent1"/>
+          </a:lnRef>
+          <a:fillRef idx="3">
+            <a:schemeClr val="accent1"/>
+          </a:fillRef>
+          <a:effectRef idx="2">
+            <a:schemeClr val="accent1"/>
+          </a:effectRef>
+          <a:fontRef idx="minor">
+            <a:schemeClr val="lt1"/>
+          </a:fontRef>
+        </p:style>
+        <p:txBody>
+          <a:bodyPr rtlCol="0" anchor="ctr" lIns="502920" tIns="164592"/>
+          <a:lstStyle/>
+          <a:p>
+            <a:pPr algn="l"/>
+            <a:r>
+              <a:rPr sz="2200" b="1">
+                <a:solidFill>
+                  <a:srgbClr val="FFFFFF"/>
+                </a:solidFill>
+                <a:latin typeface="Yu Gothic UI"/>
+              </a:rPr>
+              <a:t>2.  市場背景と解決アプローチ</a:t>
+            </a:r>
+          </a:p>
+        </p:txBody>
+      </p:sp>
+      <p:pic>
+        <p:nvPicPr>
+          <p:cNvPr id="3" name="Picture 2" descr="logo.png"/>
+          <p:cNvPicPr>
+            <a:picLocks noChangeAspect="1"/>
+          </p:cNvPicPr>
+          <p:nvPr/>
+        </p:nvPicPr>
+        <p:blipFill>
+          <a:blip r:embed="rId2"/>
+          <a:stretch>
+            <a:fillRect/>
+          </a:stretch>
+        </p:blipFill>
+        <p:spPr>
+          <a:xfrm>
+            <a:off x="11094123" y="228600"/>
+            <a:ext cx="777532" cy="411480"/>
+          </a:xfrm>
+          <a:prstGeom prst="rect">
+            <a:avLst/>
+          </a:prstGeom>
+        </p:spPr>
+      </p:pic>
+      <p:sp>
+        <p:nvSpPr>
+          <p:cNvPr id="4" name="TextBox 3"/>
+          <p:cNvSpPr txBox="1"/>
+          <p:nvPr/>
+        </p:nvSpPr>
+        <p:spPr>
+          <a:xfrm>
+            <a:off x="0" y="6446520"/>
+            <a:ext cx="12191695" cy="365760"/>
+          </a:xfrm>
+          <a:prstGeom prst="rect">
+            <a:avLst/>
+          </a:prstGeom>
+          <a:noFill/>
+        </p:spPr>
+        <p:txBody>
+          <a:bodyPr wrap="none">
+            <a:spAutoFit/>
+          </a:bodyPr>
+          <a:lstStyle/>
+          <a:p>
+            <a:pPr algn="ctr"/>
+            <a:r>
+              <a:rPr sz="900" b="0">
+                <a:solidFill>
+                  <a:srgbClr val="71717A"/>
+                </a:solidFill>
+                <a:latin typeface="Yu Gothic UI"/>
+              </a:rPr>
+              <a:t>走ログ (Hashilog)  v1.0  /  RBS  /  hashilog2024@gmail.com  /  https://hashilog.jp</a:t>
+            </a:r>
+          </a:p>
+        </p:txBody>
+      </p:sp>
+      <p:sp>
+        <p:nvSpPr>
+          <p:cNvPr id="5" name="TextBox 4"/>
+          <p:cNvSpPr txBox="1"/>
+          <p:nvPr/>
+        </p:nvSpPr>
+        <p:spPr>
+          <a:xfrm>
+            <a:off x="640080" y="1097280"/>
+            <a:ext cx="10972800" cy="731520"/>
+          </a:xfrm>
+          <a:prstGeom prst="rect">
+            <a:avLst/>
+          </a:prstGeom>
+          <a:noFill/>
+        </p:spPr>
+        <p:txBody>
+          <a:bodyPr wrap="none">
+            <a:spAutoFit/>
+          </a:bodyPr>
+          <a:lstStyle/>
+          <a:p>
+            <a:pPr algn="l"/>
+            <a:r>
+              <a:rPr sz="1400" b="0">
+                <a:solidFill>
+                  <a:srgbClr val="3F3F46"/>
+                </a:solidFill>
+                <a:latin typeface="Yu Gothic UI"/>
+              </a:rPr>
+              <a:t>国内 30+ サーキット、参加層は数万人。30〜50 代男性中心で可処分所得が高い。</a:t>
+            </a:r>
+          </a:p>
+        </p:txBody>
+      </p:sp>
+      <p:sp>
+        <p:nvSpPr>
+          <p:cNvPr id="6" name="TextBox 5"/>
+          <p:cNvSpPr txBox="1"/>
+          <p:nvPr/>
+        </p:nvSpPr>
+        <p:spPr>
+          <a:xfrm>
+            <a:off x="640080" y="1828800"/>
+            <a:ext cx="5486400" cy="548640"/>
+          </a:xfrm>
+          <a:prstGeom prst="rect">
+            <a:avLst/>
+          </a:prstGeom>
+          <a:noFill/>
+        </p:spPr>
+        <p:txBody>
+          <a:bodyPr wrap="none">
+            <a:spAutoFit/>
+          </a:bodyPr>
+          <a:lstStyle/>
+          <a:p>
+            <a:pPr algn="l"/>
+            <a:r>
+              <a:rPr sz="1800" b="1">
+                <a:solidFill>
+                  <a:srgbClr val="E10600"/>
+                </a:solidFill>
+                <a:latin typeface="Yu Gothic UI"/>
+              </a:rPr>
+              <a:t>現状の課題</a:t>
+            </a:r>
+          </a:p>
+        </p:txBody>
+      </p:sp>
+      <p:sp>
+        <p:nvSpPr>
+          <p:cNvPr id="7" name="TextBox 6"/>
+          <p:cNvSpPr txBox="1"/>
+          <p:nvPr/>
+        </p:nvSpPr>
+        <p:spPr>
+          <a:xfrm>
+            <a:off x="640080" y="2377440"/>
+            <a:ext cx="5486400" cy="4114800"/>
+          </a:xfrm>
+          <a:prstGeom prst="rect">
+            <a:avLst/>
+          </a:prstGeom>
+          <a:noFill/>
+        </p:spPr>
+        <p:txBody>
+          <a:bodyPr wrap="none">
+            <a:spAutoFit/>
+          </a:bodyPr>
+          <a:lstStyle/>
+          <a:p>
+            <a:pPr algn="l">
+              <a:lnSpc>
+                <a:spcPct val="120000"/>
+              </a:lnSpc>
+            </a:pPr>
+            <a:r>
+              <a:rPr sz="1300" b="0">
+                <a:solidFill>
+                  <a:srgbClr val="18181B"/>
+                </a:solidFill>
+                <a:latin typeface="Yu Gothic UI"/>
+              </a:rPr>
+              <a:t>・ 個人ブログ・SNS のスクショ・LINE グループに散在</a:t>
+            </a:r>
+          </a:p>
+          <a:p>
+            <a:pPr algn="l">
+              <a:lnSpc>
+                <a:spcPct val="120000"/>
+              </a:lnSpc>
+            </a:pPr>
+            <a:r>
+              <a:rPr sz="1300" b="0">
+                <a:solidFill>
+                  <a:srgbClr val="18181B"/>
+                </a:solidFill>
+                <a:latin typeface="Yu Gothic UI"/>
+              </a:rPr>
+              <a:t>・ サーキット間で形式バラバラ、車両/タイヤと紐づかない</a:t>
+            </a:r>
+          </a:p>
+          <a:p>
+            <a:pPr algn="l">
+              <a:lnSpc>
+                <a:spcPct val="120000"/>
+              </a:lnSpc>
+            </a:pPr>
+            <a:r>
+              <a:rPr sz="1300" b="0">
+                <a:solidFill>
+                  <a:srgbClr val="18181B"/>
+                </a:solidFill>
+                <a:latin typeface="Yu Gothic UI"/>
+              </a:rPr>
+              <a:t>・ 走行会の Excel は主催者依存、横断比較できない</a:t>
+            </a:r>
+          </a:p>
+          <a:p>
+            <a:pPr algn="l">
+              <a:lnSpc>
+                <a:spcPct val="120000"/>
+              </a:lnSpc>
+            </a:pPr>
+            <a:r>
+              <a:rPr sz="1300" b="0">
+                <a:solidFill>
+                  <a:srgbClr val="18181B"/>
+                </a:solidFill>
+                <a:latin typeface="Yu Gothic UI"/>
+              </a:rPr>
+              <a:t>・ 過去データに辿り着けない、検索性ゼロ</a:t>
+            </a:r>
+          </a:p>
+        </p:txBody>
+      </p:sp>
+      <p:sp>
+        <p:nvSpPr>
+          <p:cNvPr id="8" name="TextBox 7"/>
+          <p:cNvSpPr txBox="1"/>
+          <p:nvPr/>
+        </p:nvSpPr>
+        <p:spPr>
+          <a:xfrm>
+            <a:off x="6400800" y="1828800"/>
+            <a:ext cx="5486400" cy="548640"/>
+          </a:xfrm>
+          <a:prstGeom prst="rect">
+            <a:avLst/>
+          </a:prstGeom>
+          <a:noFill/>
+        </p:spPr>
+        <p:txBody>
+          <a:bodyPr wrap="none">
+            <a:spAutoFit/>
+          </a:bodyPr>
+          <a:lstStyle/>
+          <a:p>
+            <a:pPr algn="l"/>
+            <a:r>
+              <a:rPr sz="1800" b="1">
+                <a:solidFill>
+                  <a:srgbClr val="E10600"/>
+                </a:solidFill>
+                <a:latin typeface="Yu Gothic UI"/>
+              </a:rPr>
+              <a:t>走ログのアプローチ</a:t>
+            </a:r>
+          </a:p>
+        </p:txBody>
+      </p:sp>
+      <p:sp>
+        <p:nvSpPr>
+          <p:cNvPr id="9" name="TextBox 8"/>
+          <p:cNvSpPr txBox="1"/>
+          <p:nvPr/>
+        </p:nvSpPr>
+        <p:spPr>
+          <a:xfrm>
+            <a:off x="6400800" y="2377440"/>
+            <a:ext cx="5486400" cy="4114800"/>
+          </a:xfrm>
+          <a:prstGeom prst="rect">
+            <a:avLst/>
+          </a:prstGeom>
+          <a:noFill/>
+        </p:spPr>
+        <p:txBody>
+          <a:bodyPr wrap="none">
+            <a:spAutoFit/>
+          </a:bodyPr>
+          <a:lstStyle/>
+          <a:p>
+            <a:pPr algn="l">
+              <a:lnSpc>
+                <a:spcPct val="120000"/>
+              </a:lnSpc>
+            </a:pPr>
+            <a:r>
+              <a:rPr sz="1300" b="0">
+                <a:solidFill>
+                  <a:srgbClr val="18181B"/>
+                </a:solidFill>
+                <a:latin typeface="Yu Gothic UI"/>
+              </a:rPr>
+              <a:t>・ 検索可能な構造化フォーマット (多次元フィルター)</a:t>
+            </a:r>
+          </a:p>
+          <a:p>
+            <a:pPr algn="l">
+              <a:lnSpc>
+                <a:spcPct val="120000"/>
+              </a:lnSpc>
+            </a:pPr>
+            <a:r>
+              <a:rPr sz="1300" b="0">
+                <a:solidFill>
+                  <a:srgbClr val="18181B"/>
+                </a:solidFill>
+                <a:latin typeface="Yu Gothic UI"/>
+              </a:rPr>
+              <a:t>・ エビデンス文化 (計測機器・モニター写真の添付)</a:t>
+            </a:r>
+          </a:p>
+          <a:p>
+            <a:pPr algn="l">
+              <a:lnSpc>
+                <a:spcPct val="120000"/>
+              </a:lnSpc>
+            </a:pPr>
+            <a:r>
+              <a:rPr sz="1300" b="0">
+                <a:solidFill>
+                  <a:srgbClr val="18181B"/>
+                </a:solidFill>
+                <a:latin typeface="Yu Gothic UI"/>
+              </a:rPr>
+              <a:t>・ SNS 連携で OGP 最適化、外部拡散を前提</a:t>
+            </a:r>
+          </a:p>
+          <a:p>
+            <a:pPr algn="l">
+              <a:lnSpc>
+                <a:spcPct val="120000"/>
+              </a:lnSpc>
+            </a:pPr>
+            <a:r>
+              <a:rPr sz="1300" b="0">
+                <a:solidFill>
+                  <a:srgbClr val="18181B"/>
+                </a:solidFill>
+                <a:latin typeface="Yu Gothic UI"/>
+              </a:rPr>
+              <a:t>・ サーキット運営者の公式ページを横断的に統合</a:t>
+            </a:r>
+          </a:p>
+        </p:txBody>
+      </p:sp>
+    </p:spTree>
+  </p:cSld>
+  <p:clrMapOvr>
+    <a:masterClrMapping/>
+  </p:clrMapOvr>
+</p:sld>
+</file>
+
+<file path=ppt/slides/slide4.xml><?xml version="1.0" encoding="utf-8"?>
+<p:sld xmlns:a="http://schemas.openxmlformats.org/drawingml/2006/main" xmlns:p="http://schemas.openxmlformats.org/presentationml/2006/main" xmlns:r="http://schemas.openxmlformats.org/officeDocument/2006/relationships">
+  <p:cSld>
+    <p:spTree>
+      <p:nvGrpSpPr>
+        <p:cNvPr id="1" name=""/>
+        <p:cNvGrpSpPr/>
+        <p:nvPr/>
+      </p:nvGrpSpPr>
+      <p:grpSpPr/>
+      <p:sp>
+        <p:nvSpPr>
+          <p:cNvPr id="2" name="Rectangle 1"/>
+          <p:cNvSpPr/>
+          <p:nvPr/>
+        </p:nvSpPr>
+        <p:spPr>
+          <a:xfrm>
+            <a:off x="0" y="0"/>
+            <a:ext cx="12191695" cy="868680"/>
+          </a:xfrm>
+          <a:prstGeom prst="rect">
+            <a:avLst/>
+          </a:prstGeom>
+          <a:solidFill>
+            <a:srgbClr val="E10600"/>
+          </a:solidFill>
+          <a:ln>
+            <a:noFill/>
+          </a:ln>
+        </p:spPr>
+        <p:style>
+          <a:lnRef idx="1">
+            <a:schemeClr val="accent1"/>
+          </a:lnRef>
+          <a:fillRef idx="3">
+            <a:schemeClr val="accent1"/>
+          </a:fillRef>
+          <a:effectRef idx="2">
+            <a:schemeClr val="accent1"/>
+          </a:effectRef>
+          <a:fontRef idx="minor">
+            <a:schemeClr val="lt1"/>
+          </a:fontRef>
+        </p:style>
+        <p:txBody>
+          <a:bodyPr rtlCol="0" anchor="ctr" lIns="502920" tIns="164592"/>
+          <a:lstStyle/>
+          <a:p>
+            <a:pPr algn="l"/>
+            <a:r>
+              <a:rPr sz="2200" b="1">
+                <a:solidFill>
+                  <a:srgbClr val="FFFFFF"/>
+                </a:solidFill>
+                <a:latin typeface="Yu Gothic UI"/>
+              </a:rPr>
+              <a:t>3.  実装済み機能ハイライト</a:t>
+            </a:r>
+          </a:p>
+        </p:txBody>
+      </p:sp>
+      <p:pic>
+        <p:nvPicPr>
+          <p:cNvPr id="3" name="Picture 2" descr="logo.png"/>
+          <p:cNvPicPr>
+            <a:picLocks noChangeAspect="1"/>
+          </p:cNvPicPr>
+          <p:nvPr/>
+        </p:nvPicPr>
+        <p:blipFill>
+          <a:blip r:embed="rId2"/>
+          <a:stretch>
+            <a:fillRect/>
+          </a:stretch>
+        </p:blipFill>
+        <p:spPr>
+          <a:xfrm>
+            <a:off x="11094123" y="228600"/>
+            <a:ext cx="777532" cy="411480"/>
+          </a:xfrm>
+          <a:prstGeom prst="rect">
+            <a:avLst/>
+          </a:prstGeom>
+        </p:spPr>
+      </p:pic>
+      <p:sp>
+        <p:nvSpPr>
+          <p:cNvPr id="4" name="TextBox 3"/>
+          <p:cNvSpPr txBox="1"/>
+          <p:nvPr/>
+        </p:nvSpPr>
+        <p:spPr>
+          <a:xfrm>
+            <a:off x="0" y="6446520"/>
+            <a:ext cx="12191695" cy="365760"/>
+          </a:xfrm>
+          <a:prstGeom prst="rect">
+            <a:avLst/>
+          </a:prstGeom>
+          <a:noFill/>
+        </p:spPr>
+        <p:txBody>
+          <a:bodyPr wrap="none">
+            <a:spAutoFit/>
+          </a:bodyPr>
+          <a:lstStyle/>
+          <a:p>
+            <a:pPr algn="ctr"/>
+            <a:r>
+              <a:rPr sz="900" b="0">
+                <a:solidFill>
+                  <a:srgbClr val="71717A"/>
+                </a:solidFill>
+                <a:latin typeface="Yu Gothic UI"/>
+              </a:rPr>
+              <a:t>走ログ (Hashilog)  v1.0  /  RBS  /  hashilog2024@gmail.com  /  https://hashilog.jp</a:t>
+            </a:r>
+          </a:p>
+        </p:txBody>
+      </p:sp>
+      <p:sp>
+        <p:nvSpPr>
+          <p:cNvPr id="5" name="TextBox 4"/>
+          <p:cNvSpPr txBox="1"/>
+          <p:nvPr/>
+        </p:nvSpPr>
+        <p:spPr>
+          <a:xfrm>
+            <a:off x="640080" y="1097280"/>
+            <a:ext cx="10972800" cy="731520"/>
+          </a:xfrm>
+          <a:prstGeom prst="rect">
+            <a:avLst/>
+          </a:prstGeom>
+          <a:noFill/>
+        </p:spPr>
+        <p:txBody>
+          <a:bodyPr wrap="none">
+            <a:spAutoFit/>
+          </a:bodyPr>
+          <a:lstStyle/>
+          <a:p>
+            <a:pPr algn="l"/>
+            <a:r>
+              <a:rPr sz="1400" b="0">
+                <a:solidFill>
+                  <a:srgbClr val="3F3F46"/>
+                </a:solidFill>
+                <a:latin typeface="Yu Gothic UI"/>
+              </a:rPr>
+              <a:t>「設計だけ」ではなく、すでに本番稼働しているプロダクト (2026年5月時点)。</a:t>
+            </a:r>
+          </a:p>
+        </p:txBody>
+      </p:sp>
+      <p:sp>
+        <p:nvSpPr>
+          <p:cNvPr id="6" name="TextBox 5"/>
+          <p:cNvSpPr txBox="1"/>
+          <p:nvPr/>
+        </p:nvSpPr>
+        <p:spPr>
+          <a:xfrm>
+            <a:off x="640080" y="1828800"/>
+            <a:ext cx="3474720" cy="548640"/>
+          </a:xfrm>
+          <a:prstGeom prst="rect">
+            <a:avLst/>
+          </a:prstGeom>
+          <a:noFill/>
+        </p:spPr>
+        <p:txBody>
+          <a:bodyPr wrap="none">
+            <a:spAutoFit/>
+          </a:bodyPr>
+          <a:lstStyle/>
+          <a:p>
+            <a:pPr algn="l"/>
+            <a:r>
+              <a:rPr sz="1500" b="1">
+                <a:solidFill>
+                  <a:srgbClr val="E10600"/>
+                </a:solidFill>
+                <a:latin typeface="Yu Gothic UI"/>
+              </a:rPr>
+              <a:t>ユーザー / 愛車</a:t>
+            </a:r>
+          </a:p>
+        </p:txBody>
+      </p:sp>
+      <p:sp>
+        <p:nvSpPr>
+          <p:cNvPr id="7" name="TextBox 6"/>
+          <p:cNvSpPr txBox="1"/>
+          <p:nvPr/>
+        </p:nvSpPr>
+        <p:spPr>
+          <a:xfrm>
+            <a:off x="640080" y="2331720"/>
+            <a:ext cx="3474720" cy="4114800"/>
+          </a:xfrm>
+          <a:prstGeom prst="rect">
+            <a:avLst/>
+          </a:prstGeom>
+          <a:noFill/>
+        </p:spPr>
+        <p:txBody>
+          <a:bodyPr wrap="none">
+            <a:spAutoFit/>
+          </a:bodyPr>
+          <a:lstStyle/>
+          <a:p>
+            <a:pPr algn="l">
+              <a:lnSpc>
+                <a:spcPct val="120000"/>
+              </a:lnSpc>
+            </a:pPr>
+            <a:r>
+              <a:rPr sz="1100" b="0">
+                <a:solidFill>
+                  <a:srgbClr val="18181B"/>
+                </a:solidFill>
+                <a:latin typeface="Yu Gothic UI"/>
+              </a:rPr>
+              <a:t>・ メール+パスワード認証、退会で完全削除</a:t>
+            </a:r>
+          </a:p>
+          <a:p>
+            <a:pPr algn="l">
+              <a:lnSpc>
+                <a:spcPct val="120000"/>
+              </a:lnSpc>
+            </a:pPr>
+            <a:r>
+              <a:rPr sz="1100" b="0">
+                <a:solidFill>
+                  <a:srgbClr val="18181B"/>
+                </a:solidFill>
+                <a:latin typeface="Yu Gothic UI"/>
+              </a:rPr>
+              <a:t>・ プロフィール: 自己紹介・都道府県・SNS 6 種</a:t>
+            </a:r>
+          </a:p>
+          <a:p>
+            <a:pPr algn="l">
+              <a:lnSpc>
+                <a:spcPct val="120000"/>
+              </a:lnSpc>
+            </a:pPr>
+            <a:r>
+              <a:rPr sz="1100" b="0">
+                <a:solidFill>
+                  <a:srgbClr val="18181B"/>
+                </a:solidFill>
+                <a:latin typeface="Yu Gothic UI"/>
+              </a:rPr>
+              <a:t>・ マイガレージ: 複数台、改造内容を分野別に</a:t>
+            </a:r>
+          </a:p>
+          <a:p>
+            <a:pPr algn="l">
+              <a:lnSpc>
+                <a:spcPct val="120000"/>
+              </a:lnSpc>
+            </a:pPr>
+            <a:r>
+              <a:rPr sz="1100" b="0">
+                <a:solidFill>
+                  <a:srgbClr val="18181B"/>
+                </a:solidFill>
+                <a:latin typeface="Yu Gothic UI"/>
+              </a:rPr>
+              <a:t>・ 写真ギャラリー (カバー + 複数枚)</a:t>
+            </a:r>
+          </a:p>
+        </p:txBody>
+      </p:sp>
+      <p:sp>
+        <p:nvSpPr>
+          <p:cNvPr id="8" name="TextBox 7"/>
+          <p:cNvSpPr txBox="1"/>
+          <p:nvPr/>
+        </p:nvSpPr>
+        <p:spPr>
+          <a:xfrm>
+            <a:off x="4343400" y="1828800"/>
+            <a:ext cx="3474720" cy="548640"/>
+          </a:xfrm>
+          <a:prstGeom prst="rect">
+            <a:avLst/>
+          </a:prstGeom>
+          <a:noFill/>
+        </p:spPr>
+        <p:txBody>
+          <a:bodyPr wrap="none">
+            <a:spAutoFit/>
+          </a:bodyPr>
+          <a:lstStyle/>
+          <a:p>
+            <a:pPr algn="l"/>
+            <a:r>
+              <a:rPr sz="1500" b="1">
+                <a:solidFill>
+                  <a:srgbClr val="E10600"/>
+                </a:solidFill>
+                <a:latin typeface="Yu Gothic UI"/>
+              </a:rPr>
+              <a:t>タイム投稿 (中核)</a:t>
+            </a:r>
+          </a:p>
+        </p:txBody>
+      </p:sp>
+      <p:sp>
+        <p:nvSpPr>
+          <p:cNvPr id="9" name="TextBox 8"/>
+          <p:cNvSpPr txBox="1"/>
+          <p:nvPr/>
+        </p:nvSpPr>
+        <p:spPr>
+          <a:xfrm>
+            <a:off x="4343400" y="2331720"/>
+            <a:ext cx="3474720" cy="4114800"/>
+          </a:xfrm>
+          <a:prstGeom prst="rect">
+            <a:avLst/>
+          </a:prstGeom>
+          <a:noFill/>
+        </p:spPr>
+        <p:txBody>
+          <a:bodyPr wrap="none">
+            <a:spAutoFit/>
+          </a:bodyPr>
+          <a:lstStyle/>
+          <a:p>
+            <a:pPr algn="l">
+              <a:lnSpc>
+                <a:spcPct val="120000"/>
+              </a:lnSpc>
+            </a:pPr>
+            <a:r>
+              <a:rPr sz="1100" b="0">
+                <a:solidFill>
+                  <a:srgbClr val="18181B"/>
+                </a:solidFill>
+                <a:latin typeface="Yu Gothic UI"/>
+              </a:rPr>
+              <a:t>・ 総合タイム、セクター 1〜4、最高速</a:t>
+            </a:r>
+          </a:p>
+          <a:p>
+            <a:pPr algn="l">
+              <a:lnSpc>
+                <a:spcPct val="120000"/>
+              </a:lnSpc>
+            </a:pPr>
+            <a:r>
+              <a:rPr sz="1100" b="0">
+                <a:solidFill>
+                  <a:srgbClr val="18181B"/>
+                </a:solidFill>
+                <a:latin typeface="Yu Gothic UI"/>
+              </a:rPr>
+              <a:t>・ 天候・路面・気温・路温</a:t>
+            </a:r>
+          </a:p>
+          <a:p>
+            <a:pPr algn="l">
+              <a:lnSpc>
+                <a:spcPct val="120000"/>
+              </a:lnSpc>
+            </a:pPr>
+            <a:r>
+              <a:rPr sz="1100" b="0">
+                <a:solidFill>
+                  <a:srgbClr val="18181B"/>
+                </a:solidFill>
+                <a:latin typeface="Yu Gothic UI"/>
+              </a:rPr>
+              <a:t>・ 前後別タイヤ銘柄・サイズ (差別化)</a:t>
+            </a:r>
+          </a:p>
+          <a:p>
+            <a:pPr algn="l">
+              <a:lnSpc>
+                <a:spcPct val="120000"/>
+              </a:lnSpc>
+            </a:pPr>
+            <a:r>
+              <a:rPr sz="1100" b="0">
+                <a:solidFill>
+                  <a:srgbClr val="18181B"/>
+                </a:solidFill>
+                <a:latin typeface="Yu Gothic UI"/>
+              </a:rPr>
+              <a:t>・ ユーザー入力銘柄は自動登録</a:t>
+            </a:r>
+          </a:p>
+          <a:p>
+            <a:pPr algn="l">
+              <a:lnSpc>
+                <a:spcPct val="120000"/>
+              </a:lnSpc>
+            </a:pPr>
+            <a:r>
+              <a:rPr sz="1100" b="0">
+                <a:solidFill>
+                  <a:srgbClr val="18181B"/>
+                </a:solidFill>
+                <a:latin typeface="Yu Gothic UI"/>
+              </a:rPr>
+              <a:t>・ エビデンス写真複数枚、編集・削除可</a:t>
+            </a:r>
+          </a:p>
+        </p:txBody>
+      </p:sp>
+      <p:sp>
+        <p:nvSpPr>
+          <p:cNvPr id="10" name="TextBox 9"/>
+          <p:cNvSpPr txBox="1"/>
+          <p:nvPr/>
+        </p:nvSpPr>
+        <p:spPr>
+          <a:xfrm>
+            <a:off x="8046720" y="1828800"/>
+            <a:ext cx="3474720" cy="548640"/>
+          </a:xfrm>
+          <a:prstGeom prst="rect">
+            <a:avLst/>
+          </a:prstGeom>
+          <a:noFill/>
+        </p:spPr>
+        <p:txBody>
+          <a:bodyPr wrap="none">
+            <a:spAutoFit/>
+          </a:bodyPr>
+          <a:lstStyle/>
+          <a:p>
+            <a:pPr algn="l"/>
+            <a:r>
+              <a:rPr sz="1500" b="1">
+                <a:solidFill>
+                  <a:srgbClr val="E10600"/>
+                </a:solidFill>
+                <a:latin typeface="Yu Gothic UI"/>
+              </a:rPr>
+              <a:t>ランキング / B2B / 信頼性</a:t>
+            </a:r>
+          </a:p>
+        </p:txBody>
+      </p:sp>
+      <p:sp>
+        <p:nvSpPr>
+          <p:cNvPr id="11" name="TextBox 10"/>
+          <p:cNvSpPr txBox="1"/>
+          <p:nvPr/>
+        </p:nvSpPr>
+        <p:spPr>
+          <a:xfrm>
+            <a:off x="8046720" y="2331720"/>
+            <a:ext cx="3474720" cy="4114800"/>
+          </a:xfrm>
+          <a:prstGeom prst="rect">
+            <a:avLst/>
+          </a:prstGeom>
+          <a:noFill/>
+        </p:spPr>
+        <p:txBody>
+          <a:bodyPr wrap="none">
+            <a:spAutoFit/>
+          </a:bodyPr>
+          <a:lstStyle/>
+          <a:p>
+            <a:pPr algn="l">
+              <a:lnSpc>
+                <a:spcPct val="120000"/>
+              </a:lnSpc>
+            </a:pPr>
+            <a:r>
+              <a:rPr sz="1100" b="0">
+                <a:solidFill>
+                  <a:srgbClr val="18181B"/>
+                </a:solidFill>
+                <a:latin typeface="Yu Gothic UI"/>
+              </a:rPr>
+              <a:t>・ サーキット × 車種 × タイヤで多次元フィルター</a:t>
+            </a:r>
+          </a:p>
+          <a:p>
+            <a:pPr algn="l">
+              <a:lnSpc>
+                <a:spcPct val="120000"/>
+              </a:lnSpc>
+            </a:pPr>
+            <a:r>
+              <a:rPr sz="1100" b="0">
+                <a:solidFill>
+                  <a:srgbClr val="18181B"/>
+                </a:solidFill>
+                <a:latin typeface="Yu Gothic UI"/>
+              </a:rPr>
+              <a:t>・ 全国 25+ サーキット登録済み</a:t>
+            </a:r>
+          </a:p>
+          <a:p>
+            <a:pPr algn="l">
+              <a:lnSpc>
+                <a:spcPct val="120000"/>
+              </a:lnSpc>
+            </a:pPr>
+            <a:r>
+              <a:rPr sz="1100" b="0">
+                <a:solidFill>
+                  <a:srgbClr val="18181B"/>
+                </a:solidFill>
+                <a:latin typeface="Yu Gothic UI"/>
+              </a:rPr>
+              <a:t>・ サーキット運営者の公式アカウント・告知機能</a:t>
+            </a:r>
+          </a:p>
+          <a:p>
+            <a:pPr algn="l">
+              <a:lnSpc>
+                <a:spcPct val="120000"/>
+              </a:lnSpc>
+            </a:pPr>
+            <a:r>
+              <a:rPr sz="1100" b="0">
+                <a:solidFill>
+                  <a:srgbClr val="18181B"/>
+                </a:solidFill>
+                <a:latin typeface="Yu Gothic UI"/>
+              </a:rPr>
+              <a:t>・ OGP/JSON-LD/PWA/sitemap 完備</a:t>
+            </a:r>
+          </a:p>
+          <a:p>
+            <a:pPr algn="l">
+              <a:lnSpc>
+                <a:spcPct val="120000"/>
+              </a:lnSpc>
+            </a:pPr>
+            <a:r>
+              <a:rPr sz="1100" b="0">
+                <a:solidFill>
+                  <a:srgbClr val="18181B"/>
+                </a:solidFill>
+                <a:latin typeface="Yu Gothic UI"/>
+              </a:rPr>
+              <a:t>・ Vercel + Supabase Tokyo (国内データ保管)</a:t>
+            </a:r>
+          </a:p>
+        </p:txBody>
+      </p:sp>
+    </p:spTree>
+  </p:cSld>
+  <p:clrMapOvr>
+    <a:masterClrMapping/>
+  </p:clrMapOvr>
+</p:sld>
+</file>
+
+<file path=ppt/slides/slide5.xml><?xml version="1.0" encoding="utf-8"?>
+<p:sld xmlns:a="http://schemas.openxmlformats.org/drawingml/2006/main" xmlns:p="http://schemas.openxmlformats.org/presentationml/2006/main" xmlns:r="http://schemas.openxmlformats.org/officeDocument/2006/relationships">
+  <p:cSld>
+    <p:spTree>
+      <p:nvGrpSpPr>
+        <p:cNvPr id="1" name=""/>
+        <p:cNvGrpSpPr/>
+        <p:nvPr/>
+      </p:nvGrpSpPr>
+      <p:grpSpPr/>
+      <p:sp>
+        <p:nvSpPr>
+          <p:cNvPr id="2" name="Rectangle 1"/>
+          <p:cNvSpPr/>
+          <p:nvPr/>
+        </p:nvSpPr>
+        <p:spPr>
+          <a:xfrm>
+            <a:off x="0" y="0"/>
+            <a:ext cx="12191695" cy="868680"/>
+          </a:xfrm>
+          <a:prstGeom prst="rect">
+            <a:avLst/>
+          </a:prstGeom>
+          <a:solidFill>
+            <a:srgbClr val="E10600"/>
+          </a:solidFill>
+          <a:ln>
+            <a:noFill/>
+          </a:ln>
+        </p:spPr>
+        <p:style>
+          <a:lnRef idx="1">
+            <a:schemeClr val="accent1"/>
+          </a:lnRef>
+          <a:fillRef idx="3">
+            <a:schemeClr val="accent1"/>
+          </a:fillRef>
+          <a:effectRef idx="2">
+            <a:schemeClr val="accent1"/>
+          </a:effectRef>
+          <a:fontRef idx="minor">
+            <a:schemeClr val="lt1"/>
+          </a:fontRef>
+        </p:style>
+        <p:txBody>
+          <a:bodyPr rtlCol="0" anchor="ctr" lIns="502920" tIns="164592"/>
+          <a:lstStyle/>
+          <a:p>
+            <a:pPr algn="l"/>
+            <a:r>
+              <a:rPr sz="2200" b="1">
+                <a:solidFill>
+                  <a:srgbClr val="FFFFFF"/>
+                </a:solidFill>
+                <a:latin typeface="Yu Gothic UI"/>
+              </a:rPr>
+              <a:t>4.  ターゲット</a:t>
+            </a:r>
+          </a:p>
+        </p:txBody>
+      </p:sp>
+      <p:pic>
+        <p:nvPicPr>
+          <p:cNvPr id="3" name="Picture 2" descr="logo.png"/>
+          <p:cNvPicPr>
+            <a:picLocks noChangeAspect="1"/>
+          </p:cNvPicPr>
+          <p:nvPr/>
+        </p:nvPicPr>
+        <p:blipFill>
+          <a:blip r:embed="rId2"/>
+          <a:stretch>
+            <a:fillRect/>
+          </a:stretch>
+        </p:blipFill>
+        <p:spPr>
+          <a:xfrm>
+            <a:off x="11094123" y="228600"/>
+            <a:ext cx="777532" cy="411480"/>
+          </a:xfrm>
+          <a:prstGeom prst="rect">
+            <a:avLst/>
+          </a:prstGeom>
+        </p:spPr>
+      </p:pic>
+      <p:sp>
+        <p:nvSpPr>
+          <p:cNvPr id="4" name="TextBox 3"/>
+          <p:cNvSpPr txBox="1"/>
+          <p:nvPr/>
+        </p:nvSpPr>
+        <p:spPr>
+          <a:xfrm>
+            <a:off x="0" y="6446520"/>
+            <a:ext cx="12191695" cy="365760"/>
+          </a:xfrm>
+          <a:prstGeom prst="rect">
+            <a:avLst/>
+          </a:prstGeom>
+          <a:noFill/>
+        </p:spPr>
+        <p:txBody>
+          <a:bodyPr wrap="none">
+            <a:spAutoFit/>
+          </a:bodyPr>
+          <a:lstStyle/>
+          <a:p>
+            <a:pPr algn="ctr"/>
+            <a:r>
+              <a:rPr sz="900" b="0">
+                <a:solidFill>
+                  <a:srgbClr val="71717A"/>
+                </a:solidFill>
+                <a:latin typeface="Yu Gothic UI"/>
+              </a:rPr>
+              <a:t>走ログ (Hashilog)  v1.0  /  RBS  /  hashilog2024@gmail.com  /  https://hashilog.jp</a:t>
+            </a:r>
+          </a:p>
+        </p:txBody>
+      </p:sp>
+      <p:sp>
+        <p:nvSpPr>
+          <p:cNvPr id="5" name="TextBox 4"/>
+          <p:cNvSpPr txBox="1"/>
+          <p:nvPr/>
+        </p:nvSpPr>
+        <p:spPr>
+          <a:xfrm>
+            <a:off x="640080" y="1097280"/>
+            <a:ext cx="10972800" cy="731520"/>
+          </a:xfrm>
+          <a:prstGeom prst="rect">
+            <a:avLst/>
+          </a:prstGeom>
+          <a:noFill/>
+        </p:spPr>
+        <p:txBody>
+          <a:bodyPr wrap="none">
+            <a:spAutoFit/>
+          </a:bodyPr>
+          <a:lstStyle/>
+          <a:p>
+            <a:pPr algn="l"/>
+            <a:r>
+              <a:rPr sz="1400" b="0">
+                <a:solidFill>
+                  <a:srgbClr val="3F3F46"/>
+                </a:solidFill>
+                <a:latin typeface="Yu Gothic UI"/>
+              </a:rPr>
+              <a:t>ドライバーは可処分所得が高くロイヤリティが高い。B2B は複数業界に展開可能。</a:t>
+            </a:r>
+          </a:p>
+        </p:txBody>
+      </p:sp>
+      <p:sp>
+        <p:nvSpPr>
+          <p:cNvPr id="6" name="TextBox 5"/>
+          <p:cNvSpPr txBox="1"/>
+          <p:nvPr/>
+        </p:nvSpPr>
+        <p:spPr>
+          <a:xfrm>
+            <a:off x="640080" y="1828800"/>
+            <a:ext cx="5486400" cy="548640"/>
+          </a:xfrm>
+          <a:prstGeom prst="rect">
+            <a:avLst/>
+          </a:prstGeom>
+          <a:noFill/>
+        </p:spPr>
+        <p:txBody>
+          <a:bodyPr wrap="none">
+            <a:spAutoFit/>
+          </a:bodyPr>
+          <a:lstStyle/>
+          <a:p>
+            <a:pPr algn="l"/>
+            <a:r>
+              <a:rPr sz="1800" b="1">
+                <a:solidFill>
+                  <a:srgbClr val="E10600"/>
+                </a:solidFill>
+                <a:latin typeface="Yu Gothic UI"/>
+              </a:rPr>
+              <a:t>メインユーザー (ドライバー)</a:t>
+            </a:r>
+          </a:p>
+        </p:txBody>
+      </p:sp>
+      <p:sp>
+        <p:nvSpPr>
+          <p:cNvPr id="7" name="TextBox 6"/>
+          <p:cNvSpPr txBox="1"/>
+          <p:nvPr/>
+        </p:nvSpPr>
+        <p:spPr>
+          <a:xfrm>
+            <a:off x="640080" y="2377440"/>
+            <a:ext cx="5486400" cy="4114800"/>
+          </a:xfrm>
+          <a:prstGeom prst="rect">
+            <a:avLst/>
+          </a:prstGeom>
+          <a:noFill/>
+        </p:spPr>
+        <p:txBody>
+          <a:bodyPr wrap="none">
+            <a:spAutoFit/>
+          </a:bodyPr>
+          <a:lstStyle/>
+          <a:p>
+            <a:pPr algn="l">
+              <a:lnSpc>
+                <a:spcPct val="120000"/>
+              </a:lnSpc>
+            </a:pPr>
+            <a:r>
+              <a:rPr sz="1300" b="0">
+                <a:solidFill>
+                  <a:srgbClr val="18181B"/>
+                </a:solidFill>
+                <a:latin typeface="Yu Gothic UI"/>
+              </a:rPr>
+              <a:t>・ タイムアタッカー: 30〜50 代、年 10〜30 走行日</a:t>
+            </a:r>
+          </a:p>
+          <a:p>
+            <a:pPr algn="l">
+              <a:lnSpc>
+                <a:spcPct val="120000"/>
+              </a:lnSpc>
+            </a:pPr>
+            <a:r>
+              <a:rPr sz="1300" b="0">
+                <a:solidFill>
+                  <a:srgbClr val="18181B"/>
+                </a:solidFill>
+                <a:latin typeface="Yu Gothic UI"/>
+              </a:rPr>
+              <a:t>・ 走行会レギュラー: 月 1〜2 回、エビデンス志向</a:t>
+            </a:r>
+          </a:p>
+          <a:p>
+            <a:pPr algn="l">
+              <a:lnSpc>
+                <a:spcPct val="120000"/>
+              </a:lnSpc>
+            </a:pPr>
+            <a:r>
+              <a:rPr sz="1300" b="0">
+                <a:solidFill>
+                  <a:srgbClr val="18181B"/>
+                </a:solidFill>
+                <a:latin typeface="Yu Gothic UI"/>
+              </a:rPr>
+              <a:t>・ 若手 SNS ネイティブ: 20 代、発信意欲旺盛</a:t>
+            </a:r>
+          </a:p>
+          <a:p>
+            <a:pPr algn="l">
+              <a:lnSpc>
+                <a:spcPct val="120000"/>
+              </a:lnSpc>
+            </a:pPr>
+            <a:r>
+              <a:rPr sz="1300" b="0">
+                <a:solidFill>
+                  <a:srgbClr val="18181B"/>
+                </a:solidFill>
+                <a:latin typeface="Yu Gothic UI"/>
+              </a:rPr>
+              <a:t>・ 耐久・チーム参戦: 同一車両で複数ドライバー比較</a:t>
+            </a:r>
+          </a:p>
+        </p:txBody>
+      </p:sp>
+      <p:sp>
+        <p:nvSpPr>
+          <p:cNvPr id="8" name="TextBox 7"/>
+          <p:cNvSpPr txBox="1"/>
+          <p:nvPr/>
+        </p:nvSpPr>
+        <p:spPr>
+          <a:xfrm>
+            <a:off x="6400800" y="1828800"/>
+            <a:ext cx="5486400" cy="548640"/>
+          </a:xfrm>
+          <a:prstGeom prst="rect">
+            <a:avLst/>
+          </a:prstGeom>
+          <a:noFill/>
+        </p:spPr>
+        <p:txBody>
+          <a:bodyPr wrap="none">
+            <a:spAutoFit/>
+          </a:bodyPr>
+          <a:lstStyle/>
+          <a:p>
+            <a:pPr algn="l"/>
+            <a:r>
+              <a:rPr sz="1800" b="1">
+                <a:solidFill>
+                  <a:srgbClr val="E10600"/>
+                </a:solidFill>
+                <a:latin typeface="Yu Gothic UI"/>
+              </a:rPr>
+              <a:t>B2B パートナー候補</a:t>
+            </a:r>
+          </a:p>
+        </p:txBody>
+      </p:sp>
+      <p:sp>
+        <p:nvSpPr>
+          <p:cNvPr id="9" name="TextBox 8"/>
+          <p:cNvSpPr txBox="1"/>
+          <p:nvPr/>
+        </p:nvSpPr>
+        <p:spPr>
+          <a:xfrm>
+            <a:off x="6400800" y="2377440"/>
+            <a:ext cx="5486400" cy="4114800"/>
+          </a:xfrm>
+          <a:prstGeom prst="rect">
+            <a:avLst/>
+          </a:prstGeom>
+          <a:noFill/>
+        </p:spPr>
+        <p:txBody>
+          <a:bodyPr wrap="none">
+            <a:spAutoFit/>
+          </a:bodyPr>
+          <a:lstStyle/>
+          <a:p>
+            <a:pPr algn="l">
+              <a:lnSpc>
+                <a:spcPct val="120000"/>
+              </a:lnSpc>
+            </a:pPr>
+            <a:r>
+              <a:rPr sz="1300" b="0">
+                <a:solidFill>
+                  <a:srgbClr val="18181B"/>
+                </a:solidFill>
+                <a:latin typeface="Yu Gothic UI"/>
+              </a:rPr>
+              <a:t>・ サーキット運営会社 (公式ページ+告知)</a:t>
+            </a:r>
+          </a:p>
+          <a:p>
+            <a:pPr algn="l">
+              <a:lnSpc>
+                <a:spcPct val="120000"/>
+              </a:lnSpc>
+            </a:pPr>
+            <a:r>
+              <a:rPr sz="1300" b="0">
+                <a:solidFill>
+                  <a:srgbClr val="18181B"/>
+                </a:solidFill>
+                <a:latin typeface="Yu Gothic UI"/>
+              </a:rPr>
+              <a:t>・ タイヤ・パーツメーカー (使用実績データ)</a:t>
+            </a:r>
+          </a:p>
+          <a:p>
+            <a:pPr algn="l">
+              <a:lnSpc>
+                <a:spcPct val="120000"/>
+              </a:lnSpc>
+            </a:pPr>
+            <a:r>
+              <a:rPr sz="1300" b="0">
+                <a:solidFill>
+                  <a:srgbClr val="18181B"/>
+                </a:solidFill>
+                <a:latin typeface="Yu Gothic UI"/>
+              </a:rPr>
+              <a:t>・ 自動車メーカー (車種別サーキット適性)</a:t>
+            </a:r>
+          </a:p>
+          <a:p>
+            <a:pPr algn="l">
+              <a:lnSpc>
+                <a:spcPct val="120000"/>
+              </a:lnSpc>
+            </a:pPr>
+            <a:r>
+              <a:rPr sz="1300" b="0">
+                <a:solidFill>
+                  <a:srgbClr val="18181B"/>
+                </a:solidFill>
+                <a:latin typeface="Yu Gothic UI"/>
+              </a:rPr>
+              <a:t>・ 走行会主催者・モータースポーツ媒体</a:t>
+            </a:r>
+          </a:p>
+          <a:p>
+            <a:pPr algn="l">
+              <a:lnSpc>
+                <a:spcPct val="120000"/>
+              </a:lnSpc>
+            </a:pPr>
+            <a:r>
+              <a:rPr sz="1300" b="0">
+                <a:solidFill>
+                  <a:srgbClr val="18181B"/>
+                </a:solidFill>
+                <a:latin typeface="Yu Gothic UI"/>
+              </a:rPr>
+              <a:t>・ 損保・ファイナンス (ターゲティング広告)</a:t>
+            </a:r>
+          </a:p>
+        </p:txBody>
+      </p:sp>
+    </p:spTree>
+  </p:cSld>
+  <p:clrMapOvr>
+    <a:masterClrMapping/>
+  </p:clrMapOvr>
+</p:sld>
+</file>
+
+<file path=ppt/slides/slide6.xml><?xml version="1.0" encoding="utf-8"?>
+<p:sld xmlns:a="http://schemas.openxmlformats.org/drawingml/2006/main" xmlns:p="http://schemas.openxmlformats.org/presentationml/2006/main" xmlns:r="http://schemas.openxmlformats.org/officeDocument/2006/relationships">
+  <p:cSld>
+    <p:spTree>
+      <p:nvGrpSpPr>
+        <p:cNvPr id="1" name=""/>
+        <p:cNvGrpSpPr/>
+        <p:nvPr/>
+      </p:nvGrpSpPr>
+      <p:grpSpPr/>
+      <p:sp>
+        <p:nvSpPr>
+          <p:cNvPr id="2" name="Rectangle 1"/>
+          <p:cNvSpPr/>
+          <p:nvPr/>
+        </p:nvSpPr>
+        <p:spPr>
+          <a:xfrm>
+            <a:off x="0" y="0"/>
+            <a:ext cx="12191695" cy="868680"/>
+          </a:xfrm>
+          <a:prstGeom prst="rect">
+            <a:avLst/>
+          </a:prstGeom>
+          <a:solidFill>
+            <a:srgbClr val="E10600"/>
+          </a:solidFill>
+          <a:ln>
+            <a:noFill/>
+          </a:ln>
+        </p:spPr>
+        <p:style>
+          <a:lnRef idx="1">
+            <a:schemeClr val="accent1"/>
+          </a:lnRef>
+          <a:fillRef idx="3">
+            <a:schemeClr val="accent1"/>
+          </a:fillRef>
+          <a:effectRef idx="2">
+            <a:schemeClr val="accent1"/>
+          </a:effectRef>
+          <a:fontRef idx="minor">
+            <a:schemeClr val="lt1"/>
+          </a:fontRef>
+        </p:style>
+        <p:txBody>
+          <a:bodyPr rtlCol="0" anchor="ctr" lIns="502920" tIns="164592"/>
+          <a:lstStyle/>
+          <a:p>
+            <a:pPr algn="l"/>
+            <a:r>
+              <a:rPr sz="2200" b="1">
+                <a:solidFill>
+                  <a:srgbClr val="FFFFFF"/>
+                </a:solidFill>
+                <a:latin typeface="Yu Gothic UI"/>
+              </a:rPr>
+              <a:t>5.  収益化モデル</a:t>
+            </a:r>
+          </a:p>
+        </p:txBody>
+      </p:sp>
+      <p:pic>
+        <p:nvPicPr>
+          <p:cNvPr id="3" name="Picture 2" descr="logo.png"/>
+          <p:cNvPicPr>
+            <a:picLocks noChangeAspect="1"/>
+          </p:cNvPicPr>
+          <p:nvPr/>
+        </p:nvPicPr>
+        <p:blipFill>
+          <a:blip r:embed="rId2"/>
+          <a:stretch>
+            <a:fillRect/>
+          </a:stretch>
+        </p:blipFill>
+        <p:spPr>
+          <a:xfrm>
+            <a:off x="11094123" y="228600"/>
+            <a:ext cx="777532" cy="411480"/>
+          </a:xfrm>
+          <a:prstGeom prst="rect">
+            <a:avLst/>
+          </a:prstGeom>
+        </p:spPr>
+      </p:pic>
+      <p:sp>
+        <p:nvSpPr>
+          <p:cNvPr id="4" name="TextBox 3"/>
+          <p:cNvSpPr txBox="1"/>
+          <p:nvPr/>
+        </p:nvSpPr>
+        <p:spPr>
+          <a:xfrm>
+            <a:off x="0" y="6446520"/>
+            <a:ext cx="12191695" cy="365760"/>
+          </a:xfrm>
+          <a:prstGeom prst="rect">
+            <a:avLst/>
+          </a:prstGeom>
+          <a:noFill/>
+        </p:spPr>
+        <p:txBody>
+          <a:bodyPr wrap="none">
+            <a:spAutoFit/>
+          </a:bodyPr>
+          <a:lstStyle/>
+          <a:p>
+            <a:pPr algn="ctr"/>
+            <a:r>
+              <a:rPr sz="900" b="0">
+                <a:solidFill>
+                  <a:srgbClr val="71717A"/>
+                </a:solidFill>
+                <a:latin typeface="Yu Gothic UI"/>
+              </a:rPr>
+              <a:t>走ログ (Hashilog)  v1.0  /  RBS  /  hashilog2024@gmail.com  /  https://hashilog.jp</a:t>
+            </a:r>
+          </a:p>
+        </p:txBody>
+      </p:sp>
+      <p:sp>
+        <p:nvSpPr>
+          <p:cNvPr id="5" name="TextBox 4"/>
+          <p:cNvSpPr txBox="1"/>
+          <p:nvPr/>
+        </p:nvSpPr>
+        <p:spPr>
+          <a:xfrm>
+            <a:off x="640080" y="1097280"/>
+            <a:ext cx="10972800" cy="731520"/>
+          </a:xfrm>
+          <a:prstGeom prst="rect">
+            <a:avLst/>
+          </a:prstGeom>
+          <a:noFill/>
+        </p:spPr>
+        <p:txBody>
+          <a:bodyPr wrap="none">
+            <a:spAutoFit/>
+          </a:bodyPr>
+          <a:lstStyle/>
+          <a:p>
+            <a:pPr algn="l"/>
+            <a:r>
+              <a:rPr sz="1400" b="0">
+                <a:solidFill>
+                  <a:srgbClr val="3F3F46"/>
+                </a:solidFill>
+                <a:latin typeface="Yu Gothic UI"/>
+              </a:rPr>
+              <a:t>コア機能は永久無料を維持。Stripe 課金基盤実装済 (フラグでON/OFF)。</a:t>
             </a:r>
           </a:p>
         </p:txBody>
       </p:sp>
       <p:graphicFrame>
         <p:nvGraphicFramePr>
-          <p:cNvPr id="4" name="Table 3"/>
+          <p:cNvPr id="6" name="Table 5"/>
           <p:cNvGraphicFramePr>
             <a:graphicFrameLocks noGrp="1"/>
           </p:cNvGraphicFramePr>
           <p:nvPr/>
         </p:nvGraphicFramePr>
         <p:xfrm>
-          <a:off x="640080" y="914400"/>
-          <a:ext cx="10881360" cy="2880360"/>
+          <a:off x="640080" y="1828800"/>
+          <a:ext cx="10881360" cy="3337560"/>
         </p:xfrm>
         <a:graphic>
           <a:graphicData uri="http://schemas.openxmlformats.org/drawingml/2006/table">
@@ -3387,10 +5558,11 @@
                 <a:tableStyleId>{5C22544A-7EE6-4342-B048-85BDC9FD1C3A}</a:tableStyleId>
               </a:tblPr>
               <a:tblGrid>
-                <a:gridCol w="5440680"/>
-                <a:gridCol w="5440680"/>
+                <a:gridCol w="1828800"/>
+                <a:gridCol w="3291840"/>
+                <a:gridCol w="5760720"/>
               </a:tblGrid>
-              <a:tr h="411480">
+              <a:tr h="417195">
                 <a:tc>
                   <a:txBody>
                     <a:bodyPr/>
@@ -3403,7 +5575,7 @@
                           </a:solidFill>
                           <a:latin typeface="Yu Gothic UI"/>
                         </a:rPr>
-                        <a:t>区分</a:t>
+                        <a:t>対象</a:t>
                       </a:r>
                     </a:p>
                   </a:txBody>
@@ -3425,7 +5597,29 @@
                           </a:solidFill>
                           <a:latin typeface="Yu Gothic UI"/>
                         </a:rPr>
-                        <a:t>提供できる価値</a:t>
+                        <a:t>プラン / メニュー</a:t>
+                      </a:r>
+                    </a:p>
+                  </a:txBody>
+                  <a:tcPr>
+                    <a:solidFill>
+                      <a:srgbClr val="FAFAFA"/>
+                    </a:solidFill>
+                  </a:tcPr>
+                </a:tc>
+                <a:tc>
+                  <a:txBody>
+                    <a:bodyPr/>
+                    <a:lstStyle/>
+                    <a:p>
+                      <a:r>
+                        <a:rPr sz="1200" b="1">
+                          <a:solidFill>
+                            <a:srgbClr val="18181B"/>
+                          </a:solidFill>
+                          <a:latin typeface="Yu Gothic UI"/>
+                        </a:rPr>
+                        <a:t>内容</a:t>
                       </a:r>
                     </a:p>
                   </a:txBody>
@@ -3436,7 +5630,7 @@
                   </a:tcPr>
                 </a:tc>
               </a:tr>
-              <a:tr h="411480">
+              <a:tr h="417195">
                 <a:tc>
                   <a:txBody>
                     <a:bodyPr/>
@@ -3449,7 +5643,7 @@
                           </a:solidFill>
                           <a:latin typeface="Yu Gothic UI"/>
                         </a:rPr>
-                        <a:t>サーキット運営会社</a:t>
+                        <a:t>B2C</a:t>
                       </a:r>
                     </a:p>
                   </a:txBody>
@@ -3471,518 +5665,7 @@
                           </a:solidFill>
                           <a:latin typeface="Yu Gothic UI"/>
                         </a:rPr>
-                        <a:t>公式ページ、走行会告知、来場者コミュニティの可視化</a:t>
-                      </a:r>
-                    </a:p>
-                  </a:txBody>
-                  <a:tcPr>
-                    <a:solidFill>
-                      <a:srgbClr val="FFFFFF"/>
-                    </a:solidFill>
-                  </a:tcPr>
-                </a:tc>
-              </a:tr>
-              <a:tr h="411480">
-                <a:tc>
-                  <a:txBody>
-                    <a:bodyPr/>
-                    <a:lstStyle/>
-                    <a:p>
-                      <a:r>
-                        <a:rPr sz="1100" b="0">
-                          <a:solidFill>
-                            <a:srgbClr val="18181B"/>
-                          </a:solidFill>
-                          <a:latin typeface="Yu Gothic UI"/>
-                        </a:rPr>
-                        <a:t>タイヤメーカー</a:t>
-                      </a:r>
-                    </a:p>
-                  </a:txBody>
-                  <a:tcPr>
-                    <a:solidFill>
-                      <a:srgbClr val="FFFFFF"/>
-                    </a:solidFill>
-                  </a:tcPr>
-                </a:tc>
-                <a:tc>
-                  <a:txBody>
-                    <a:bodyPr/>
-                    <a:lstStyle/>
-                    <a:p>
-                      <a:r>
-                        <a:rPr sz="1100" b="0">
-                          <a:solidFill>
-                            <a:srgbClr val="18181B"/>
-                          </a:solidFill>
-                          <a:latin typeface="Yu Gothic UI"/>
-                        </a:rPr>
-                        <a:t>自社銘柄の使用実績データ、プロモコンテンツ展開</a:t>
-                      </a:r>
-                    </a:p>
-                  </a:txBody>
-                  <a:tcPr>
-                    <a:solidFill>
-                      <a:srgbClr val="FFFFFF"/>
-                    </a:solidFill>
-                  </a:tcPr>
-                </a:tc>
-              </a:tr>
-              <a:tr h="411480">
-                <a:tc>
-                  <a:txBody>
-                    <a:bodyPr/>
-                    <a:lstStyle/>
-                    <a:p>
-                      <a:r>
-                        <a:rPr sz="1100" b="0">
-                          <a:solidFill>
-                            <a:srgbClr val="18181B"/>
-                          </a:solidFill>
-                          <a:latin typeface="Yu Gothic UI"/>
-                        </a:rPr>
-                        <a:t>パーツメーカー</a:t>
-                      </a:r>
-                    </a:p>
-                  </a:txBody>
-                  <a:tcPr>
-                    <a:solidFill>
-                      <a:srgbClr val="FFFFFF"/>
-                    </a:solidFill>
-                  </a:tcPr>
-                </a:tc>
-                <a:tc>
-                  <a:txBody>
-                    <a:bodyPr/>
-                    <a:lstStyle/>
-                    <a:p>
-                      <a:r>
-                        <a:rPr sz="1100" b="0">
-                          <a:solidFill>
-                            <a:srgbClr val="18181B"/>
-                          </a:solidFill>
-                          <a:latin typeface="Yu Gothic UI"/>
-                        </a:rPr>
-                        <a:t>改造内容と紐づくタイム実データ</a:t>
-                      </a:r>
-                    </a:p>
-                  </a:txBody>
-                  <a:tcPr>
-                    <a:solidFill>
-                      <a:srgbClr val="FFFFFF"/>
-                    </a:solidFill>
-                  </a:tcPr>
-                </a:tc>
-              </a:tr>
-              <a:tr h="411480">
-                <a:tc>
-                  <a:txBody>
-                    <a:bodyPr/>
-                    <a:lstStyle/>
-                    <a:p>
-                      <a:r>
-                        <a:rPr sz="1100" b="0">
-                          <a:solidFill>
-                            <a:srgbClr val="18181B"/>
-                          </a:solidFill>
-                          <a:latin typeface="Yu Gothic UI"/>
-                        </a:rPr>
-                        <a:t>自動車メーカー</a:t>
-                      </a:r>
-                    </a:p>
-                  </a:txBody>
-                  <a:tcPr>
-                    <a:solidFill>
-                      <a:srgbClr val="FFFFFF"/>
-                    </a:solidFill>
-                  </a:tcPr>
-                </a:tc>
-                <a:tc>
-                  <a:txBody>
-                    <a:bodyPr/>
-                    <a:lstStyle/>
-                    <a:p>
-                      <a:r>
-                        <a:rPr sz="1100" b="0">
-                          <a:solidFill>
-                            <a:srgbClr val="18181B"/>
-                          </a:solidFill>
-                          <a:latin typeface="Yu Gothic UI"/>
-                        </a:rPr>
-                        <a:t>車種別のサーキット適性データ、ユーザーボイス</a:t>
-                      </a:r>
-                    </a:p>
-                  </a:txBody>
-                  <a:tcPr>
-                    <a:solidFill>
-                      <a:srgbClr val="FFFFFF"/>
-                    </a:solidFill>
-                  </a:tcPr>
-                </a:tc>
-              </a:tr>
-              <a:tr h="411480">
-                <a:tc>
-                  <a:txBody>
-                    <a:bodyPr/>
-                    <a:lstStyle/>
-                    <a:p>
-                      <a:r>
-                        <a:rPr sz="1100" b="0">
-                          <a:solidFill>
-                            <a:srgbClr val="18181B"/>
-                          </a:solidFill>
-                          <a:latin typeface="Yu Gothic UI"/>
-                        </a:rPr>
-                        <a:t>走行会主催者</a:t>
-                      </a:r>
-                    </a:p>
-                  </a:txBody>
-                  <a:tcPr>
-                    <a:solidFill>
-                      <a:srgbClr val="FFFFFF"/>
-                    </a:solidFill>
-                  </a:tcPr>
-                </a:tc>
-                <a:tc>
-                  <a:txBody>
-                    <a:bodyPr/>
-                    <a:lstStyle/>
-                    <a:p>
-                      <a:r>
-                        <a:rPr sz="1100" b="0">
-                          <a:solidFill>
-                            <a:srgbClr val="18181B"/>
-                          </a:solidFill>
-                          <a:latin typeface="Yu Gothic UI"/>
-                        </a:rPr>
-                        <a:t>集客チャネル、参加者のタイム集計</a:t>
-                      </a:r>
-                    </a:p>
-                  </a:txBody>
-                  <a:tcPr>
-                    <a:solidFill>
-                      <a:srgbClr val="FFFFFF"/>
-                    </a:solidFill>
-                  </a:tcPr>
-                </a:tc>
-              </a:tr>
-              <a:tr h="411480">
-                <a:tc>
-                  <a:txBody>
-                    <a:bodyPr/>
-                    <a:lstStyle/>
-                    <a:p>
-                      <a:r>
-                        <a:rPr sz="1100" b="0">
-                          <a:solidFill>
-                            <a:srgbClr val="18181B"/>
-                          </a:solidFill>
-                          <a:latin typeface="Yu Gothic UI"/>
-                        </a:rPr>
-                        <a:t>モータースポーツ媒体</a:t>
-                      </a:r>
-                    </a:p>
-                  </a:txBody>
-                  <a:tcPr>
-                    <a:solidFill>
-                      <a:srgbClr val="FFFFFF"/>
-                    </a:solidFill>
-                  </a:tcPr>
-                </a:tc>
-                <a:tc>
-                  <a:txBody>
-                    <a:bodyPr/>
-                    <a:lstStyle/>
-                    <a:p>
-                      <a:r>
-                        <a:rPr sz="1100" b="0">
-                          <a:solidFill>
-                            <a:srgbClr val="18181B"/>
-                          </a:solidFill>
-                          <a:latin typeface="Yu Gothic UI"/>
-                        </a:rPr>
-                        <a:t>コンテンツ提携、データ引用</a:t>
-                      </a:r>
-                    </a:p>
-                  </a:txBody>
-                  <a:tcPr>
-                    <a:solidFill>
-                      <a:srgbClr val="FFFFFF"/>
-                    </a:solidFill>
-                  </a:tcPr>
-                </a:tc>
-              </a:tr>
-            </a:tbl>
-          </a:graphicData>
-        </a:graphic>
-      </p:graphicFrame>
-    </p:spTree>
-  </p:cSld>
-  <p:clrMapOvr>
-    <a:masterClrMapping/>
-  </p:clrMapOvr>
-</p:sld>
-</file>
-
-<file path=ppt/slides/slide11.xml><?xml version="1.0" encoding="utf-8"?>
-<p:sld xmlns:a="http://schemas.openxmlformats.org/drawingml/2006/main" xmlns:p="http://schemas.openxmlformats.org/presentationml/2006/main" xmlns:r="http://schemas.openxmlformats.org/officeDocument/2006/relationships">
-  <p:cSld>
-    <p:spTree>
-      <p:nvGrpSpPr>
-        <p:cNvPr id="1" name=""/>
-        <p:cNvGrpSpPr/>
-        <p:nvPr/>
-      </p:nvGrpSpPr>
-      <p:grpSpPr/>
-      <p:sp>
-        <p:nvSpPr>
-          <p:cNvPr id="2" name="Rectangle 1"/>
-          <p:cNvSpPr/>
-          <p:nvPr/>
-        </p:nvSpPr>
-        <p:spPr>
-          <a:xfrm>
-            <a:off x="0" y="0"/>
-            <a:ext cx="12191695" cy="502920"/>
-          </a:xfrm>
-          <a:prstGeom prst="rect">
-            <a:avLst/>
-          </a:prstGeom>
-          <a:solidFill>
-            <a:srgbClr val="E10600"/>
-          </a:solidFill>
-          <a:ln>
-            <a:noFill/>
-          </a:ln>
-        </p:spPr>
-        <p:style>
-          <a:lnRef idx="1">
-            <a:schemeClr val="accent1"/>
-          </a:lnRef>
-          <a:fillRef idx="3">
-            <a:schemeClr val="accent1"/>
-          </a:fillRef>
-          <a:effectRef idx="2">
-            <a:schemeClr val="accent1"/>
-          </a:effectRef>
-          <a:fontRef idx="minor">
-            <a:schemeClr val="lt1"/>
-          </a:fontRef>
-        </p:style>
-        <p:txBody>
-          <a:bodyPr rtlCol="0" anchor="ctr" lIns="457200"/>
-          <a:lstStyle/>
-          <a:p>
-            <a:pPr algn="l"/>
-            <a:r>
-              <a:rPr sz="1800" b="1">
-                <a:solidFill>
-                  <a:srgbClr val="FFFFFF"/>
-                </a:solidFill>
-                <a:latin typeface="Yu Gothic UI"/>
-              </a:rPr>
-              <a:t>  6.  収益化 (1/2) ドライバー向け</a:t>
-            </a:r>
-          </a:p>
-        </p:txBody>
-      </p:sp>
-      <p:sp>
-        <p:nvSpPr>
-          <p:cNvPr id="3" name="TextBox 2"/>
-          <p:cNvSpPr txBox="1"/>
-          <p:nvPr/>
-        </p:nvSpPr>
-        <p:spPr>
-          <a:xfrm>
-            <a:off x="0" y="6446520"/>
-            <a:ext cx="12191695" cy="365760"/>
-          </a:xfrm>
-          <a:prstGeom prst="rect">
-            <a:avLst/>
-          </a:prstGeom>
-          <a:noFill/>
-        </p:spPr>
-        <p:txBody>
-          <a:bodyPr wrap="none">
-            <a:spAutoFit/>
-          </a:bodyPr>
-          <a:lstStyle/>
-          <a:p>
-            <a:pPr algn="ctr"/>
-            <a:r>
-              <a:rPr sz="900" b="0">
-                <a:solidFill>
-                  <a:srgbClr val="71717A"/>
-                </a:solidFill>
-                <a:latin typeface="Yu Gothic UI"/>
-              </a:rPr>
-              <a:t>走ログ (Hashilog) 事業提案書  v1.0  /  RBS  /  hashilog2024@gmail.com</a:t>
-            </a:r>
-          </a:p>
-        </p:txBody>
-      </p:sp>
-      <p:sp>
-        <p:nvSpPr>
-          <p:cNvPr id="4" name="TextBox 3"/>
-          <p:cNvSpPr txBox="1"/>
-          <p:nvPr/>
-        </p:nvSpPr>
-        <p:spPr>
-          <a:xfrm>
-            <a:off x="640080" y="777240"/>
-            <a:ext cx="10972800" cy="640080"/>
-          </a:xfrm>
-          <a:prstGeom prst="rect">
-            <a:avLst/>
-          </a:prstGeom>
-          <a:noFill/>
-        </p:spPr>
-        <p:txBody>
-          <a:bodyPr wrap="none">
-            <a:spAutoFit/>
-          </a:bodyPr>
-          <a:lstStyle/>
-          <a:p>
-            <a:pPr algn="l"/>
-            <a:r>
-              <a:rPr sz="1400" b="0">
-                <a:solidFill>
-                  <a:srgbClr val="3F3F46"/>
-                </a:solidFill>
-                <a:latin typeface="Yu Gothic UI"/>
-              </a:rPr>
-              <a:t>コア機能は永久無料。プレミアム機能で課金。Stripe 基盤は実装済み (フラグでON/OFF)。</a:t>
-            </a:r>
-          </a:p>
-        </p:txBody>
-      </p:sp>
-      <p:graphicFrame>
-        <p:nvGraphicFramePr>
-          <p:cNvPr id="5" name="Table 4"/>
-          <p:cNvGraphicFramePr>
-            <a:graphicFrameLocks noGrp="1"/>
-          </p:cNvGraphicFramePr>
-          <p:nvPr/>
-        </p:nvGraphicFramePr>
-        <p:xfrm>
-          <a:off x="640080" y="1463040"/>
-          <a:ext cx="10881360" cy="1645920"/>
-        </p:xfrm>
-        <a:graphic>
-          <a:graphicData uri="http://schemas.openxmlformats.org/drawingml/2006/table">
-            <a:tbl>
-              <a:tblPr firstRow="1" bandRow="1">
-                <a:tableStyleId>{5C22544A-7EE6-4342-B048-85BDC9FD1C3A}</a:tableStyleId>
-              </a:tblPr>
-              <a:tblGrid>
-                <a:gridCol w="3627120"/>
-                <a:gridCol w="3627120"/>
-                <a:gridCol w="3627120"/>
-              </a:tblGrid>
-              <a:tr h="411480">
-                <a:tc>
-                  <a:txBody>
-                    <a:bodyPr/>
-                    <a:lstStyle/>
-                    <a:p>
-                      <a:r>
-                        <a:rPr sz="1200" b="1">
-                          <a:solidFill>
-                            <a:srgbClr val="18181B"/>
-                          </a:solidFill>
-                          <a:latin typeface="Yu Gothic UI"/>
-                        </a:rPr>
-                        <a:t>プラン</a:t>
-                      </a:r>
-                    </a:p>
-                  </a:txBody>
-                  <a:tcPr>
-                    <a:solidFill>
-                      <a:srgbClr val="FAFAFA"/>
-                    </a:solidFill>
-                  </a:tcPr>
-                </a:tc>
-                <a:tc>
-                  <a:txBody>
-                    <a:bodyPr/>
-                    <a:lstStyle/>
-                    <a:p>
-                      <a:r>
-                        <a:rPr sz="1200" b="1">
-                          <a:solidFill>
-                            <a:srgbClr val="18181B"/>
-                          </a:solidFill>
-                          <a:latin typeface="Yu Gothic UI"/>
-                        </a:rPr>
-                        <a:t>月額目安</a:t>
-                      </a:r>
-                    </a:p>
-                  </a:txBody>
-                  <a:tcPr>
-                    <a:solidFill>
-                      <a:srgbClr val="FAFAFA"/>
-                    </a:solidFill>
-                  </a:tcPr>
-                </a:tc>
-                <a:tc>
-                  <a:txBody>
-                    <a:bodyPr/>
-                    <a:lstStyle/>
-                    <a:p>
-                      <a:r>
-                        <a:rPr sz="1200" b="1">
-                          <a:solidFill>
-                            <a:srgbClr val="18181B"/>
-                          </a:solidFill>
-                          <a:latin typeface="Yu Gothic UI"/>
-                        </a:rPr>
-                        <a:t>提供内容</a:t>
-                      </a:r>
-                    </a:p>
-                  </a:txBody>
-                  <a:tcPr>
-                    <a:solidFill>
-                      <a:srgbClr val="FAFAFA"/>
-                    </a:solidFill>
-                  </a:tcPr>
-                </a:tc>
-              </a:tr>
-              <a:tr h="411480">
-                <a:tc>
-                  <a:txBody>
-                    <a:bodyPr/>
-                    <a:lstStyle/>
-                    <a:p>
-                      <a:r>
-                        <a:rPr sz="1100" b="0">
-                          <a:solidFill>
-                            <a:srgbClr val="18181B"/>
-                          </a:solidFill>
-                          <a:latin typeface="Yu Gothic UI"/>
-                        </a:rPr>
-                        <a:t>Free</a:t>
-                      </a:r>
-                    </a:p>
-                  </a:txBody>
-                  <a:tcPr>
-                    <a:solidFill>
-                      <a:srgbClr val="FFFFFF"/>
-                    </a:solidFill>
-                  </a:tcPr>
-                </a:tc>
-                <a:tc>
-                  <a:txBody>
-                    <a:bodyPr/>
-                    <a:lstStyle/>
-                    <a:p>
-                      <a:r>
-                        <a:rPr sz="1100" b="0">
-                          <a:solidFill>
-                            <a:srgbClr val="18181B"/>
-                          </a:solidFill>
-                          <a:latin typeface="Yu Gothic UI"/>
-                        </a:rPr>
-                        <a:t>0円</a:t>
+                        <a:t>Free  (0円)</a:t>
                       </a:r>
                     </a:p>
                   </a:txBody>
@@ -4015,7 +5698,7 @@
                   </a:tcPr>
                 </a:tc>
               </a:tr>
-              <a:tr h="411480">
+              <a:tr h="417195">
                 <a:tc>
                   <a:txBody>
                     <a:bodyPr/>
@@ -4028,7 +5711,7 @@
                           </a:solidFill>
                           <a:latin typeface="Yu Gothic UI"/>
                         </a:rPr>
-                        <a:t>Premium</a:t>
+                        <a:t>B2C</a:t>
                       </a:r>
                     </a:p>
                   </a:txBody>
@@ -4050,7 +5733,7 @@
                           </a:solidFill>
                           <a:latin typeface="Yu Gothic UI"/>
                         </a:rPr>
-                        <a:t>480円程度</a:t>
+                        <a:t>Premium  (480円/月程度)</a:t>
                       </a:r>
                     </a:p>
                   </a:txBody>
@@ -4072,7 +5755,7 @@
                           </a:solidFill>
                           <a:latin typeface="Yu Gothic UI"/>
                         </a:rPr>
-                        <a:t>写真大量UL、ベスト推移グラフ、CSV、広告非表示、装飾</a:t>
+                        <a:t>写真大量UL、推移グラフ、CSV、広告非表示</a:t>
                       </a:r>
                     </a:p>
                   </a:txBody>
@@ -4083,7 +5766,7 @@
                   </a:tcPr>
                 </a:tc>
               </a:tr>
-              <a:tr h="411480">
+              <a:tr h="417195">
                 <a:tc>
                   <a:txBody>
                     <a:bodyPr/>
@@ -4096,7 +5779,7 @@
                           </a:solidFill>
                           <a:latin typeface="Yu Gothic UI"/>
                         </a:rPr>
-                        <a:t>Pro</a:t>
+                        <a:t>B2C</a:t>
                       </a:r>
                     </a:p>
                   </a:txBody>
@@ -4118,7 +5801,7 @@
                           </a:solidFill>
                           <a:latin typeface="Yu Gothic UI"/>
                         </a:rPr>
-                        <a:t>980円程度</a:t>
+                        <a:t>Pro  (980円/月程度)</a:t>
                       </a:r>
                     </a:p>
                   </a:txBody>
@@ -4140,7 +5823,279 @@
                           </a:solidFill>
                           <a:latin typeface="Yu Gothic UI"/>
                         </a:rPr>
-                        <a:t>上記+チームアカウント、複数車両比較、コーチング機能</a:t>
+                        <a:t>チームアカウント、複数車両比較、コーチング</a:t>
+                      </a:r>
+                    </a:p>
+                  </a:txBody>
+                  <a:tcPr>
+                    <a:solidFill>
+                      <a:srgbClr val="FFFFFF"/>
+                    </a:solidFill>
+                  </a:tcPr>
+                </a:tc>
+              </a:tr>
+              <a:tr h="417195">
+                <a:tc>
+                  <a:txBody>
+                    <a:bodyPr/>
+                    <a:lstStyle/>
+                    <a:p>
+                      <a:r>
+                        <a:rPr sz="1100" b="0">
+                          <a:solidFill>
+                            <a:srgbClr val="18181B"/>
+                          </a:solidFill>
+                          <a:latin typeface="Yu Gothic UI"/>
+                        </a:rPr>
+                        <a:t>B2B サーキット</a:t>
+                      </a:r>
+                    </a:p>
+                  </a:txBody>
+                  <a:tcPr>
+                    <a:solidFill>
+                      <a:srgbClr val="FFFFFF"/>
+                    </a:solidFill>
+                  </a:tcPr>
+                </a:tc>
+                <a:tc>
+                  <a:txBody>
+                    <a:bodyPr/>
+                    <a:lstStyle/>
+                    <a:p>
+                      <a:r>
+                        <a:rPr sz="1100" b="0">
+                          <a:solidFill>
+                            <a:srgbClr val="18181B"/>
+                          </a:solidFill>
+                          <a:latin typeface="Yu Gothic UI"/>
+                        </a:rPr>
+                        <a:t>公式運営者 (無料)</a:t>
+                      </a:r>
+                    </a:p>
+                  </a:txBody>
+                  <a:tcPr>
+                    <a:solidFill>
+                      <a:srgbClr val="FFFFFF"/>
+                    </a:solidFill>
+                  </a:tcPr>
+                </a:tc>
+                <a:tc>
+                  <a:txBody>
+                    <a:bodyPr/>
+                    <a:lstStyle/>
+                    <a:p>
+                      <a:r>
+                        <a:rPr sz="1100" b="0">
+                          <a:solidFill>
+                            <a:srgbClr val="18181B"/>
+                          </a:solidFill>
+                          <a:latin typeface="Yu Gothic UI"/>
+                        </a:rPr>
+                        <a:t>自施設ページ編集・走行会告知</a:t>
+                      </a:r>
+                    </a:p>
+                  </a:txBody>
+                  <a:tcPr>
+                    <a:solidFill>
+                      <a:srgbClr val="FFFFFF"/>
+                    </a:solidFill>
+                  </a:tcPr>
+                </a:tc>
+              </a:tr>
+              <a:tr h="417195">
+                <a:tc>
+                  <a:txBody>
+                    <a:bodyPr/>
+                    <a:lstStyle/>
+                    <a:p>
+                      <a:r>
+                        <a:rPr sz="1100" b="0">
+                          <a:solidFill>
+                            <a:srgbClr val="18181B"/>
+                          </a:solidFill>
+                          <a:latin typeface="Yu Gothic UI"/>
+                        </a:rPr>
+                        <a:t>B2B サーキット</a:t>
+                      </a:r>
+                    </a:p>
+                  </a:txBody>
+                  <a:tcPr>
+                    <a:solidFill>
+                      <a:srgbClr val="FFFFFF"/>
+                    </a:solidFill>
+                  </a:tcPr>
+                </a:tc>
+                <a:tc>
+                  <a:txBody>
+                    <a:bodyPr/>
+                    <a:lstStyle/>
+                    <a:p>
+                      <a:r>
+                        <a:rPr sz="1100" b="0">
+                          <a:solidFill>
+                            <a:srgbClr val="18181B"/>
+                          </a:solidFill>
+                          <a:latin typeface="Yu Gothic UI"/>
+                        </a:rPr>
+                        <a:t>プロモーション (要相談)</a:t>
+                      </a:r>
+                    </a:p>
+                  </a:txBody>
+                  <a:tcPr>
+                    <a:solidFill>
+                      <a:srgbClr val="FFFFFF"/>
+                    </a:solidFill>
+                  </a:tcPr>
+                </a:tc>
+                <a:tc>
+                  <a:txBody>
+                    <a:bodyPr/>
+                    <a:lstStyle/>
+                    <a:p>
+                      <a:r>
+                        <a:rPr sz="1100" b="0">
+                          <a:solidFill>
+                            <a:srgbClr val="18181B"/>
+                          </a:solidFill>
+                          <a:latin typeface="Yu Gothic UI"/>
+                        </a:rPr>
+                        <a:t>トップ露出・ニュースレター・送客レポート</a:t>
+                      </a:r>
+                    </a:p>
+                  </a:txBody>
+                  <a:tcPr>
+                    <a:solidFill>
+                      <a:srgbClr val="FFFFFF"/>
+                    </a:solidFill>
+                  </a:tcPr>
+                </a:tc>
+              </a:tr>
+              <a:tr h="417195">
+                <a:tc>
+                  <a:txBody>
+                    <a:bodyPr/>
+                    <a:lstStyle/>
+                    <a:p>
+                      <a:r>
+                        <a:rPr sz="1100" b="0">
+                          <a:solidFill>
+                            <a:srgbClr val="18181B"/>
+                          </a:solidFill>
+                          <a:latin typeface="Yu Gothic UI"/>
+                        </a:rPr>
+                        <a:t>B2B メーカー</a:t>
+                      </a:r>
+                    </a:p>
+                  </a:txBody>
+                  <a:tcPr>
+                    <a:solidFill>
+                      <a:srgbClr val="FFFFFF"/>
+                    </a:solidFill>
+                  </a:tcPr>
+                </a:tc>
+                <a:tc>
+                  <a:txBody>
+                    <a:bodyPr/>
+                    <a:lstStyle/>
+                    <a:p>
+                      <a:r>
+                        <a:rPr sz="1100" b="0">
+                          <a:solidFill>
+                            <a:srgbClr val="18181B"/>
+                          </a:solidFill>
+                          <a:latin typeface="Yu Gothic UI"/>
+                        </a:rPr>
+                        <a:t>公式バッジ / データ提供</a:t>
+                      </a:r>
+                    </a:p>
+                  </a:txBody>
+                  <a:tcPr>
+                    <a:solidFill>
+                      <a:srgbClr val="FFFFFF"/>
+                    </a:solidFill>
+                  </a:tcPr>
+                </a:tc>
+                <a:tc>
+                  <a:txBody>
+                    <a:bodyPr/>
+                    <a:lstStyle/>
+                    <a:p>
+                      <a:r>
+                        <a:rPr sz="1100" b="0">
+                          <a:solidFill>
+                            <a:srgbClr val="18181B"/>
+                          </a:solidFill>
+                          <a:latin typeface="Yu Gothic UI"/>
+                        </a:rPr>
+                        <a:t>ブランド表示優先・月次集計レポート</a:t>
+                      </a:r>
+                    </a:p>
+                  </a:txBody>
+                  <a:tcPr>
+                    <a:solidFill>
+                      <a:srgbClr val="FFFFFF"/>
+                    </a:solidFill>
+                  </a:tcPr>
+                </a:tc>
+              </a:tr>
+              <a:tr h="417195">
+                <a:tc>
+                  <a:txBody>
+                    <a:bodyPr/>
+                    <a:lstStyle/>
+                    <a:p>
+                      <a:r>
+                        <a:rPr sz="1100" b="0">
+                          <a:solidFill>
+                            <a:srgbClr val="18181B"/>
+                          </a:solidFill>
+                          <a:latin typeface="Yu Gothic UI"/>
+                        </a:rPr>
+                        <a:t>B2B メーカー</a:t>
+                      </a:r>
+                    </a:p>
+                  </a:txBody>
+                  <a:tcPr>
+                    <a:solidFill>
+                      <a:srgbClr val="FFFFFF"/>
+                    </a:solidFill>
+                  </a:tcPr>
+                </a:tc>
+                <a:tc>
+                  <a:txBody>
+                    <a:bodyPr/>
+                    <a:lstStyle/>
+                    <a:p>
+                      <a:r>
+                        <a:rPr sz="1100" b="0">
+                          <a:solidFill>
+                            <a:srgbClr val="18181B"/>
+                          </a:solidFill>
+                          <a:latin typeface="Yu Gothic UI"/>
+                        </a:rPr>
+                        <a:t>タイアップ・広告枠・スポンサー</a:t>
+                      </a:r>
+                    </a:p>
+                  </a:txBody>
+                  <a:tcPr>
+                    <a:solidFill>
+                      <a:srgbClr val="FFFFFF"/>
+                    </a:solidFill>
+                  </a:tcPr>
+                </a:tc>
+                <a:tc>
+                  <a:txBody>
+                    <a:bodyPr/>
+                    <a:lstStyle/>
+                    <a:p>
+                      <a:r>
+                        <a:rPr sz="1100" b="0">
+                          <a:solidFill>
+                            <a:srgbClr val="18181B"/>
+                          </a:solidFill>
+                          <a:latin typeface="Yu Gothic UI"/>
+                        </a:rPr>
+                        <a:t>新製品特集・バナー・走ログ大会協賛</a:t>
                       </a:r>
                     </a:p>
                   </a:txBody>
@@ -4163,7 +6118,7 @@
 </p:sld>
 </file>
 
-<file path=ppt/slides/slide12.xml><?xml version="1.0" encoding="utf-8"?>
+<file path=ppt/slides/slide7.xml><?xml version="1.0" encoding="utf-8"?>
 <p:sld xmlns:a="http://schemas.openxmlformats.org/drawingml/2006/main" xmlns:p="http://schemas.openxmlformats.org/presentationml/2006/main" xmlns:r="http://schemas.openxmlformats.org/officeDocument/2006/relationships">
   <p:cSld>
     <p:spTree>
@@ -4182,7 +6137,7 @@
         <p:spPr>
           <a:xfrm>
             <a:off x="0" y="0"/>
-            <a:ext cx="12191695" cy="502920"/>
+            <a:ext cx="12191695" cy="868680"/>
           </a:xfrm>
           <a:prstGeom prst="rect">
             <a:avLst/>
@@ -4209,25 +6164,49 @@
           </a:fontRef>
         </p:style>
         <p:txBody>
-          <a:bodyPr rtlCol="0" anchor="ctr" lIns="457200"/>
+          <a:bodyPr rtlCol="0" anchor="ctr" lIns="502920" tIns="164592"/>
           <a:lstStyle/>
           <a:p>
             <a:pPr algn="l"/>
             <a:r>
-              <a:rPr sz="1800" b="1">
+              <a:rPr sz="2200" b="1">
                 <a:solidFill>
                   <a:srgbClr val="FFFFFF"/>
                 </a:solidFill>
                 <a:latin typeface="Yu Gothic UI"/>
               </a:rPr>
-              <a:t>  6.  収益化 (2/2) B2B</a:t>
-            </a:r>
-          </a:p>
-        </p:txBody>
-      </p:sp>
-      <p:sp>
-        <p:nvSpPr>
-          <p:cNvPr id="3" name="TextBox 2"/>
+              <a:t>6.  競合・差別化</a:t>
+            </a:r>
+          </a:p>
+        </p:txBody>
+      </p:sp>
+      <p:pic>
+        <p:nvPicPr>
+          <p:cNvPr id="3" name="Picture 2" descr="logo.png"/>
+          <p:cNvPicPr>
+            <a:picLocks noChangeAspect="1"/>
+          </p:cNvPicPr>
+          <p:nvPr/>
+        </p:nvPicPr>
+        <p:blipFill>
+          <a:blip r:embed="rId2"/>
+          <a:stretch>
+            <a:fillRect/>
+          </a:stretch>
+        </p:blipFill>
+        <p:spPr>
+          <a:xfrm>
+            <a:off x="11094123" y="228600"/>
+            <a:ext cx="777532" cy="411480"/>
+          </a:xfrm>
+          <a:prstGeom prst="rect">
+            <a:avLst/>
+          </a:prstGeom>
+        </p:spPr>
+      </p:pic>
+      <p:sp>
+        <p:nvSpPr>
+          <p:cNvPr id="4" name="TextBox 3"/>
           <p:cNvSpPr txBox="1"/>
           <p:nvPr/>
         </p:nvSpPr>
@@ -4255,510 +6234,57 @@
                 </a:solidFill>
                 <a:latin typeface="Yu Gothic UI"/>
               </a:rPr>
-              <a:t>走ログ (Hashilog) 事業提案書  v1.0  /  RBS  /  hashilog2024@gmail.com</a:t>
+              <a:t>走ログ (Hashilog)  v1.0  /  RBS  /  hashilog2024@gmail.com  /  https://hashilog.jp</a:t>
+            </a:r>
+          </a:p>
+        </p:txBody>
+      </p:sp>
+      <p:sp>
+        <p:nvSpPr>
+          <p:cNvPr id="5" name="TextBox 4"/>
+          <p:cNvSpPr txBox="1"/>
+          <p:nvPr/>
+        </p:nvSpPr>
+        <p:spPr>
+          <a:xfrm>
+            <a:off x="640080" y="1097280"/>
+            <a:ext cx="10972800" cy="731520"/>
+          </a:xfrm>
+          <a:prstGeom prst="rect">
+            <a:avLst/>
+          </a:prstGeom>
+          <a:noFill/>
+        </p:spPr>
+        <p:txBody>
+          <a:bodyPr wrap="none">
+            <a:spAutoFit/>
+          </a:bodyPr>
+          <a:lstStyle/>
+          <a:p>
+            <a:pPr algn="l"/>
+            <a:r>
+              <a:rPr sz="1400" b="0">
+                <a:solidFill>
+                  <a:srgbClr val="3F3F46"/>
+                </a:solidFill>
+                <a:latin typeface="Yu Gothic UI"/>
+              </a:rPr>
+              <a:t>既存の選択肢と比較した走ログのポジション。</a:t>
             </a:r>
           </a:p>
         </p:txBody>
       </p:sp>
       <p:graphicFrame>
         <p:nvGraphicFramePr>
-          <p:cNvPr id="4" name="Table 3"/>
+          <p:cNvPr id="6" name="Table 5"/>
           <p:cNvGraphicFramePr>
             <a:graphicFrameLocks noGrp="1"/>
           </p:cNvGraphicFramePr>
           <p:nvPr/>
         </p:nvGraphicFramePr>
         <p:xfrm>
-          <a:off x="640080" y="914400"/>
-          <a:ext cx="10881360" cy="2880360"/>
-        </p:xfrm>
-        <a:graphic>
-          <a:graphicData uri="http://schemas.openxmlformats.org/drawingml/2006/table">
-            <a:tbl>
-              <a:tblPr firstRow="1" bandRow="1">
-                <a:tableStyleId>{5C22544A-7EE6-4342-B048-85BDC9FD1C3A}</a:tableStyleId>
-              </a:tblPr>
-              <a:tblGrid>
-                <a:gridCol w="5440680"/>
-                <a:gridCol w="5440680"/>
-              </a:tblGrid>
-              <a:tr h="411480">
-                <a:tc>
-                  <a:txBody>
-                    <a:bodyPr/>
-                    <a:lstStyle/>
-                    <a:p>
-                      <a:r>
-                        <a:rPr sz="1200" b="1">
-                          <a:solidFill>
-                            <a:srgbClr val="18181B"/>
-                          </a:solidFill>
-                          <a:latin typeface="Yu Gothic UI"/>
-                        </a:rPr>
-                        <a:t>メニュー</a:t>
-                      </a:r>
-                    </a:p>
-                  </a:txBody>
-                  <a:tcPr>
-                    <a:solidFill>
-                      <a:srgbClr val="FAFAFA"/>
-                    </a:solidFill>
-                  </a:tcPr>
-                </a:tc>
-                <a:tc>
-                  <a:txBody>
-                    <a:bodyPr/>
-                    <a:lstStyle/>
-                    <a:p>
-                      <a:r>
-                        <a:rPr sz="1200" b="1">
-                          <a:solidFill>
-                            <a:srgbClr val="18181B"/>
-                          </a:solidFill>
-                          <a:latin typeface="Yu Gothic UI"/>
-                        </a:rPr>
-                        <a:t>内容</a:t>
-                      </a:r>
-                    </a:p>
-                  </a:txBody>
-                  <a:tcPr>
-                    <a:solidFill>
-                      <a:srgbClr val="FAFAFA"/>
-                    </a:solidFill>
-                  </a:tcPr>
-                </a:tc>
-              </a:tr>
-              <a:tr h="411480">
-                <a:tc>
-                  <a:txBody>
-                    <a:bodyPr/>
-                    <a:lstStyle/>
-                    <a:p>
-                      <a:r>
-                        <a:rPr sz="1100" b="0">
-                          <a:solidFill>
-                            <a:srgbClr val="18181B"/>
-                          </a:solidFill>
-                          <a:latin typeface="Yu Gothic UI"/>
-                        </a:rPr>
-                        <a:t>公式運営者アカウント (無料)</a:t>
-                      </a:r>
-                    </a:p>
-                  </a:txBody>
-                  <a:tcPr>
-                    <a:solidFill>
-                      <a:srgbClr val="FFFFFF"/>
-                    </a:solidFill>
-                  </a:tcPr>
-                </a:tc>
-                <a:tc>
-                  <a:txBody>
-                    <a:bodyPr/>
-                    <a:lstStyle/>
-                    <a:p>
-                      <a:r>
-                        <a:rPr sz="1100" b="0">
-                          <a:solidFill>
-                            <a:srgbClr val="18181B"/>
-                          </a:solidFill>
-                          <a:latin typeface="Yu Gothic UI"/>
-                        </a:rPr>
-                        <a:t>サーキット運営会社向け。自施設ページ編集・告知</a:t>
-                      </a:r>
-                    </a:p>
-                  </a:txBody>
-                  <a:tcPr>
-                    <a:solidFill>
-                      <a:srgbClr val="FFFFFF"/>
-                    </a:solidFill>
-                  </a:tcPr>
-                </a:tc>
-              </a:tr>
-              <a:tr h="411480">
-                <a:tc>
-                  <a:txBody>
-                    <a:bodyPr/>
-                    <a:lstStyle/>
-                    <a:p>
-                      <a:r>
-                        <a:rPr sz="1100" b="0">
-                          <a:solidFill>
-                            <a:srgbClr val="18181B"/>
-                          </a:solidFill>
-                          <a:latin typeface="Yu Gothic UI"/>
-                        </a:rPr>
-                        <a:t>プロモーションプラン (要相談)</a:t>
-                      </a:r>
-                    </a:p>
-                  </a:txBody>
-                  <a:tcPr>
-                    <a:solidFill>
-                      <a:srgbClr val="FFFFFF"/>
-                    </a:solidFill>
-                  </a:tcPr>
-                </a:tc>
-                <a:tc>
-                  <a:txBody>
-                    <a:bodyPr/>
-                    <a:lstStyle/>
-                    <a:p>
-                      <a:r>
-                        <a:rPr sz="1100" b="0">
-                          <a:solidFill>
-                            <a:srgbClr val="18181B"/>
-                          </a:solidFill>
-                          <a:latin typeface="Yu Gothic UI"/>
-                        </a:rPr>
-                        <a:t>トップ露出、おすすめ表示、ニュースレター、送客レポート</a:t>
-                      </a:r>
-                    </a:p>
-                  </a:txBody>
-                  <a:tcPr>
-                    <a:solidFill>
-                      <a:srgbClr val="FFFFFF"/>
-                    </a:solidFill>
-                  </a:tcPr>
-                </a:tc>
-              </a:tr>
-              <a:tr h="411480">
-                <a:tc>
-                  <a:txBody>
-                    <a:bodyPr/>
-                    <a:lstStyle/>
-                    <a:p>
-                      <a:r>
-                        <a:rPr sz="1100" b="0">
-                          <a:solidFill>
-                            <a:srgbClr val="18181B"/>
-                          </a:solidFill>
-                          <a:latin typeface="Yu Gothic UI"/>
-                        </a:rPr>
-                        <a:t>タイヤブランド公式バッジ</a:t>
-                      </a:r>
-                    </a:p>
-                  </a:txBody>
-                  <a:tcPr>
-                    <a:solidFill>
-                      <a:srgbClr val="FFFFFF"/>
-                    </a:solidFill>
-                  </a:tcPr>
-                </a:tc>
-                <a:tc>
-                  <a:txBody>
-                    <a:bodyPr/>
-                    <a:lstStyle/>
-                    <a:p>
-                      <a:r>
-                        <a:rPr sz="1100" b="0">
-                          <a:solidFill>
-                            <a:srgbClr val="18181B"/>
-                          </a:solidFill>
-                          <a:latin typeface="Yu Gothic UI"/>
-                        </a:rPr>
-                        <a:t>ブランドプリセット表示優先、ブランドページ</a:t>
-                      </a:r>
-                    </a:p>
-                  </a:txBody>
-                  <a:tcPr>
-                    <a:solidFill>
-                      <a:srgbClr val="FFFFFF"/>
-                    </a:solidFill>
-                  </a:tcPr>
-                </a:tc>
-              </a:tr>
-              <a:tr h="411480">
-                <a:tc>
-                  <a:txBody>
-                    <a:bodyPr/>
-                    <a:lstStyle/>
-                    <a:p>
-                      <a:r>
-                        <a:rPr sz="1100" b="0">
-                          <a:solidFill>
-                            <a:srgbClr val="18181B"/>
-                          </a:solidFill>
-                          <a:latin typeface="Yu Gothic UI"/>
-                        </a:rPr>
-                        <a:t>データ提供 (匿名集計)</a:t>
-                      </a:r>
-                    </a:p>
-                  </a:txBody>
-                  <a:tcPr>
-                    <a:solidFill>
-                      <a:srgbClr val="FFFFFF"/>
-                    </a:solidFill>
-                  </a:tcPr>
-                </a:tc>
-                <a:tc>
-                  <a:txBody>
-                    <a:bodyPr/>
-                    <a:lstStyle/>
-                    <a:p>
-                      <a:r>
-                        <a:rPr sz="1100" b="0">
-                          <a:solidFill>
-                            <a:srgbClr val="18181B"/>
-                          </a:solidFill>
-                          <a:latin typeface="Yu Gothic UI"/>
-                        </a:rPr>
-                        <a:t>月次レポート (使用シェア / タイム分布 / 装着車両分布)</a:t>
-                      </a:r>
-                    </a:p>
-                  </a:txBody>
-                  <a:tcPr>
-                    <a:solidFill>
-                      <a:srgbClr val="FFFFFF"/>
-                    </a:solidFill>
-                  </a:tcPr>
-                </a:tc>
-              </a:tr>
-              <a:tr h="411480">
-                <a:tc>
-                  <a:txBody>
-                    <a:bodyPr/>
-                    <a:lstStyle/>
-                    <a:p>
-                      <a:r>
-                        <a:rPr sz="1100" b="0">
-                          <a:solidFill>
-                            <a:srgbClr val="18181B"/>
-                          </a:solidFill>
-                          <a:latin typeface="Yu Gothic UI"/>
-                        </a:rPr>
-                        <a:t>タイアップ・特集</a:t>
-                      </a:r>
-                    </a:p>
-                  </a:txBody>
-                  <a:tcPr>
-                    <a:solidFill>
-                      <a:srgbClr val="FFFFFF"/>
-                    </a:solidFill>
-                  </a:tcPr>
-                </a:tc>
-                <a:tc>
-                  <a:txBody>
-                    <a:bodyPr/>
-                    <a:lstStyle/>
-                    <a:p>
-                      <a:r>
-                        <a:rPr sz="1100" b="0">
-                          <a:solidFill>
-                            <a:srgbClr val="18181B"/>
-                          </a:solidFill>
-                          <a:latin typeface="Yu Gothic UI"/>
-                        </a:rPr>
-                        <a:t>新製品リリース時のフィーチャー枠</a:t>
-                      </a:r>
-                    </a:p>
-                  </a:txBody>
-                  <a:tcPr>
-                    <a:solidFill>
-                      <a:srgbClr val="FFFFFF"/>
-                    </a:solidFill>
-                  </a:tcPr>
-                </a:tc>
-              </a:tr>
-              <a:tr h="411480">
-                <a:tc>
-                  <a:txBody>
-                    <a:bodyPr/>
-                    <a:lstStyle/>
-                    <a:p>
-                      <a:r>
-                        <a:rPr sz="1100" b="0">
-                          <a:solidFill>
-                            <a:srgbClr val="18181B"/>
-                          </a:solidFill>
-                          <a:latin typeface="Yu Gothic UI"/>
-                        </a:rPr>
-                        <a:t>イベントスポンサー連携</a:t>
-                      </a:r>
-                    </a:p>
-                  </a:txBody>
-                  <a:tcPr>
-                    <a:solidFill>
-                      <a:srgbClr val="FFFFFF"/>
-                    </a:solidFill>
-                  </a:tcPr>
-                </a:tc>
-                <a:tc>
-                  <a:txBody>
-                    <a:bodyPr/>
-                    <a:lstStyle/>
-                    <a:p>
-                      <a:r>
-                        <a:rPr sz="1100" b="0">
-                          <a:solidFill>
-                            <a:srgbClr val="18181B"/>
-                          </a:solidFill>
-                          <a:latin typeface="Yu Gothic UI"/>
-                        </a:rPr>
-                        <a:t>走ログ主催走行会への協賛</a:t>
-                      </a:r>
-                    </a:p>
-                  </a:txBody>
-                  <a:tcPr>
-                    <a:solidFill>
-                      <a:srgbClr val="FFFFFF"/>
-                    </a:solidFill>
-                  </a:tcPr>
-                </a:tc>
-              </a:tr>
-            </a:tbl>
-          </a:graphicData>
-        </a:graphic>
-      </p:graphicFrame>
-    </p:spTree>
-  </p:cSld>
-  <p:clrMapOvr>
-    <a:masterClrMapping/>
-  </p:clrMapOvr>
-</p:sld>
-</file>
-
-<file path=ppt/slides/slide13.xml><?xml version="1.0" encoding="utf-8"?>
-<p:sld xmlns:a="http://schemas.openxmlformats.org/drawingml/2006/main" xmlns:p="http://schemas.openxmlformats.org/presentationml/2006/main" xmlns:r="http://schemas.openxmlformats.org/officeDocument/2006/relationships">
-  <p:cSld>
-    <p:spTree>
-      <p:nvGrpSpPr>
-        <p:cNvPr id="1" name=""/>
-        <p:cNvGrpSpPr/>
-        <p:nvPr/>
-      </p:nvGrpSpPr>
-      <p:grpSpPr/>
-      <p:sp>
-        <p:nvSpPr>
-          <p:cNvPr id="2" name="Rectangle 1"/>
-          <p:cNvSpPr/>
-          <p:nvPr/>
-        </p:nvSpPr>
-        <p:spPr>
-          <a:xfrm>
-            <a:off x="0" y="0"/>
-            <a:ext cx="12191695" cy="502920"/>
-          </a:xfrm>
-          <a:prstGeom prst="rect">
-            <a:avLst/>
-          </a:prstGeom>
-          <a:solidFill>
-            <a:srgbClr val="E10600"/>
-          </a:solidFill>
-          <a:ln>
-            <a:noFill/>
-          </a:ln>
-        </p:spPr>
-        <p:style>
-          <a:lnRef idx="1">
-            <a:schemeClr val="accent1"/>
-          </a:lnRef>
-          <a:fillRef idx="3">
-            <a:schemeClr val="accent1"/>
-          </a:fillRef>
-          <a:effectRef idx="2">
-            <a:schemeClr val="accent1"/>
-          </a:effectRef>
-          <a:fontRef idx="minor">
-            <a:schemeClr val="lt1"/>
-          </a:fontRef>
-        </p:style>
-        <p:txBody>
-          <a:bodyPr rtlCol="0" anchor="ctr" lIns="457200"/>
-          <a:lstStyle/>
-          <a:p>
-            <a:pPr algn="l"/>
-            <a:r>
-              <a:rPr sz="1800" b="1">
-                <a:solidFill>
-                  <a:srgbClr val="FFFFFF"/>
-                </a:solidFill>
-                <a:latin typeface="Yu Gothic UI"/>
-              </a:rPr>
-              <a:t>  7.  競合・差別化</a:t>
-            </a:r>
-          </a:p>
-        </p:txBody>
-      </p:sp>
-      <p:sp>
-        <p:nvSpPr>
-          <p:cNvPr id="3" name="TextBox 2"/>
-          <p:cNvSpPr txBox="1"/>
-          <p:nvPr/>
-        </p:nvSpPr>
-        <p:spPr>
-          <a:xfrm>
-            <a:off x="0" y="6446520"/>
-            <a:ext cx="12191695" cy="365760"/>
-          </a:xfrm>
-          <a:prstGeom prst="rect">
-            <a:avLst/>
-          </a:prstGeom>
-          <a:noFill/>
-        </p:spPr>
-        <p:txBody>
-          <a:bodyPr wrap="none">
-            <a:spAutoFit/>
-          </a:bodyPr>
-          <a:lstStyle/>
-          <a:p>
-            <a:pPr algn="ctr"/>
-            <a:r>
-              <a:rPr sz="900" b="0">
-                <a:solidFill>
-                  <a:srgbClr val="71717A"/>
-                </a:solidFill>
-                <a:latin typeface="Yu Gothic UI"/>
-              </a:rPr>
-              <a:t>走ログ (Hashilog) 事業提案書  v1.0  /  RBS  /  hashilog2024@gmail.com</a:t>
-            </a:r>
-          </a:p>
-        </p:txBody>
-      </p:sp>
-      <p:sp>
-        <p:nvSpPr>
-          <p:cNvPr id="4" name="TextBox 3"/>
-          <p:cNvSpPr txBox="1"/>
-          <p:nvPr/>
-        </p:nvSpPr>
-        <p:spPr>
-          <a:xfrm>
-            <a:off x="640080" y="777240"/>
-            <a:ext cx="10972800" cy="640080"/>
-          </a:xfrm>
-          <a:prstGeom prst="rect">
-            <a:avLst/>
-          </a:prstGeom>
-          <a:noFill/>
-        </p:spPr>
-        <p:txBody>
-          <a:bodyPr wrap="none">
-            <a:spAutoFit/>
-          </a:bodyPr>
-          <a:lstStyle/>
-          <a:p>
-            <a:pPr algn="l"/>
-            <a:r>
-              <a:rPr sz="1400" b="0">
-                <a:solidFill>
-                  <a:srgbClr val="3F3F46"/>
-                </a:solidFill>
-                <a:latin typeface="Yu Gothic UI"/>
-              </a:rPr>
-              <a:t>既存の選択肢と比較した走ログのポジション。</a:t>
-            </a:r>
-          </a:p>
-        </p:txBody>
-      </p:sp>
-      <p:graphicFrame>
-        <p:nvGraphicFramePr>
-          <p:cNvPr id="5" name="Table 4"/>
-          <p:cNvGraphicFramePr>
-            <a:graphicFrameLocks noGrp="1"/>
-          </p:cNvGraphicFramePr>
-          <p:nvPr/>
-        </p:nvGraphicFramePr>
-        <p:xfrm>
-          <a:off x="640080" y="1463040"/>
-          <a:ext cx="10881360" cy="3703320"/>
+          <a:off x="640080" y="1828800"/>
+          <a:ext cx="10881360" cy="3749040"/>
         </p:xfrm>
         <a:graphic>
           <a:graphicData uri="http://schemas.openxmlformats.org/drawingml/2006/table">
@@ -4773,7 +6299,7 @@
                 <a:gridCol w="2176272"/>
                 <a:gridCol w="2176272"/>
               </a:tblGrid>
-              <a:tr h="411480">
+              <a:tr h="416560">
                 <a:tc>
                   <a:txBody>
                     <a:bodyPr/>
@@ -4885,7 +6411,7 @@
                   </a:tcPr>
                 </a:tc>
               </a:tr>
-              <a:tr h="411480">
+              <a:tr h="416560">
                 <a:tc>
                   <a:txBody>
                     <a:bodyPr/>
@@ -4997,7 +6523,7 @@
                   </a:tcPr>
                 </a:tc>
               </a:tr>
-              <a:tr h="411480">
+              <a:tr h="416560">
                 <a:tc>
                   <a:txBody>
                     <a:bodyPr/>
@@ -5109,7 +6635,7 @@
                   </a:tcPr>
                 </a:tc>
               </a:tr>
-              <a:tr h="411480">
+              <a:tr h="416560">
                 <a:tc>
                   <a:txBody>
                     <a:bodyPr/>
@@ -5221,7 +6747,7 @@
                   </a:tcPr>
                 </a:tc>
               </a:tr>
-              <a:tr h="411480">
+              <a:tr h="416560">
                 <a:tc>
                   <a:txBody>
                     <a:bodyPr/>
@@ -5333,7 +6859,7 @@
                   </a:tcPr>
                 </a:tc>
               </a:tr>
-              <a:tr h="411480">
+              <a:tr h="416560">
                 <a:tc>
                   <a:txBody>
                     <a:bodyPr/>
@@ -5445,7 +6971,7 @@
                   </a:tcPr>
                 </a:tc>
               </a:tr>
-              <a:tr h="411480">
+              <a:tr h="416560">
                 <a:tc>
                   <a:txBody>
                     <a:bodyPr/>
@@ -5557,7 +7083,7 @@
                   </a:tcPr>
                 </a:tc>
               </a:tr>
-              <a:tr h="411480">
+              <a:tr h="416560">
                 <a:tc>
                   <a:txBody>
                     <a:bodyPr/>
@@ -5669,7 +7195,7 @@
                   </a:tcPr>
                 </a:tc>
               </a:tr>
-              <a:tr h="411480">
+              <a:tr h="416560">
                 <a:tc>
                   <a:txBody>
                     <a:bodyPr/>
@@ -5793,7 +7319,7 @@
 </p:sld>
 </file>
 
-<file path=ppt/slides/slide14.xml><?xml version="1.0" encoding="utf-8"?>
+<file path=ppt/slides/slide8.xml><?xml version="1.0" encoding="utf-8"?>
 <p:sld xmlns:a="http://schemas.openxmlformats.org/drawingml/2006/main" xmlns:p="http://schemas.openxmlformats.org/presentationml/2006/main" xmlns:r="http://schemas.openxmlformats.org/officeDocument/2006/relationships">
   <p:cSld>
     <p:spTree>
@@ -5812,7 +7338,7 @@
         <p:spPr>
           <a:xfrm>
             <a:off x="0" y="0"/>
-            <a:ext cx="12191695" cy="502920"/>
+            <a:ext cx="12191695" cy="868680"/>
           </a:xfrm>
           <a:prstGeom prst="rect">
             <a:avLst/>
@@ -5839,25 +7365,49 @@
           </a:fontRef>
         </p:style>
         <p:txBody>
-          <a:bodyPr rtlCol="0" anchor="ctr" lIns="457200"/>
+          <a:bodyPr rtlCol="0" anchor="ctr" lIns="502920" tIns="164592"/>
           <a:lstStyle/>
           <a:p>
             <a:pPr algn="l"/>
             <a:r>
-              <a:rPr sz="1800" b="1">
+              <a:rPr sz="2200" b="1">
                 <a:solidFill>
                   <a:srgbClr val="FFFFFF"/>
                 </a:solidFill>
                 <a:latin typeface="Yu Gothic UI"/>
               </a:rPr>
-              <a:t>  8.  サーキット運営者の皆様へ</a:t>
-            </a:r>
-          </a:p>
-        </p:txBody>
-      </p:sp>
-      <p:sp>
-        <p:nvSpPr>
-          <p:cNvPr id="3" name="TextBox 2"/>
+              <a:t>7.  パートナーシップ提案</a:t>
+            </a:r>
+          </a:p>
+        </p:txBody>
+      </p:sp>
+      <p:pic>
+        <p:nvPicPr>
+          <p:cNvPr id="3" name="Picture 2" descr="logo.png"/>
+          <p:cNvPicPr>
+            <a:picLocks noChangeAspect="1"/>
+          </p:cNvPicPr>
+          <p:nvPr/>
+        </p:nvPicPr>
+        <p:blipFill>
+          <a:blip r:embed="rId2"/>
+          <a:stretch>
+            <a:fillRect/>
+          </a:stretch>
+        </p:blipFill>
+        <p:spPr>
+          <a:xfrm>
+            <a:off x="11094123" y="228600"/>
+            <a:ext cx="777532" cy="411480"/>
+          </a:xfrm>
+          <a:prstGeom prst="rect">
+            <a:avLst/>
+          </a:prstGeom>
+        </p:spPr>
+      </p:pic>
+      <p:sp>
+        <p:nvSpPr>
+          <p:cNvPr id="4" name="TextBox 3"/>
           <p:cNvSpPr txBox="1"/>
           <p:nvPr/>
         </p:nvSpPr>
@@ -5885,21 +7435,21 @@
                 </a:solidFill>
                 <a:latin typeface="Yu Gothic UI"/>
               </a:rPr>
-              <a:t>走ログ (Hashilog) 事業提案書  v1.0  /  RBS  /  hashilog2024@gmail.com</a:t>
-            </a:r>
-          </a:p>
-        </p:txBody>
-      </p:sp>
-      <p:sp>
-        <p:nvSpPr>
-          <p:cNvPr id="4" name="TextBox 3"/>
+              <a:t>走ログ (Hashilog)  v1.0  /  RBS  /  hashilog2024@gmail.com  /  https://hashilog.jp</a:t>
+            </a:r>
+          </a:p>
+        </p:txBody>
+      </p:sp>
+      <p:sp>
+        <p:nvSpPr>
+          <p:cNvPr id="5" name="TextBox 4"/>
           <p:cNvSpPr txBox="1"/>
           <p:nvPr/>
         </p:nvSpPr>
         <p:spPr>
           <a:xfrm>
-            <a:off x="640080" y="777240"/>
-            <a:ext cx="10972800" cy="640080"/>
+            <a:off x="640080" y="1097280"/>
+            <a:ext cx="10972800" cy="731520"/>
           </a:xfrm>
           <a:prstGeom prst="rect">
             <a:avLst/>
@@ -5920,21 +7470,21 @@
                 </a:solidFill>
                 <a:latin typeface="Yu Gothic UI"/>
               </a:rPr>
-              <a:t>公式アカウント (無料) を発行します。自施設の公式ページを直接編集いただけます。</a:t>
-            </a:r>
-          </a:p>
-        </p:txBody>
-      </p:sp>
-      <p:sp>
-        <p:nvSpPr>
-          <p:cNvPr id="5" name="TextBox 4"/>
+              <a:t>業種別にご提供できる内容。詳細は個別ご相談ください。</a:t>
+            </a:r>
+          </a:p>
+        </p:txBody>
+      </p:sp>
+      <p:sp>
+        <p:nvSpPr>
+          <p:cNvPr id="6" name="TextBox 5"/>
           <p:cNvSpPr txBox="1"/>
           <p:nvPr/>
         </p:nvSpPr>
         <p:spPr>
           <a:xfrm>
-            <a:off x="640080" y="1463040"/>
-            <a:ext cx="5486400" cy="4572000"/>
+            <a:off x="640080" y="1828800"/>
+            <a:ext cx="3474720" cy="548640"/>
           </a:xfrm>
           <a:prstGeom prst="rect">
             <a:avLst/>
@@ -5949,75 +7499,27 @@
           <a:p>
             <a:pPr algn="l"/>
             <a:r>
-              <a:rPr sz="1800" b="1">
+              <a:rPr sz="1500" b="1">
                 <a:solidFill>
                   <a:srgbClr val="E10600"/>
                 </a:solidFill>
                 <a:latin typeface="Yu Gothic UI"/>
               </a:rPr>
-              <a:t>ご提供内容 (無料)</a:t>
-            </a:r>
-          </a:p>
-          <a:p>
-            <a:pPr algn="l"/>
-            <a:r>
-              <a:rPr sz="1300" b="0">
-                <a:solidFill>
-                  <a:srgbClr val="18181B"/>
-                </a:solidFill>
-                <a:latin typeface="Yu Gothic UI"/>
-              </a:rPr>
-              <a:t>・ 公式ページ (説明・代表コーナー・公式 URL)</a:t>
-            </a:r>
-          </a:p>
-          <a:p>
-            <a:pPr algn="l"/>
-            <a:r>
-              <a:rPr sz="1300" b="0">
-                <a:solidFill>
-                  <a:srgbClr val="18181B"/>
-                </a:solidFill>
-                <a:latin typeface="Yu Gothic UI"/>
-              </a:rPr>
-              <a:t>・ 走行会・レース・お知らせの掲載</a:t>
-            </a:r>
-          </a:p>
-          <a:p>
-            <a:pPr algn="l"/>
-            <a:r>
-              <a:rPr sz="1300" b="0">
-                <a:solidFill>
-                  <a:srgbClr val="18181B"/>
-                </a:solidFill>
-                <a:latin typeface="Yu Gothic UI"/>
-              </a:rPr>
-              <a:t>・ 自施設のラップタイム一覧 (来場者の生の声)</a:t>
-            </a:r>
-          </a:p>
-          <a:p>
-            <a:pPr algn="l"/>
-            <a:r>
-              <a:rPr sz="1300" b="0">
-                <a:solidFill>
-                  <a:srgbClr val="18181B"/>
-                </a:solidFill>
-                <a:latin typeface="Yu Gothic UI"/>
-              </a:rPr>
-              <a:t>・ スタッフアカウントでの更新権限</a:t>
-            </a:r>
-          </a:p>
-        </p:txBody>
-      </p:sp>
-      <p:sp>
-        <p:nvSpPr>
-          <p:cNvPr id="6" name="TextBox 5"/>
+              <a:t>サーキット運営者</a:t>
+            </a:r>
+          </a:p>
+        </p:txBody>
+      </p:sp>
+      <p:sp>
+        <p:nvSpPr>
+          <p:cNvPr id="7" name="TextBox 6"/>
           <p:cNvSpPr txBox="1"/>
           <p:nvPr/>
         </p:nvSpPr>
         <p:spPr>
           <a:xfrm>
-            <a:off x="6400800" y="1463040"/>
-            <a:ext cx="5486400" cy="4572000"/>
+            <a:off x="640080" y="2331720"/>
+            <a:ext cx="3474720" cy="4114800"/>
           </a:xfrm>
           <a:prstGeom prst="rect">
             <a:avLst/>
@@ -6030,147 +7532,97 @@
           </a:bodyPr>
           <a:lstStyle/>
           <a:p>
-            <a:pPr algn="l"/>
-            <a:r>
-              <a:rPr sz="1800" b="1">
-                <a:solidFill>
-                  <a:srgbClr val="E10600"/>
-                </a:solidFill>
-                <a:latin typeface="Yu Gothic UI"/>
-              </a:rPr>
-              <a:t>期待される効果</a:t>
-            </a:r>
-          </a:p>
-          <a:p>
-            <a:pPr algn="l"/>
-            <a:r>
-              <a:rPr sz="1300" b="0">
+            <a:pPr algn="l">
+              <a:lnSpc>
+                <a:spcPct val="120000"/>
+              </a:lnSpc>
+            </a:pPr>
+            <a:r>
+              <a:rPr sz="1100" b="0">
                 <a:solidFill>
                   <a:srgbClr val="18181B"/>
                 </a:solidFill>
                 <a:latin typeface="Yu Gothic UI"/>
               </a:rPr>
-              <a:t>・ 走行会の集客導線の追加</a:t>
-            </a:r>
-          </a:p>
-          <a:p>
-            <a:pPr algn="l"/>
-            <a:r>
-              <a:rPr sz="1300" b="0">
+              <a:t>・ 公式ページ編集 (説明・代表コーナー・URL)</a:t>
+            </a:r>
+          </a:p>
+          <a:p>
+            <a:pPr algn="l">
+              <a:lnSpc>
+                <a:spcPct val="120000"/>
+              </a:lnSpc>
+            </a:pPr>
+            <a:r>
+              <a:rPr sz="1100" b="0">
                 <a:solidFill>
                   <a:srgbClr val="18181B"/>
                 </a:solidFill>
                 <a:latin typeface="Yu Gothic UI"/>
               </a:rPr>
-              <a:t>・ リピート顧客の見える化</a:t>
-            </a:r>
-          </a:p>
-          <a:p>
-            <a:pPr algn="l"/>
-            <a:r>
-              <a:rPr sz="1300" b="0">
+              <a:t>・ 走行会・レース・お知らせ告知</a:t>
+            </a:r>
+          </a:p>
+          <a:p>
+            <a:pPr algn="l">
+              <a:lnSpc>
+                <a:spcPct val="120000"/>
+              </a:lnSpc>
+            </a:pPr>
+            <a:r>
+              <a:rPr sz="1100" b="0">
                 <a:solidFill>
                   <a:srgbClr val="18181B"/>
                 </a:solidFill>
                 <a:latin typeface="Yu Gothic UI"/>
               </a:rPr>
-              <a:t>・ SEO・ブランディング強化</a:t>
-            </a:r>
-          </a:p>
-          <a:p>
-            <a:pPr algn="l"/>
-            <a:r>
-              <a:rPr sz="1300" b="0">
+              <a:t>・ 自施設のラップタイム集計</a:t>
+            </a:r>
+          </a:p>
+          <a:p>
+            <a:pPr algn="l">
+              <a:lnSpc>
+                <a:spcPct val="120000"/>
+              </a:lnSpc>
+            </a:pPr>
+            <a:r>
+              <a:rPr sz="1100" b="0">
                 <a:solidFill>
                   <a:srgbClr val="18181B"/>
                 </a:solidFill>
                 <a:latin typeface="Yu Gothic UI"/>
               </a:rPr>
-              <a:t>・ ご担当メアドのみで開始可能</a:t>
-            </a:r>
-          </a:p>
-        </p:txBody>
-      </p:sp>
-    </p:spTree>
-  </p:cSld>
-  <p:clrMapOvr>
-    <a:masterClrMapping/>
-  </p:clrMapOvr>
-</p:sld>
-</file>
-
-<file path=ppt/slides/slide15.xml><?xml version="1.0" encoding="utf-8"?>
-<p:sld xmlns:a="http://schemas.openxmlformats.org/drawingml/2006/main" xmlns:p="http://schemas.openxmlformats.org/presentationml/2006/main" xmlns:r="http://schemas.openxmlformats.org/officeDocument/2006/relationships">
-  <p:cSld>
-    <p:spTree>
-      <p:nvGrpSpPr>
-        <p:cNvPr id="1" name=""/>
-        <p:cNvGrpSpPr/>
-        <p:nvPr/>
-      </p:nvGrpSpPr>
-      <p:grpSpPr/>
-      <p:sp>
-        <p:nvSpPr>
-          <p:cNvPr id="2" name="Rectangle 1"/>
-          <p:cNvSpPr/>
-          <p:nvPr/>
-        </p:nvSpPr>
-        <p:spPr>
-          <a:xfrm>
-            <a:off x="0" y="0"/>
-            <a:ext cx="12191695" cy="502920"/>
-          </a:xfrm>
-          <a:prstGeom prst="rect">
-            <a:avLst/>
-          </a:prstGeom>
-          <a:solidFill>
-            <a:srgbClr val="E10600"/>
-          </a:solidFill>
-          <a:ln>
-            <a:noFill/>
-          </a:ln>
-        </p:spPr>
-        <p:style>
-          <a:lnRef idx="1">
-            <a:schemeClr val="accent1"/>
-          </a:lnRef>
-          <a:fillRef idx="3">
-            <a:schemeClr val="accent1"/>
-          </a:fillRef>
-          <a:effectRef idx="2">
-            <a:schemeClr val="accent1"/>
-          </a:effectRef>
-          <a:fontRef idx="minor">
-            <a:schemeClr val="lt1"/>
-          </a:fontRef>
-        </p:style>
-        <p:txBody>
-          <a:bodyPr rtlCol="0" anchor="ctr" lIns="457200"/>
-          <a:lstStyle/>
-          <a:p>
-            <a:pPr algn="l"/>
-            <a:r>
-              <a:rPr sz="1800" b="1">
-                <a:solidFill>
-                  <a:srgbClr val="FFFFFF"/>
-                </a:solidFill>
-                <a:latin typeface="Yu Gothic UI"/>
-              </a:rPr>
-              <a:t>  8.  タイヤ・パーツメーカーの皆様へ</a:t>
-            </a:r>
-          </a:p>
-        </p:txBody>
-      </p:sp>
-      <p:sp>
-        <p:nvSpPr>
-          <p:cNvPr id="3" name="TextBox 2"/>
+              <a:t>・ スタッフアカウント発行</a:t>
+            </a:r>
+          </a:p>
+          <a:p>
+            <a:pPr algn="l">
+              <a:lnSpc>
+                <a:spcPct val="120000"/>
+              </a:lnSpc>
+            </a:pPr>
+            <a:r>
+              <a:rPr sz="1100" b="0">
+                <a:solidFill>
+                  <a:srgbClr val="18181B"/>
+                </a:solidFill>
+                <a:latin typeface="Yu Gothic UI"/>
+              </a:rPr>
+              <a:t>・ → 必要なのはご担当のメアドのみ。無料。</a:t>
+            </a:r>
+          </a:p>
+        </p:txBody>
+      </p:sp>
+      <p:sp>
+        <p:nvSpPr>
+          <p:cNvPr id="8" name="TextBox 7"/>
           <p:cNvSpPr txBox="1"/>
           <p:nvPr/>
         </p:nvSpPr>
         <p:spPr>
           <a:xfrm>
-            <a:off x="0" y="6446520"/>
-            <a:ext cx="12191695" cy="365760"/>
+            <a:off x="4343400" y="1828800"/>
+            <a:ext cx="3474720" cy="548640"/>
           </a:xfrm>
           <a:prstGeom prst="rect">
             <a:avLst/>
@@ -6183,29 +7635,29 @@
           </a:bodyPr>
           <a:lstStyle/>
           <a:p>
-            <a:pPr algn="ctr"/>
-            <a:r>
-              <a:rPr sz="900" b="0">
-                <a:solidFill>
-                  <a:srgbClr val="71717A"/>
-                </a:solidFill>
-                <a:latin typeface="Yu Gothic UI"/>
-              </a:rPr>
-              <a:t>走ログ (Hashilog) 事業提案書  v1.0  /  RBS  /  hashilog2024@gmail.com</a:t>
-            </a:r>
-          </a:p>
-        </p:txBody>
-      </p:sp>
-      <p:sp>
-        <p:nvSpPr>
-          <p:cNvPr id="4" name="TextBox 3"/>
+            <a:pPr algn="l"/>
+            <a:r>
+              <a:rPr sz="1500" b="1">
+                <a:solidFill>
+                  <a:srgbClr val="E10600"/>
+                </a:solidFill>
+                <a:latin typeface="Yu Gothic UI"/>
+              </a:rPr>
+              <a:t>タイヤ・パーツメーカー</a:t>
+            </a:r>
+          </a:p>
+        </p:txBody>
+      </p:sp>
+      <p:sp>
+        <p:nvSpPr>
+          <p:cNvPr id="9" name="TextBox 8"/>
           <p:cNvSpPr txBox="1"/>
           <p:nvPr/>
         </p:nvSpPr>
         <p:spPr>
           <a:xfrm>
-            <a:off x="640080" y="777240"/>
-            <a:ext cx="10972800" cy="640080"/>
+            <a:off x="4343400" y="2331720"/>
+            <a:ext cx="3474720" cy="4114800"/>
           </a:xfrm>
           <a:prstGeom prst="rect">
             <a:avLst/>
@@ -6218,29 +7670,97 @@
           </a:bodyPr>
           <a:lstStyle/>
           <a:p>
-            <a:pPr algn="l"/>
-            <a:r>
-              <a:rPr sz="1400" b="0">
-                <a:solidFill>
-                  <a:srgbClr val="3F3F46"/>
-                </a:solidFill>
-                <a:latin typeface="Yu Gothic UI"/>
-              </a:rPr>
-              <a:t>走ログには「銘柄 × サーキット × タイム × 条件」のリアルな走行データが集まります。</a:t>
-            </a:r>
-          </a:p>
-        </p:txBody>
-      </p:sp>
-      <p:sp>
-        <p:nvSpPr>
-          <p:cNvPr id="5" name="TextBox 4"/>
+            <a:pPr algn="l">
+              <a:lnSpc>
+                <a:spcPct val="120000"/>
+              </a:lnSpc>
+            </a:pPr>
+            <a:r>
+              <a:rPr sz="1100" b="0">
+                <a:solidFill>
+                  <a:srgbClr val="18181B"/>
+                </a:solidFill>
+                <a:latin typeface="Yu Gothic UI"/>
+              </a:rPr>
+              <a:t>・ 使用実績データ (匿名化集計、月次)</a:t>
+            </a:r>
+          </a:p>
+          <a:p>
+            <a:pPr algn="l">
+              <a:lnSpc>
+                <a:spcPct val="120000"/>
+              </a:lnSpc>
+            </a:pPr>
+            <a:r>
+              <a:rPr sz="1100" b="0">
+                <a:solidFill>
+                  <a:srgbClr val="18181B"/>
+                </a:solidFill>
+                <a:latin typeface="Yu Gothic UI"/>
+              </a:rPr>
+              <a:t>・ ブランド公式バッジ表示</a:t>
+            </a:r>
+          </a:p>
+          <a:p>
+            <a:pPr algn="l">
+              <a:lnSpc>
+                <a:spcPct val="120000"/>
+              </a:lnSpc>
+            </a:pPr>
+            <a:r>
+              <a:rPr sz="1100" b="0">
+                <a:solidFill>
+                  <a:srgbClr val="18181B"/>
+                </a:solidFill>
+                <a:latin typeface="Yu Gothic UI"/>
+              </a:rPr>
+              <a:t>・ 新製品リリース連動の特集枠</a:t>
+            </a:r>
+          </a:p>
+          <a:p>
+            <a:pPr algn="l">
+              <a:lnSpc>
+                <a:spcPct val="120000"/>
+              </a:lnSpc>
+            </a:pPr>
+            <a:r>
+              <a:rPr sz="1100" b="0">
+                <a:solidFill>
+                  <a:srgbClr val="18181B"/>
+                </a:solidFill>
+                <a:latin typeface="Yu Gothic UI"/>
+              </a:rPr>
+              <a:t>・ コラボ企画 (タイムアタック / プレゼント)</a:t>
+            </a:r>
+          </a:p>
+          <a:p>
+            <a:pPr algn="l">
+              <a:lnSpc>
+                <a:spcPct val="120000"/>
+              </a:lnSpc>
+            </a:pPr>
+            <a:r>
+              <a:rPr sz="1100" b="0">
+                <a:solidFill>
+                  <a:srgbClr val="18181B"/>
+                </a:solidFill>
+                <a:latin typeface="Yu Gothic UI"/>
+              </a:rPr>
+              <a:t>・ サンプリング協力 (モニター募集)</a:t>
+            </a:r>
+          </a:p>
+        </p:txBody>
+      </p:sp>
+      <p:sp>
+        <p:nvSpPr>
+          <p:cNvPr id="10" name="TextBox 9"/>
           <p:cNvSpPr txBox="1"/>
           <p:nvPr/>
         </p:nvSpPr>
         <p:spPr>
           <a:xfrm>
-            <a:off x="640080" y="1463040"/>
-            <a:ext cx="5486400" cy="4572000"/>
+            <a:off x="8046720" y="1828800"/>
+            <a:ext cx="3474720" cy="548640"/>
           </a:xfrm>
           <a:prstGeom prst="rect">
             <a:avLst/>
@@ -6255,75 +7775,27 @@
           <a:p>
             <a:pPr algn="l"/>
             <a:r>
-              <a:rPr sz="1800" b="1">
+              <a:rPr sz="1500" b="1">
                 <a:solidFill>
                   <a:srgbClr val="E10600"/>
                 </a:solidFill>
                 <a:latin typeface="Yu Gothic UI"/>
               </a:rPr>
-              <a:t>ご提供できること</a:t>
-            </a:r>
-          </a:p>
-          <a:p>
-            <a:pPr algn="l"/>
-            <a:r>
-              <a:rPr sz="1300" b="0">
-                <a:solidFill>
-                  <a:srgbClr val="18181B"/>
-                </a:solidFill>
-                <a:latin typeface="Yu Gothic UI"/>
-              </a:rPr>
-              <a:t>・ 使用実績データ (匿名化集計、月次)</a:t>
-            </a:r>
-          </a:p>
-          <a:p>
-            <a:pPr algn="l"/>
-            <a:r>
-              <a:rPr sz="1300" b="0">
-                <a:solidFill>
-                  <a:srgbClr val="18181B"/>
-                </a:solidFill>
-                <a:latin typeface="Yu Gothic UI"/>
-              </a:rPr>
-              <a:t>・ 公式バッジ表示でブランド信頼性アップ</a:t>
-            </a:r>
-          </a:p>
-          <a:p>
-            <a:pPr algn="l"/>
-            <a:r>
-              <a:rPr sz="1300" b="0">
-                <a:solidFill>
-                  <a:srgbClr val="18181B"/>
-                </a:solidFill>
-                <a:latin typeface="Yu Gothic UI"/>
-              </a:rPr>
-              <a:t>・ 新製品リリース連動の特集枠</a:t>
-            </a:r>
-          </a:p>
-          <a:p>
-            <a:pPr algn="l"/>
-            <a:r>
-              <a:rPr sz="1300" b="0">
-                <a:solidFill>
-                  <a:srgbClr val="18181B"/>
-                </a:solidFill>
-                <a:latin typeface="Yu Gothic UI"/>
-              </a:rPr>
-              <a:t>・ サンプリング協力 (モニター募集)</a:t>
-            </a:r>
-          </a:p>
-        </p:txBody>
-      </p:sp>
-      <p:sp>
-        <p:nvSpPr>
-          <p:cNvPr id="6" name="TextBox 5"/>
+              <a:t>走行会主催者・媒体</a:t>
+            </a:r>
+          </a:p>
+        </p:txBody>
+      </p:sp>
+      <p:sp>
+        <p:nvSpPr>
+          <p:cNvPr id="11" name="TextBox 10"/>
           <p:cNvSpPr txBox="1"/>
           <p:nvPr/>
         </p:nvSpPr>
         <p:spPr>
           <a:xfrm>
-            <a:off x="6400800" y="1463040"/>
-            <a:ext cx="5486400" cy="4572000"/>
+            <a:off x="8046720" y="2331720"/>
+            <a:ext cx="3474720" cy="4114800"/>
           </a:xfrm>
           <a:prstGeom prst="rect">
             <a:avLst/>
@@ -6336,2893 +7808,83 @@
           </a:bodyPr>
           <a:lstStyle/>
           <a:p>
-            <a:pPr algn="l"/>
-            <a:r>
-              <a:rPr sz="1800" b="1">
-                <a:solidFill>
-                  <a:srgbClr val="E10600"/>
-                </a:solidFill>
-                <a:latin typeface="Yu Gothic UI"/>
-              </a:rPr>
-              <a:t>コラボ事例案</a:t>
-            </a:r>
-          </a:p>
-          <a:p>
-            <a:pPr algn="l"/>
-            <a:r>
-              <a:rPr sz="1300" b="0">
+            <a:pPr algn="l">
+              <a:lnSpc>
+                <a:spcPct val="120000"/>
+              </a:lnSpc>
+            </a:pPr>
+            <a:r>
+              <a:rPr sz="1100" b="0">
                 <a:solidFill>
                   <a:srgbClr val="18181B"/>
                 </a:solidFill>
                 <a:latin typeface="Yu Gothic UI"/>
               </a:rPr>
-              <a:t>・ 「○○ × 走ログ 春のタイムアタック」プレゼント抽選</a:t>
-            </a:r>
-          </a:p>
-          <a:p>
-            <a:pPr algn="l"/>
-            <a:r>
-              <a:rPr sz="1300" b="0">
+              <a:t>・ イベント告知ページ (無料)</a:t>
+            </a:r>
+          </a:p>
+          <a:p>
+            <a:pPr algn="l">
+              <a:lnSpc>
+                <a:spcPct val="120000"/>
+              </a:lnSpc>
+            </a:pPr>
+            <a:r>
+              <a:rPr sz="1100" b="0">
                 <a:solidFill>
                   <a:srgbClr val="18181B"/>
                 </a:solidFill>
                 <a:latin typeface="Yu Gothic UI"/>
               </a:rPr>
-              <a:t>・ 「銘柄別ランキング特集」サーキット別ベスト公開</a:t>
-            </a:r>
-          </a:p>
-          <a:p>
-            <a:pPr algn="l"/>
-            <a:r>
-              <a:rPr sz="1300" b="0">
+              <a:t>・ 参加者のタイム集計テンプレート</a:t>
+            </a:r>
+          </a:p>
+          <a:p>
+            <a:pPr algn="l">
+              <a:lnSpc>
+                <a:spcPct val="120000"/>
+              </a:lnSpc>
+            </a:pPr>
+            <a:r>
+              <a:rPr sz="1100" b="0">
                 <a:solidFill>
                   <a:srgbClr val="18181B"/>
                 </a:solidFill>
                 <a:latin typeface="Yu Gothic UI"/>
               </a:rPr>
-              <a:t>・ 新製品先行投稿者100名にプレゼント</a:t>
-            </a:r>
-          </a:p>
-        </p:txBody>
-      </p:sp>
-    </p:spTree>
-  </p:cSld>
-  <p:clrMapOvr>
-    <a:masterClrMapping/>
-  </p:clrMapOvr>
-</p:sld>
-</file>
-
-<file path=ppt/slides/slide16.xml><?xml version="1.0" encoding="utf-8"?>
-<p:sld xmlns:a="http://schemas.openxmlformats.org/drawingml/2006/main" xmlns:p="http://schemas.openxmlformats.org/presentationml/2006/main" xmlns:r="http://schemas.openxmlformats.org/officeDocument/2006/relationships">
-  <p:cSld>
-    <p:spTree>
-      <p:nvGrpSpPr>
-        <p:cNvPr id="1" name=""/>
-        <p:cNvGrpSpPr/>
-        <p:nvPr/>
-      </p:nvGrpSpPr>
-      <p:grpSpPr/>
-      <p:sp>
-        <p:nvSpPr>
-          <p:cNvPr id="2" name="Rectangle 1"/>
-          <p:cNvSpPr/>
-          <p:nvPr/>
-        </p:nvSpPr>
-        <p:spPr>
-          <a:xfrm>
-            <a:off x="0" y="0"/>
-            <a:ext cx="12191695" cy="502920"/>
-          </a:xfrm>
-          <a:prstGeom prst="rect">
-            <a:avLst/>
-          </a:prstGeom>
-          <a:solidFill>
-            <a:srgbClr val="E10600"/>
-          </a:solidFill>
-          <a:ln>
-            <a:noFill/>
-          </a:ln>
-        </p:spPr>
-        <p:style>
-          <a:lnRef idx="1">
-            <a:schemeClr val="accent1"/>
-          </a:lnRef>
-          <a:fillRef idx="3">
-            <a:schemeClr val="accent1"/>
-          </a:fillRef>
-          <a:effectRef idx="2">
-            <a:schemeClr val="accent1"/>
-          </a:effectRef>
-          <a:fontRef idx="minor">
-            <a:schemeClr val="lt1"/>
-          </a:fontRef>
-        </p:style>
-        <p:txBody>
-          <a:bodyPr rtlCol="0" anchor="ctr" lIns="457200"/>
-          <a:lstStyle/>
-          <a:p>
-            <a:pPr algn="l"/>
-            <a:r>
-              <a:rPr sz="1800" b="1">
-                <a:solidFill>
-                  <a:srgbClr val="FFFFFF"/>
-                </a:solidFill>
-                <a:latin typeface="Yu Gothic UI"/>
-              </a:rPr>
-              <a:t>  8.  走行会主催者・媒体の皆様へ</a:t>
-            </a:r>
-          </a:p>
-        </p:txBody>
-      </p:sp>
-      <p:sp>
-        <p:nvSpPr>
-          <p:cNvPr id="3" name="TextBox 2"/>
-          <p:cNvSpPr txBox="1"/>
-          <p:nvPr/>
-        </p:nvSpPr>
-        <p:spPr>
-          <a:xfrm>
-            <a:off x="0" y="6446520"/>
-            <a:ext cx="12191695" cy="365760"/>
-          </a:xfrm>
-          <a:prstGeom prst="rect">
-            <a:avLst/>
-          </a:prstGeom>
-          <a:noFill/>
-        </p:spPr>
-        <p:txBody>
-          <a:bodyPr wrap="none">
-            <a:spAutoFit/>
-          </a:bodyPr>
-          <a:lstStyle/>
-          <a:p>
-            <a:pPr algn="ctr"/>
-            <a:r>
-              <a:rPr sz="900" b="0">
-                <a:solidFill>
-                  <a:srgbClr val="71717A"/>
-                </a:solidFill>
-                <a:latin typeface="Yu Gothic UI"/>
-              </a:rPr>
-              <a:t>走ログ (Hashilog) 事業提案書  v1.0  /  RBS  /  hashilog2024@gmail.com</a:t>
-            </a:r>
-          </a:p>
-        </p:txBody>
-      </p:sp>
-      <p:sp>
-        <p:nvSpPr>
-          <p:cNvPr id="4" name="TextBox 3"/>
-          <p:cNvSpPr txBox="1"/>
-          <p:nvPr/>
-        </p:nvSpPr>
-        <p:spPr>
-          <a:xfrm>
-            <a:off x="640080" y="914400"/>
-            <a:ext cx="5486400" cy="4572000"/>
-          </a:xfrm>
-          <a:prstGeom prst="rect">
-            <a:avLst/>
-          </a:prstGeom>
-          <a:noFill/>
-        </p:spPr>
-        <p:txBody>
-          <a:bodyPr wrap="none">
-            <a:spAutoFit/>
-          </a:bodyPr>
-          <a:lstStyle/>
-          <a:p>
-            <a:pPr algn="l"/>
-            <a:r>
-              <a:rPr sz="1800" b="1">
-                <a:solidFill>
-                  <a:srgbClr val="E10600"/>
-                </a:solidFill>
-                <a:latin typeface="Yu Gothic UI"/>
-              </a:rPr>
-              <a:t>走行会・大会主催者</a:t>
-            </a:r>
-          </a:p>
-          <a:p>
-            <a:pPr algn="l"/>
-            <a:r>
-              <a:rPr sz="1300" b="0">
+              <a:t>・ イベント特化ページ作成 (要相談)</a:t>
+            </a:r>
+          </a:p>
+          <a:p>
+            <a:pPr algn="l">
+              <a:lnSpc>
+                <a:spcPct val="120000"/>
+              </a:lnSpc>
+            </a:pPr>
+            <a:r>
+              <a:rPr sz="1100" b="0">
                 <a:solidFill>
                   <a:srgbClr val="18181B"/>
                 </a:solidFill>
                 <a:latin typeface="Yu Gothic UI"/>
               </a:rPr>
-              <a:t>・ イベント告知ページ (無料)</a:t>
-            </a:r>
-          </a:p>
-          <a:p>
-            <a:pPr algn="l"/>
-            <a:r>
-              <a:rPr sz="1300" b="0">
+              <a:t>・ 走ログ内データの記事引用 (媒体)</a:t>
+            </a:r>
+          </a:p>
+          <a:p>
+            <a:pPr algn="l">
+              <a:lnSpc>
+                <a:spcPct val="120000"/>
+              </a:lnSpc>
+            </a:pPr>
+            <a:r>
+              <a:rPr sz="1100" b="0">
                 <a:solidFill>
                   <a:srgbClr val="18181B"/>
                 </a:solidFill>
                 <a:latin typeface="Yu Gothic UI"/>
               </a:rPr>
-              <a:t>・ 参加者のタイム集計テンプレート</a:t>
-            </a:r>
-          </a:p>
-          <a:p>
-            <a:pPr algn="l"/>
-            <a:r>
-              <a:rPr sz="1300" b="0">
-                <a:solidFill>
-                  <a:srgbClr val="18181B"/>
-                </a:solidFill>
-                <a:latin typeface="Yu Gothic UI"/>
-              </a:rPr>
-              <a:t>・ イベント特化ページ (有料・要相談)</a:t>
-            </a:r>
-          </a:p>
-          <a:p>
-            <a:pPr algn="l"/>
-            <a:r>
-              <a:rPr sz="1300" b="0">
-                <a:solidFill>
-                  <a:srgbClr val="18181B"/>
-                </a:solidFill>
-                <a:latin typeface="Yu Gothic UI"/>
-              </a:rPr>
-              <a:t>・ 主催者ロゴ・告知の常設掲載</a:t>
-            </a:r>
-          </a:p>
-        </p:txBody>
-      </p:sp>
-      <p:sp>
-        <p:nvSpPr>
-          <p:cNvPr id="5" name="TextBox 4"/>
-          <p:cNvSpPr txBox="1"/>
-          <p:nvPr/>
-        </p:nvSpPr>
-        <p:spPr>
-          <a:xfrm>
-            <a:off x="6400800" y="914400"/>
-            <a:ext cx="5486400" cy="4572000"/>
-          </a:xfrm>
-          <a:prstGeom prst="rect">
-            <a:avLst/>
-          </a:prstGeom>
-          <a:noFill/>
-        </p:spPr>
-        <p:txBody>
-          <a:bodyPr wrap="none">
-            <a:spAutoFit/>
-          </a:bodyPr>
-          <a:lstStyle/>
-          <a:p>
-            <a:pPr algn="l"/>
-            <a:r>
-              <a:rPr sz="1800" b="1">
-                <a:solidFill>
-                  <a:srgbClr val="E10600"/>
-                </a:solidFill>
-                <a:latin typeface="Yu Gothic UI"/>
-              </a:rPr>
-              <a:t>モータースポーツ媒体</a:t>
-            </a:r>
-          </a:p>
-          <a:p>
-            <a:pPr algn="l"/>
-            <a:r>
-              <a:rPr sz="1300" b="0">
-                <a:solidFill>
-                  <a:srgbClr val="18181B"/>
-                </a:solidFill>
-                <a:latin typeface="Yu Gothic UI"/>
-              </a:rPr>
-              <a:t>・ 走ログ内データの記事引用 (クレジット表記)</a:t>
-            </a:r>
-          </a:p>
-          <a:p>
-            <a:pPr algn="l"/>
-            <a:r>
-              <a:rPr sz="1300" b="0">
-                <a:solidFill>
-                  <a:srgbClr val="18181B"/>
-                </a:solidFill>
-                <a:latin typeface="Yu Gothic UI"/>
-              </a:rPr>
-              <a:t>・ 共同企画記事</a:t>
-            </a:r>
-          </a:p>
-          <a:p>
-            <a:pPr algn="l"/>
-            <a:r>
-              <a:rPr sz="1300" b="0">
-                <a:solidFill>
-                  <a:srgbClr val="18181B"/>
-                </a:solidFill>
-                <a:latin typeface="Yu Gothic UI"/>
-              </a:rPr>
-              <a:t>・ 走ログユーザーへのアンケート協力</a:t>
-            </a:r>
-          </a:p>
-          <a:p>
-            <a:pPr algn="l"/>
-            <a:r>
-              <a:rPr sz="1300" b="0">
-                <a:solidFill>
-                  <a:srgbClr val="18181B"/>
-                </a:solidFill>
-                <a:latin typeface="Yu Gothic UI"/>
-              </a:rPr>
-              <a:t>・ データ提供 (要相談)</a:t>
-            </a:r>
-          </a:p>
-        </p:txBody>
-      </p:sp>
-    </p:spTree>
-  </p:cSld>
-  <p:clrMapOvr>
-    <a:masterClrMapping/>
-  </p:clrMapOvr>
-</p:sld>
-</file>
-
-<file path=ppt/slides/slide17.xml><?xml version="1.0" encoding="utf-8"?>
-<p:sld xmlns:a="http://schemas.openxmlformats.org/drawingml/2006/main" xmlns:p="http://schemas.openxmlformats.org/presentationml/2006/main" xmlns:r="http://schemas.openxmlformats.org/officeDocument/2006/relationships">
-  <p:cSld>
-    <p:spTree>
-      <p:nvGrpSpPr>
-        <p:cNvPr id="1" name=""/>
-        <p:cNvGrpSpPr/>
-        <p:nvPr/>
-      </p:nvGrpSpPr>
-      <p:grpSpPr/>
-      <p:sp>
-        <p:nvSpPr>
-          <p:cNvPr id="2" name="Rectangle 1"/>
-          <p:cNvSpPr/>
-          <p:nvPr/>
-        </p:nvSpPr>
-        <p:spPr>
-          <a:xfrm>
-            <a:off x="0" y="0"/>
-            <a:ext cx="12191695" cy="502920"/>
-          </a:xfrm>
-          <a:prstGeom prst="rect">
-            <a:avLst/>
-          </a:prstGeom>
-          <a:solidFill>
-            <a:srgbClr val="E10600"/>
-          </a:solidFill>
-          <a:ln>
-            <a:noFill/>
-          </a:ln>
-        </p:spPr>
-        <p:style>
-          <a:lnRef idx="1">
-            <a:schemeClr val="accent1"/>
-          </a:lnRef>
-          <a:fillRef idx="3">
-            <a:schemeClr val="accent1"/>
-          </a:fillRef>
-          <a:effectRef idx="2">
-            <a:schemeClr val="accent1"/>
-          </a:effectRef>
-          <a:fontRef idx="minor">
-            <a:schemeClr val="lt1"/>
-          </a:fontRef>
-        </p:style>
-        <p:txBody>
-          <a:bodyPr rtlCol="0" anchor="ctr" lIns="457200"/>
-          <a:lstStyle/>
-          <a:p>
-            <a:pPr algn="l"/>
-            <a:r>
-              <a:rPr sz="1800" b="1">
-                <a:solidFill>
-                  <a:srgbClr val="FFFFFF"/>
-                </a:solidFill>
-                <a:latin typeface="Yu Gothic UI"/>
-              </a:rPr>
-              <a:t>  9.  データ・分析価値</a:t>
-            </a:r>
-          </a:p>
-        </p:txBody>
-      </p:sp>
-      <p:sp>
-        <p:nvSpPr>
-          <p:cNvPr id="3" name="TextBox 2"/>
-          <p:cNvSpPr txBox="1"/>
-          <p:nvPr/>
-        </p:nvSpPr>
-        <p:spPr>
-          <a:xfrm>
-            <a:off x="0" y="6446520"/>
-            <a:ext cx="12191695" cy="365760"/>
-          </a:xfrm>
-          <a:prstGeom prst="rect">
-            <a:avLst/>
-          </a:prstGeom>
-          <a:noFill/>
-        </p:spPr>
-        <p:txBody>
-          <a:bodyPr wrap="none">
-            <a:spAutoFit/>
-          </a:bodyPr>
-          <a:lstStyle/>
-          <a:p>
-            <a:pPr algn="ctr"/>
-            <a:r>
-              <a:rPr sz="900" b="0">
-                <a:solidFill>
-                  <a:srgbClr val="71717A"/>
-                </a:solidFill>
-                <a:latin typeface="Yu Gothic UI"/>
-              </a:rPr>
-              <a:t>走ログ (Hashilog) 事業提案書  v1.0  /  RBS  /  hashilog2024@gmail.com</a:t>
-            </a:r>
-          </a:p>
-        </p:txBody>
-      </p:sp>
-      <p:sp>
-        <p:nvSpPr>
-          <p:cNvPr id="4" name="TextBox 3"/>
-          <p:cNvSpPr txBox="1"/>
-          <p:nvPr/>
-        </p:nvSpPr>
-        <p:spPr>
-          <a:xfrm>
-            <a:off x="640080" y="777240"/>
-            <a:ext cx="10972800" cy="640080"/>
-          </a:xfrm>
-          <a:prstGeom prst="rect">
-            <a:avLst/>
-          </a:prstGeom>
-          <a:noFill/>
-        </p:spPr>
-        <p:txBody>
-          <a:bodyPr wrap="none">
-            <a:spAutoFit/>
-          </a:bodyPr>
-          <a:lstStyle/>
-          <a:p>
-            <a:pPr algn="l"/>
-            <a:r>
-              <a:rPr sz="1400" b="0">
-                <a:solidFill>
-                  <a:srgbClr val="3F3F46"/>
-                </a:solidFill>
-                <a:latin typeface="Yu Gothic UI"/>
-              </a:rPr>
-              <a:t>走ログは「ユーザー投稿型のサーキット走行データベース」として下記指標を蓄積。</a:t>
-            </a:r>
-          </a:p>
-        </p:txBody>
-      </p:sp>
-      <p:sp>
-        <p:nvSpPr>
-          <p:cNvPr id="5" name="TextBox 4"/>
-          <p:cNvSpPr txBox="1"/>
-          <p:nvPr/>
-        </p:nvSpPr>
-        <p:spPr>
-          <a:xfrm>
-            <a:off x="640080" y="1463040"/>
-            <a:ext cx="10972800" cy="4937760"/>
-          </a:xfrm>
-          <a:prstGeom prst="rect">
-            <a:avLst/>
-          </a:prstGeom>
-          <a:noFill/>
-        </p:spPr>
-        <p:txBody>
-          <a:bodyPr wrap="none">
-            <a:spAutoFit/>
-          </a:bodyPr>
-          <a:lstStyle/>
-          <a:p>
-            <a:pPr algn="l"/>
-            <a:r>
-              <a:rPr sz="1500" b="0">
-                <a:solidFill>
-                  <a:srgbClr val="18181B"/>
-                </a:solidFill>
-                <a:latin typeface="Yu Gothic UI"/>
-              </a:rPr>
-              <a:t>・ サーキット別の車種シェア・タイヤシェア・年代シェア</a:t>
-            </a:r>
-          </a:p>
-          <a:p>
-            <a:pPr algn="l"/>
-            <a:r>
-              <a:rPr sz="1500" b="0">
-                <a:solidFill>
-                  <a:srgbClr val="18181B"/>
-                </a:solidFill>
-                <a:latin typeface="Yu Gothic UI"/>
-              </a:rPr>
-              <a:t>・ 季節別・天候別のタイム分布</a:t>
-            </a:r>
-          </a:p>
-          <a:p>
-            <a:pPr algn="l"/>
-            <a:r>
-              <a:rPr sz="1500" b="0">
-                <a:solidFill>
-                  <a:srgbClr val="18181B"/>
-                </a:solidFill>
-                <a:latin typeface="Yu Gothic UI"/>
-              </a:rPr>
-              <a:t>・ 同一車種における改造内容とタイムの相関</a:t>
-            </a:r>
-          </a:p>
-          <a:p>
-            <a:pPr algn="l"/>
-            <a:r>
-              <a:rPr sz="1500" b="0">
-                <a:solidFill>
-                  <a:srgbClr val="18181B"/>
-                </a:solidFill>
-                <a:latin typeface="Yu Gothic UI"/>
-              </a:rPr>
-              <a:t>・ タイヤ銘柄ごとの使用率・好まれるサーキット</a:t>
-            </a:r>
-          </a:p>
-          <a:p>
-            <a:pPr algn="l"/>
-            <a:r>
-              <a:rPr sz="1500" b="0">
-                <a:solidFill>
-                  <a:srgbClr val="18181B"/>
-                </a:solidFill>
-                <a:latin typeface="Yu Gothic UI"/>
-              </a:rPr>
-              <a:t>・ ユーザーの SNS 連携率、ピーク時間帯、地域分布</a:t>
-            </a:r>
-          </a:p>
-          <a:p>
-            <a:pPr algn="l"/>
-            <a:r>
-              <a:rPr sz="1500" b="0">
-                <a:solidFill>
-                  <a:srgbClr val="18181B"/>
-                </a:solidFill>
-                <a:latin typeface="Yu Gothic UI"/>
-              </a:rPr>
-              <a:t>・ → 個人を特定しない集計形式でメーカー・媒体に提供可能。</a:t>
-            </a:r>
-          </a:p>
-        </p:txBody>
-      </p:sp>
-    </p:spTree>
-  </p:cSld>
-  <p:clrMapOvr>
-    <a:masterClrMapping/>
-  </p:clrMapOvr>
-</p:sld>
-</file>
-
-<file path=ppt/slides/slide18.xml><?xml version="1.0" encoding="utf-8"?>
-<p:sld xmlns:a="http://schemas.openxmlformats.org/drawingml/2006/main" xmlns:p="http://schemas.openxmlformats.org/presentationml/2006/main" xmlns:r="http://schemas.openxmlformats.org/officeDocument/2006/relationships">
-  <p:cSld>
-    <p:spTree>
-      <p:nvGrpSpPr>
-        <p:cNvPr id="1" name=""/>
-        <p:cNvGrpSpPr/>
-        <p:nvPr/>
-      </p:nvGrpSpPr>
-      <p:grpSpPr/>
-      <p:sp>
-        <p:nvSpPr>
-          <p:cNvPr id="2" name="Rectangle 1"/>
-          <p:cNvSpPr/>
-          <p:nvPr/>
-        </p:nvSpPr>
-        <p:spPr>
-          <a:xfrm>
-            <a:off x="0" y="0"/>
-            <a:ext cx="12191695" cy="502920"/>
-          </a:xfrm>
-          <a:prstGeom prst="rect">
-            <a:avLst/>
-          </a:prstGeom>
-          <a:solidFill>
-            <a:srgbClr val="E10600"/>
-          </a:solidFill>
-          <a:ln>
-            <a:noFill/>
-          </a:ln>
-        </p:spPr>
-        <p:style>
-          <a:lnRef idx="1">
-            <a:schemeClr val="accent1"/>
-          </a:lnRef>
-          <a:fillRef idx="3">
-            <a:schemeClr val="accent1"/>
-          </a:fillRef>
-          <a:effectRef idx="2">
-            <a:schemeClr val="accent1"/>
-          </a:effectRef>
-          <a:fontRef idx="minor">
-            <a:schemeClr val="lt1"/>
-          </a:fontRef>
-        </p:style>
-        <p:txBody>
-          <a:bodyPr rtlCol="0" anchor="ctr" lIns="457200"/>
-          <a:lstStyle/>
-          <a:p>
-            <a:pPr algn="l"/>
-            <a:r>
-              <a:rPr sz="1800" b="1">
-                <a:solidFill>
-                  <a:srgbClr val="FFFFFF"/>
-                </a:solidFill>
-                <a:latin typeface="Yu Gothic UI"/>
-              </a:rPr>
-              <a:t>  10.  ロードマップ</a:t>
-            </a:r>
-          </a:p>
-        </p:txBody>
-      </p:sp>
-      <p:sp>
-        <p:nvSpPr>
-          <p:cNvPr id="3" name="TextBox 2"/>
-          <p:cNvSpPr txBox="1"/>
-          <p:nvPr/>
-        </p:nvSpPr>
-        <p:spPr>
-          <a:xfrm>
-            <a:off x="0" y="6446520"/>
-            <a:ext cx="12191695" cy="365760"/>
-          </a:xfrm>
-          <a:prstGeom prst="rect">
-            <a:avLst/>
-          </a:prstGeom>
-          <a:noFill/>
-        </p:spPr>
-        <p:txBody>
-          <a:bodyPr wrap="none">
-            <a:spAutoFit/>
-          </a:bodyPr>
-          <a:lstStyle/>
-          <a:p>
-            <a:pPr algn="ctr"/>
-            <a:r>
-              <a:rPr sz="900" b="0">
-                <a:solidFill>
-                  <a:srgbClr val="71717A"/>
-                </a:solidFill>
-                <a:latin typeface="Yu Gothic UI"/>
-              </a:rPr>
-              <a:t>走ログ (Hashilog) 事業提案書  v1.0  /  RBS  /  hashilog2024@gmail.com</a:t>
-            </a:r>
-          </a:p>
-        </p:txBody>
-      </p:sp>
-      <p:sp>
-        <p:nvSpPr>
-          <p:cNvPr id="4" name="TextBox 3"/>
-          <p:cNvSpPr txBox="1"/>
-          <p:nvPr/>
-        </p:nvSpPr>
-        <p:spPr>
-          <a:xfrm>
-            <a:off x="640080" y="914400"/>
-            <a:ext cx="5486400" cy="4572000"/>
-          </a:xfrm>
-          <a:prstGeom prst="rect">
-            <a:avLst/>
-          </a:prstGeom>
-          <a:noFill/>
-        </p:spPr>
-        <p:txBody>
-          <a:bodyPr wrap="none">
-            <a:spAutoFit/>
-          </a:bodyPr>
-          <a:lstStyle/>
-          <a:p>
-            <a:pPr algn="l"/>
-            <a:r>
-              <a:rPr sz="1800" b="1">
-                <a:solidFill>
-                  <a:srgbClr val="E10600"/>
-                </a:solidFill>
-                <a:latin typeface="Yu Gothic UI"/>
-              </a:rPr>
-              <a:t>完了済み (2026年5月)</a:t>
-            </a:r>
-          </a:p>
-          <a:p>
-            <a:pPr algn="l"/>
-            <a:r>
-              <a:rPr sz="1300" b="0">
-                <a:solidFill>
-                  <a:srgbClr val="18181B"/>
-                </a:solidFill>
-                <a:latin typeface="Yu Gothic UI"/>
-              </a:rPr>
-              <a:t>・ 認証 / プロフィール / SNS 連携</a:t>
-            </a:r>
-          </a:p>
-          <a:p>
-            <a:pPr algn="l"/>
-            <a:r>
-              <a:rPr sz="1300" b="0">
-                <a:solidFill>
-                  <a:srgbClr val="18181B"/>
-                </a:solidFill>
-                <a:latin typeface="Yu Gothic UI"/>
-              </a:rPr>
-              <a:t>・ 愛車・改造履歴</a:t>
-            </a:r>
-          </a:p>
-          <a:p>
-            <a:pPr algn="l"/>
-            <a:r>
-              <a:rPr sz="1300" b="0">
-                <a:solidFill>
-                  <a:srgbClr val="18181B"/>
-                </a:solidFill>
-                <a:latin typeface="Yu Gothic UI"/>
-              </a:rPr>
-              <a:t>・ タイム投稿 (前後別タイヤ含む)</a:t>
-            </a:r>
-          </a:p>
-          <a:p>
-            <a:pPr algn="l"/>
-            <a:r>
-              <a:rPr sz="1300" b="0">
-                <a:solidFill>
-                  <a:srgbClr val="18181B"/>
-                </a:solidFill>
-                <a:latin typeface="Yu Gothic UI"/>
-              </a:rPr>
-              <a:t>・ ランキング・多次元フィルター</a:t>
-            </a:r>
-          </a:p>
-          <a:p>
-            <a:pPr algn="l"/>
-            <a:r>
-              <a:rPr sz="1300" b="0">
-                <a:solidFill>
-                  <a:srgbClr val="18181B"/>
-                </a:solidFill>
-                <a:latin typeface="Yu Gothic UI"/>
-              </a:rPr>
-              <a:t>・ サーキット 25+ 登録 / 運営者管理</a:t>
-            </a:r>
-          </a:p>
-          <a:p>
-            <a:pPr algn="l"/>
-            <a:r>
-              <a:rPr sz="1300" b="0">
-                <a:solidFill>
-                  <a:srgbClr val="18181B"/>
-                </a:solidFill>
-                <a:latin typeface="Yu Gothic UI"/>
-              </a:rPr>
-              <a:t>・ 通報・モデレーション</a:t>
-            </a:r>
-          </a:p>
-          <a:p>
-            <a:pPr algn="l"/>
-            <a:r>
-              <a:rPr sz="1300" b="0">
-                <a:solidFill>
-                  <a:srgbClr val="18181B"/>
-                </a:solidFill>
-                <a:latin typeface="Yu Gothic UI"/>
-              </a:rPr>
-              <a:t>・ PWA / SEO / 構造化データ</a:t>
-            </a:r>
-          </a:p>
-          <a:p>
-            <a:pPr algn="l"/>
-            <a:r>
-              <a:rPr sz="1300" b="0">
-                <a:solidFill>
-                  <a:srgbClr val="18181B"/>
-                </a:solidFill>
-                <a:latin typeface="Yu Gothic UI"/>
-              </a:rPr>
-              <a:t>・ 規約・プライバシー・特商法</a:t>
-            </a:r>
-          </a:p>
-        </p:txBody>
-      </p:sp>
-      <p:sp>
-        <p:nvSpPr>
-          <p:cNvPr id="5" name="TextBox 4"/>
-          <p:cNvSpPr txBox="1"/>
-          <p:nvPr/>
-        </p:nvSpPr>
-        <p:spPr>
-          <a:xfrm>
-            <a:off x="6400800" y="914400"/>
-            <a:ext cx="5486400" cy="4572000"/>
-          </a:xfrm>
-          <a:prstGeom prst="rect">
-            <a:avLst/>
-          </a:prstGeom>
-          <a:noFill/>
-        </p:spPr>
-        <p:txBody>
-          <a:bodyPr wrap="none">
-            <a:spAutoFit/>
-          </a:bodyPr>
-          <a:lstStyle/>
-          <a:p>
-            <a:pPr algn="l"/>
-            <a:r>
-              <a:rPr sz="1800" b="1">
-                <a:solidFill>
-                  <a:srgbClr val="E10600"/>
-                </a:solidFill>
-                <a:latin typeface="Yu Gothic UI"/>
-              </a:rPr>
-              <a:t>短期〜中期 (3〜12 か月)</a:t>
-            </a:r>
-          </a:p>
-          <a:p>
-            <a:pPr algn="l"/>
-            <a:r>
-              <a:rPr sz="1300" b="0">
-                <a:solidFill>
-                  <a:srgbClr val="18181B"/>
-                </a:solidFill>
-                <a:latin typeface="Yu Gothic UI"/>
-              </a:rPr>
-              <a:t>・ ベストタイム推移グラフ</a:t>
-            </a:r>
-          </a:p>
-          <a:p>
-            <a:pPr algn="l"/>
-            <a:r>
-              <a:rPr sz="1300" b="0">
-                <a:solidFill>
-                  <a:srgbClr val="18181B"/>
-                </a:solidFill>
-                <a:latin typeface="Yu Gothic UI"/>
-              </a:rPr>
-              <a:t>・ 同一車種比較ダッシュボード</a:t>
-            </a:r>
-          </a:p>
-          <a:p>
-            <a:pPr algn="l"/>
-            <a:r>
-              <a:rPr sz="1300" b="0">
-                <a:solidFill>
-                  <a:srgbClr val="18181B"/>
-                </a:solidFill>
-                <a:latin typeface="Yu Gothic UI"/>
-              </a:rPr>
-              <a:t>・ 走行会・イベントカレンダー (横断)</a:t>
-            </a:r>
-          </a:p>
-          <a:p>
-            <a:pPr algn="l"/>
-            <a:r>
-              <a:rPr sz="1300" b="0">
-                <a:solidFill>
-                  <a:srgbClr val="18181B"/>
-                </a:solidFill>
-                <a:latin typeface="Yu Gothic UI"/>
-              </a:rPr>
-              <a:t>・ 通知機能 (記録更新、フォロー先)</a:t>
-            </a:r>
-          </a:p>
-          <a:p>
-            <a:pPr algn="l"/>
-            <a:r>
-              <a:rPr sz="1300" b="0">
-                <a:solidFill>
-                  <a:srgbClr val="18181B"/>
-                </a:solidFill>
-                <a:latin typeface="Yu Gothic UI"/>
-              </a:rPr>
-              <a:t>・ メーカー向け管理コンソール</a:t>
-            </a:r>
-          </a:p>
-          <a:p>
-            <a:pPr algn="l"/>
-            <a:r>
-              <a:rPr sz="1300" b="0">
-                <a:solidFill>
-                  <a:srgbClr val="18181B"/>
-                </a:solidFill>
-                <a:latin typeface="Yu Gothic UI"/>
-              </a:rPr>
-              <a:t>・ チームアカウント</a:t>
-            </a:r>
-          </a:p>
-          <a:p>
-            <a:pPr algn="l"/>
-            <a:r>
-              <a:rPr sz="1300" b="0">
-                <a:solidFill>
-                  <a:srgbClr val="18181B"/>
-                </a:solidFill>
-                <a:latin typeface="Yu Gothic UI"/>
-              </a:rPr>
-              <a:t>・ API 公開</a:t>
-            </a:r>
-          </a:p>
-          <a:p>
-            <a:pPr algn="l"/>
-            <a:r>
-              <a:rPr sz="1300" b="0">
-                <a:solidFill>
-                  <a:srgbClr val="18181B"/>
-                </a:solidFill>
-                <a:latin typeface="Yu Gothic UI"/>
-              </a:rPr>
-              <a:t>・ AI 走行ライン分析 (将来)</a:t>
-            </a:r>
-          </a:p>
-        </p:txBody>
-      </p:sp>
-    </p:spTree>
-  </p:cSld>
-  <p:clrMapOvr>
-    <a:masterClrMapping/>
-  </p:clrMapOvr>
-</p:sld>
-</file>
-
-<file path=ppt/slides/slide19.xml><?xml version="1.0" encoding="utf-8"?>
-<p:sld xmlns:a="http://schemas.openxmlformats.org/drawingml/2006/main" xmlns:p="http://schemas.openxmlformats.org/presentationml/2006/main" xmlns:r="http://schemas.openxmlformats.org/officeDocument/2006/relationships">
-  <p:cSld>
-    <p:spTree>
-      <p:nvGrpSpPr>
-        <p:cNvPr id="1" name=""/>
-        <p:cNvGrpSpPr/>
-        <p:nvPr/>
-      </p:nvGrpSpPr>
-      <p:grpSpPr/>
-      <p:sp>
-        <p:nvSpPr>
-          <p:cNvPr id="2" name="Rectangle 1"/>
-          <p:cNvSpPr/>
-          <p:nvPr/>
-        </p:nvSpPr>
-        <p:spPr>
-          <a:xfrm>
-            <a:off x="0" y="0"/>
-            <a:ext cx="12191695" cy="502920"/>
-          </a:xfrm>
-          <a:prstGeom prst="rect">
-            <a:avLst/>
-          </a:prstGeom>
-          <a:solidFill>
-            <a:srgbClr val="E10600"/>
-          </a:solidFill>
-          <a:ln>
-            <a:noFill/>
-          </a:ln>
-        </p:spPr>
-        <p:style>
-          <a:lnRef idx="1">
-            <a:schemeClr val="accent1"/>
-          </a:lnRef>
-          <a:fillRef idx="3">
-            <a:schemeClr val="accent1"/>
-          </a:fillRef>
-          <a:effectRef idx="2">
-            <a:schemeClr val="accent1"/>
-          </a:effectRef>
-          <a:fontRef idx="minor">
-            <a:schemeClr val="lt1"/>
-          </a:fontRef>
-        </p:style>
-        <p:txBody>
-          <a:bodyPr rtlCol="0" anchor="ctr"/>
-          <a:lstStyle/>
-          <a:p>
-            <a:pPr algn="ctr"/>
-          </a:p>
-        </p:txBody>
-      </p:sp>
-      <p:sp>
-        <p:nvSpPr>
-          <p:cNvPr id="3" name="TextBox 2"/>
-          <p:cNvSpPr txBox="1"/>
-          <p:nvPr/>
-        </p:nvSpPr>
-        <p:spPr>
-          <a:xfrm>
-            <a:off x="0" y="6446520"/>
-            <a:ext cx="12191695" cy="365760"/>
-          </a:xfrm>
-          <a:prstGeom prst="rect">
-            <a:avLst/>
-          </a:prstGeom>
-          <a:noFill/>
-        </p:spPr>
-        <p:txBody>
-          <a:bodyPr wrap="none">
-            <a:spAutoFit/>
-          </a:bodyPr>
-          <a:lstStyle/>
-          <a:p>
-            <a:pPr algn="ctr"/>
-            <a:r>
-              <a:rPr sz="900" b="0">
-                <a:solidFill>
-                  <a:srgbClr val="71717A"/>
-                </a:solidFill>
-                <a:latin typeface="Yu Gothic UI"/>
-              </a:rPr>
-              <a:t>走ログ (Hashilog) 事業提案書  v1.0  /  RBS  /  hashilog2024@gmail.com</a:t>
-            </a:r>
-          </a:p>
-        </p:txBody>
-      </p:sp>
-      <p:sp>
-        <p:nvSpPr>
-          <p:cNvPr id="4" name="TextBox 3"/>
-          <p:cNvSpPr txBox="1"/>
-          <p:nvPr/>
-        </p:nvSpPr>
-        <p:spPr>
-          <a:xfrm>
-            <a:off x="640080" y="1005840"/>
-            <a:ext cx="10881360" cy="1828800"/>
-          </a:xfrm>
-          <a:prstGeom prst="rect">
-            <a:avLst/>
-          </a:prstGeom>
-          <a:noFill/>
-        </p:spPr>
-        <p:txBody>
-          <a:bodyPr wrap="none">
-            <a:spAutoFit/>
-          </a:bodyPr>
-          <a:lstStyle/>
-          <a:p>
-            <a:r>
-              <a:rPr sz="3000" b="1">
-                <a:solidFill>
-                  <a:srgbClr val="18181B"/>
-                </a:solidFill>
-                <a:latin typeface="Yu Gothic UI"/>
-              </a:rPr>
-              <a:t>サーキットを走るすべての人が、</a:t>
-            </a:r>
-          </a:p>
-          <a:p>
-            <a:r>
-              <a:rPr sz="3000" b="1">
-                <a:solidFill>
-                  <a:srgbClr val="E10600"/>
-                </a:solidFill>
-                <a:latin typeface="Yu Gothic UI"/>
-              </a:rPr>
-              <a:t>自分のタイムをもっと誇れる場所へ。</a:t>
-            </a:r>
-          </a:p>
-        </p:txBody>
-      </p:sp>
-      <p:sp>
-        <p:nvSpPr>
-          <p:cNvPr id="5" name="TextBox 4"/>
-          <p:cNvSpPr txBox="1"/>
-          <p:nvPr/>
-        </p:nvSpPr>
-        <p:spPr>
-          <a:xfrm>
-            <a:off x="640080" y="3017520"/>
-            <a:ext cx="10881360" cy="1828800"/>
-          </a:xfrm>
-          <a:prstGeom prst="rect">
-            <a:avLst/>
-          </a:prstGeom>
-          <a:noFill/>
-        </p:spPr>
-        <p:txBody>
-          <a:bodyPr wrap="none">
-            <a:spAutoFit/>
-          </a:bodyPr>
-          <a:lstStyle/>
-          <a:p>
-            <a:r>
-              <a:rPr sz="1600" b="0">
-                <a:solidFill>
-                  <a:srgbClr val="3F3F46"/>
-                </a:solidFill>
-                <a:latin typeface="Yu Gothic UI"/>
-              </a:rPr>
-              <a:t>ぜひ一度、サービスを実際に触っていただき、提携の可能性についてお話しさせてください。</a:t>
-            </a:r>
-          </a:p>
-        </p:txBody>
-      </p:sp>
-      <p:sp>
-        <p:nvSpPr>
-          <p:cNvPr id="6" name="Rounded Rectangle 5"/>
-          <p:cNvSpPr/>
-          <p:nvPr/>
-        </p:nvSpPr>
-        <p:spPr>
-          <a:xfrm>
-            <a:off x="640080" y="4206240"/>
-            <a:ext cx="10881360" cy="1920240"/>
-          </a:xfrm>
-          <a:prstGeom prst="roundRect">
-            <a:avLst/>
-          </a:prstGeom>
-          <a:solidFill>
-            <a:srgbClr val="FAFAFA"/>
-          </a:solidFill>
-          <a:ln>
-            <a:solidFill>
-              <a:srgbClr val="E4E4E7"/>
-            </a:solidFill>
-          </a:ln>
-        </p:spPr>
-        <p:style>
-          <a:lnRef idx="1">
-            <a:schemeClr val="accent1"/>
-          </a:lnRef>
-          <a:fillRef idx="3">
-            <a:schemeClr val="accent1"/>
-          </a:fillRef>
-          <a:effectRef idx="2">
-            <a:schemeClr val="accent1"/>
-          </a:effectRef>
-          <a:fontRef idx="minor">
-            <a:schemeClr val="lt1"/>
-          </a:fontRef>
-        </p:style>
-        <p:txBody>
-          <a:bodyPr rtlCol="0" anchor="ctr" lIns="365760" tIns="274320"/>
-          <a:lstStyle/>
-          <a:p>
-            <a:pPr algn="l"/>
-            <a:r>
-              <a:rPr sz="2200" b="1">
-                <a:solidFill>
-                  <a:srgbClr val="18181B"/>
-                </a:solidFill>
-                <a:latin typeface="Yu Gothic UI"/>
-              </a:rPr>
-              <a:t>走ログ (Hashilog)</a:t>
-            </a:r>
-          </a:p>
-          <a:p>
-            <a:pPr algn="l"/>
-            <a:r>
-              <a:rPr sz="1400" b="0">
-                <a:solidFill>
-                  <a:srgbClr val="3F3F46"/>
-                </a:solidFill>
-                <a:latin typeface="Yu Gothic UI"/>
-              </a:rPr>
-              <a:t>Web   :  https://hashilog.jp</a:t>
-            </a:r>
-          </a:p>
-          <a:p>
-            <a:pPr algn="l"/>
-            <a:r>
-              <a:rPr sz="1400" b="0">
-                <a:solidFill>
-                  <a:srgbClr val="3F3F46"/>
-                </a:solidFill>
-                <a:latin typeface="Yu Gothic UI"/>
-              </a:rPr>
-              <a:t>事業者:  RBS</a:t>
-            </a:r>
-          </a:p>
-          <a:p>
-            <a:pPr algn="l"/>
-            <a:r>
-              <a:rPr sz="1400" b="0">
-                <a:solidFill>
-                  <a:srgbClr val="3F3F46"/>
-                </a:solidFill>
-                <a:latin typeface="Yu Gothic UI"/>
-              </a:rPr>
-              <a:t>責任者:  久米田 昴</a:t>
-            </a:r>
-          </a:p>
-          <a:p>
-            <a:pPr algn="l"/>
-            <a:r>
-              <a:rPr sz="1400" b="0">
-                <a:solidFill>
-                  <a:srgbClr val="3F3F46"/>
-                </a:solidFill>
-                <a:latin typeface="Yu Gothic UI"/>
-              </a:rPr>
-              <a:t>お問い合わせ:  hashilog2024@gmail.com</a:t>
-            </a:r>
-          </a:p>
-        </p:txBody>
-      </p:sp>
-    </p:spTree>
-  </p:cSld>
-  <p:clrMapOvr>
-    <a:masterClrMapping/>
-  </p:clrMapOvr>
-</p:sld>
-</file>
-
-<file path=ppt/slides/slide2.xml><?xml version="1.0" encoding="utf-8"?>
-<p:sld xmlns:a="http://schemas.openxmlformats.org/drawingml/2006/main" xmlns:p="http://schemas.openxmlformats.org/presentationml/2006/main" xmlns:r="http://schemas.openxmlformats.org/officeDocument/2006/relationships">
-  <p:cSld>
-    <p:spTree>
-      <p:nvGrpSpPr>
-        <p:cNvPr id="1" name=""/>
-        <p:cNvGrpSpPr/>
-        <p:nvPr/>
-      </p:nvGrpSpPr>
-      <p:grpSpPr/>
-      <p:sp>
-        <p:nvSpPr>
-          <p:cNvPr id="2" name="Rectangle 1"/>
-          <p:cNvSpPr/>
-          <p:nvPr/>
-        </p:nvSpPr>
-        <p:spPr>
-          <a:xfrm>
-            <a:off x="0" y="0"/>
-            <a:ext cx="12191695" cy="502920"/>
-          </a:xfrm>
-          <a:prstGeom prst="rect">
-            <a:avLst/>
-          </a:prstGeom>
-          <a:solidFill>
-            <a:srgbClr val="E10600"/>
-          </a:solidFill>
-          <a:ln>
-            <a:noFill/>
-          </a:ln>
-        </p:spPr>
-        <p:style>
-          <a:lnRef idx="1">
-            <a:schemeClr val="accent1"/>
-          </a:lnRef>
-          <a:fillRef idx="3">
-            <a:schemeClr val="accent1"/>
-          </a:fillRef>
-          <a:effectRef idx="2">
-            <a:schemeClr val="accent1"/>
-          </a:effectRef>
-          <a:fontRef idx="minor">
-            <a:schemeClr val="lt1"/>
-          </a:fontRef>
-        </p:style>
-        <p:txBody>
-          <a:bodyPr rtlCol="0" anchor="ctr" lIns="457200"/>
-          <a:lstStyle/>
-          <a:p>
-            <a:pPr algn="l"/>
-            <a:r>
-              <a:rPr sz="1800" b="1">
-                <a:solidFill>
-                  <a:srgbClr val="FFFFFF"/>
-                </a:solidFill>
-                <a:latin typeface="Yu Gothic UI"/>
-              </a:rPr>
-              <a:t>  1.  エグゼクティブサマリー</a:t>
-            </a:r>
-          </a:p>
-        </p:txBody>
-      </p:sp>
-      <p:sp>
-        <p:nvSpPr>
-          <p:cNvPr id="3" name="TextBox 2"/>
-          <p:cNvSpPr txBox="1"/>
-          <p:nvPr/>
-        </p:nvSpPr>
-        <p:spPr>
-          <a:xfrm>
-            <a:off x="0" y="6446520"/>
-            <a:ext cx="12191695" cy="365760"/>
-          </a:xfrm>
-          <a:prstGeom prst="rect">
-            <a:avLst/>
-          </a:prstGeom>
-          <a:noFill/>
-        </p:spPr>
-        <p:txBody>
-          <a:bodyPr wrap="none">
-            <a:spAutoFit/>
-          </a:bodyPr>
-          <a:lstStyle/>
-          <a:p>
-            <a:pPr algn="ctr"/>
-            <a:r>
-              <a:rPr sz="900" b="0">
-                <a:solidFill>
-                  <a:srgbClr val="71717A"/>
-                </a:solidFill>
-                <a:latin typeface="Yu Gothic UI"/>
-              </a:rPr>
-              <a:t>走ログ (Hashilog) 事業提案書  v1.0  /  RBS  /  hashilog2024@gmail.com</a:t>
-            </a:r>
-          </a:p>
-        </p:txBody>
-      </p:sp>
-      <p:sp>
-        <p:nvSpPr>
-          <p:cNvPr id="4" name="TextBox 3"/>
-          <p:cNvSpPr txBox="1"/>
-          <p:nvPr/>
-        </p:nvSpPr>
-        <p:spPr>
-          <a:xfrm>
-            <a:off x="640080" y="1828800"/>
-            <a:ext cx="10881360" cy="2286000"/>
-          </a:xfrm>
-          <a:prstGeom prst="rect">
-            <a:avLst/>
-          </a:prstGeom>
-          <a:noFill/>
-        </p:spPr>
-        <p:txBody>
-          <a:bodyPr wrap="none">
-            <a:spAutoFit/>
-          </a:bodyPr>
-          <a:lstStyle/>
-          <a:p>
-            <a:pPr algn="l"/>
-            <a:r>
-              <a:rPr sz="3200" b="1">
-                <a:solidFill>
-                  <a:srgbClr val="18181B"/>
-                </a:solidFill>
-                <a:latin typeface="Yu Gothic UI"/>
-              </a:rPr>
-              <a:t>サーキットで刻んだタイムを、愛車情報と一緒に共有できる Web サービス。</a:t>
-            </a:r>
-          </a:p>
-        </p:txBody>
-      </p:sp>
-      <p:sp>
-        <p:nvSpPr>
-          <p:cNvPr id="5" name="TextBox 4"/>
-          <p:cNvSpPr txBox="1"/>
-          <p:nvPr/>
-        </p:nvSpPr>
-        <p:spPr>
-          <a:xfrm>
-            <a:off x="640080" y="4114800"/>
-            <a:ext cx="10881360" cy="1828800"/>
-          </a:xfrm>
-          <a:prstGeom prst="rect">
-            <a:avLst/>
-          </a:prstGeom>
-          <a:noFill/>
-        </p:spPr>
-        <p:txBody>
-          <a:bodyPr wrap="none">
-            <a:spAutoFit/>
-          </a:bodyPr>
-          <a:lstStyle/>
-          <a:p>
-            <a:r>
-              <a:rPr sz="1800" b="0">
-                <a:solidFill>
-                  <a:srgbClr val="71717A"/>
-                </a:solidFill>
-                <a:latin typeface="Yu Gothic UI"/>
-              </a:rPr>
-              <a:t>個人ブログ・SNS・LINE グループに散在していた走行データを、検索・比較・拡散できる形に集約します。</a:t>
-            </a:r>
-          </a:p>
-        </p:txBody>
-      </p:sp>
-    </p:spTree>
-  </p:cSld>
-  <p:clrMapOvr>
-    <a:masterClrMapping/>
-  </p:clrMapOvr>
-</p:sld>
-</file>
-
-<file path=ppt/slides/slide3.xml><?xml version="1.0" encoding="utf-8"?>
-<p:sld xmlns:a="http://schemas.openxmlformats.org/drawingml/2006/main" xmlns:p="http://schemas.openxmlformats.org/presentationml/2006/main" xmlns:r="http://schemas.openxmlformats.org/officeDocument/2006/relationships">
-  <p:cSld>
-    <p:spTree>
-      <p:nvGrpSpPr>
-        <p:cNvPr id="1" name=""/>
-        <p:cNvGrpSpPr/>
-        <p:nvPr/>
-      </p:nvGrpSpPr>
-      <p:grpSpPr/>
-      <p:sp>
-        <p:nvSpPr>
-          <p:cNvPr id="2" name="Rectangle 1"/>
-          <p:cNvSpPr/>
-          <p:nvPr/>
-        </p:nvSpPr>
-        <p:spPr>
-          <a:xfrm>
-            <a:off x="0" y="0"/>
-            <a:ext cx="12191695" cy="502920"/>
-          </a:xfrm>
-          <a:prstGeom prst="rect">
-            <a:avLst/>
-          </a:prstGeom>
-          <a:solidFill>
-            <a:srgbClr val="E10600"/>
-          </a:solidFill>
-          <a:ln>
-            <a:noFill/>
-          </a:ln>
-        </p:spPr>
-        <p:style>
-          <a:lnRef idx="1">
-            <a:schemeClr val="accent1"/>
-          </a:lnRef>
-          <a:fillRef idx="3">
-            <a:schemeClr val="accent1"/>
-          </a:fillRef>
-          <a:effectRef idx="2">
-            <a:schemeClr val="accent1"/>
-          </a:effectRef>
-          <a:fontRef idx="minor">
-            <a:schemeClr val="lt1"/>
-          </a:fontRef>
-        </p:style>
-        <p:txBody>
-          <a:bodyPr rtlCol="0" anchor="ctr" lIns="457200"/>
-          <a:lstStyle/>
-          <a:p>
-            <a:pPr algn="l"/>
-            <a:r>
-              <a:rPr sz="1800" b="1">
-                <a:solidFill>
-                  <a:srgbClr val="FFFFFF"/>
-                </a:solidFill>
-                <a:latin typeface="Yu Gothic UI"/>
-              </a:rPr>
-              <a:t>  1.  提供価値</a:t>
-            </a:r>
-          </a:p>
-        </p:txBody>
-      </p:sp>
-      <p:sp>
-        <p:nvSpPr>
-          <p:cNvPr id="3" name="TextBox 2"/>
-          <p:cNvSpPr txBox="1"/>
-          <p:nvPr/>
-        </p:nvSpPr>
-        <p:spPr>
-          <a:xfrm>
-            <a:off x="0" y="6446520"/>
-            <a:ext cx="12191695" cy="365760"/>
-          </a:xfrm>
-          <a:prstGeom prst="rect">
-            <a:avLst/>
-          </a:prstGeom>
-          <a:noFill/>
-        </p:spPr>
-        <p:txBody>
-          <a:bodyPr wrap="none">
-            <a:spAutoFit/>
-          </a:bodyPr>
-          <a:lstStyle/>
-          <a:p>
-            <a:pPr algn="ctr"/>
-            <a:r>
-              <a:rPr sz="900" b="0">
-                <a:solidFill>
-                  <a:srgbClr val="71717A"/>
-                </a:solidFill>
-                <a:latin typeface="Yu Gothic UI"/>
-              </a:rPr>
-              <a:t>走ログ (Hashilog) 事業提案書  v1.0  /  RBS  /  hashilog2024@gmail.com</a:t>
-            </a:r>
-          </a:p>
-        </p:txBody>
-      </p:sp>
-      <p:sp>
-        <p:nvSpPr>
-          <p:cNvPr id="4" name="TextBox 3"/>
-          <p:cNvSpPr txBox="1"/>
-          <p:nvPr/>
-        </p:nvSpPr>
-        <p:spPr>
-          <a:xfrm>
-            <a:off x="640080" y="914400"/>
-            <a:ext cx="5486400" cy="4572000"/>
-          </a:xfrm>
-          <a:prstGeom prst="rect">
-            <a:avLst/>
-          </a:prstGeom>
-          <a:noFill/>
-        </p:spPr>
-        <p:txBody>
-          <a:bodyPr wrap="none">
-            <a:spAutoFit/>
-          </a:bodyPr>
-          <a:lstStyle/>
-          <a:p>
-            <a:pPr algn="l"/>
-            <a:r>
-              <a:rPr sz="1800" b="1">
-                <a:solidFill>
-                  <a:srgbClr val="E10600"/>
-                </a:solidFill>
-                <a:latin typeface="Yu Gothic UI"/>
-              </a:rPr>
-              <a:t>ドライバーに</a:t>
-            </a:r>
-          </a:p>
-          <a:p>
-            <a:pPr algn="l"/>
-            <a:r>
-              <a:rPr sz="1300" b="0">
-                <a:solidFill>
-                  <a:srgbClr val="18181B"/>
-                </a:solidFill>
-                <a:latin typeface="Yu Gothic UI"/>
-              </a:rPr>
-              <a:t>・ タイム履歴・改造履歴・タイヤ履歴を1か所で管理</a:t>
-            </a:r>
-          </a:p>
-          <a:p>
-            <a:pPr algn="l"/>
-            <a:r>
-              <a:rPr sz="1300" b="0">
-                <a:solidFill>
-                  <a:srgbClr val="18181B"/>
-                </a:solidFill>
-                <a:latin typeface="Yu Gothic UI"/>
-              </a:rPr>
-              <a:t>・ SNS で簡単にシェア (X, Insta, Threads, FB, LINE)</a:t>
-            </a:r>
-          </a:p>
-          <a:p>
-            <a:pPr algn="l"/>
-            <a:r>
-              <a:rPr sz="1300" b="0">
-                <a:solidFill>
-                  <a:srgbClr val="18181B"/>
-                </a:solidFill>
-                <a:latin typeface="Yu Gothic UI"/>
-              </a:rPr>
-              <a:t>・ 同条件ドライバーとの比較</a:t>
-            </a:r>
-          </a:p>
-        </p:txBody>
-      </p:sp>
-      <p:sp>
-        <p:nvSpPr>
-          <p:cNvPr id="5" name="TextBox 4"/>
-          <p:cNvSpPr txBox="1"/>
-          <p:nvPr/>
-        </p:nvSpPr>
-        <p:spPr>
-          <a:xfrm>
-            <a:off x="6400800" y="914400"/>
-            <a:ext cx="5486400" cy="4572000"/>
-          </a:xfrm>
-          <a:prstGeom prst="rect">
-            <a:avLst/>
-          </a:prstGeom>
-          <a:noFill/>
-        </p:spPr>
-        <p:txBody>
-          <a:bodyPr wrap="none">
-            <a:spAutoFit/>
-          </a:bodyPr>
-          <a:lstStyle/>
-          <a:p>
-            <a:pPr algn="l"/>
-            <a:r>
-              <a:rPr sz="1800" b="1">
-                <a:solidFill>
-                  <a:srgbClr val="E10600"/>
-                </a:solidFill>
-                <a:latin typeface="Yu Gothic UI"/>
-              </a:rPr>
-              <a:t>事業者に</a:t>
-            </a:r>
-          </a:p>
-          <a:p>
-            <a:pPr algn="l"/>
-            <a:r>
-              <a:rPr sz="1300" b="0">
-                <a:solidFill>
-                  <a:srgbClr val="18181B"/>
-                </a:solidFill>
-                <a:latin typeface="Yu Gothic UI"/>
-              </a:rPr>
-              <a:t>・ サーキット運営: 公式ページと走行会告知 (無料)</a:t>
-            </a:r>
-          </a:p>
-          <a:p>
-            <a:pPr algn="l"/>
-            <a:r>
-              <a:rPr sz="1300" b="0">
-                <a:solidFill>
-                  <a:srgbClr val="18181B"/>
-                </a:solidFill>
-                <a:latin typeface="Yu Gothic UI"/>
-              </a:rPr>
-              <a:t>・ タイヤ・パーツメーカー: 自社銘柄の使用実績データ</a:t>
-            </a:r>
-          </a:p>
-          <a:p>
-            <a:pPr algn="l"/>
-            <a:r>
-              <a:rPr sz="1300" b="0">
-                <a:solidFill>
-                  <a:srgbClr val="18181B"/>
-                </a:solidFill>
-                <a:latin typeface="Yu Gothic UI"/>
-              </a:rPr>
-              <a:t>・ イベント主催者: 走行会の集客チャネル</a:t>
-            </a:r>
-          </a:p>
-        </p:txBody>
-      </p:sp>
-    </p:spTree>
-  </p:cSld>
-  <p:clrMapOvr>
-    <a:masterClrMapping/>
-  </p:clrMapOvr>
-</p:sld>
-</file>
-
-<file path=ppt/slides/slide4.xml><?xml version="1.0" encoding="utf-8"?>
-<p:sld xmlns:a="http://schemas.openxmlformats.org/drawingml/2006/main" xmlns:p="http://schemas.openxmlformats.org/presentationml/2006/main" xmlns:r="http://schemas.openxmlformats.org/officeDocument/2006/relationships">
-  <p:cSld>
-    <p:spTree>
-      <p:nvGrpSpPr>
-        <p:cNvPr id="1" name=""/>
-        <p:cNvGrpSpPr/>
-        <p:nvPr/>
-      </p:nvGrpSpPr>
-      <p:grpSpPr/>
-      <p:sp>
-        <p:nvSpPr>
-          <p:cNvPr id="2" name="Rectangle 1"/>
-          <p:cNvSpPr/>
-          <p:nvPr/>
-        </p:nvSpPr>
-        <p:spPr>
-          <a:xfrm>
-            <a:off x="0" y="0"/>
-            <a:ext cx="12191695" cy="502920"/>
-          </a:xfrm>
-          <a:prstGeom prst="rect">
-            <a:avLst/>
-          </a:prstGeom>
-          <a:solidFill>
-            <a:srgbClr val="E10600"/>
-          </a:solidFill>
-          <a:ln>
-            <a:noFill/>
-          </a:ln>
-        </p:spPr>
-        <p:style>
-          <a:lnRef idx="1">
-            <a:schemeClr val="accent1"/>
-          </a:lnRef>
-          <a:fillRef idx="3">
-            <a:schemeClr val="accent1"/>
-          </a:fillRef>
-          <a:effectRef idx="2">
-            <a:schemeClr val="accent1"/>
-          </a:effectRef>
-          <a:fontRef idx="minor">
-            <a:schemeClr val="lt1"/>
-          </a:fontRef>
-        </p:style>
-        <p:txBody>
-          <a:bodyPr rtlCol="0" anchor="ctr" lIns="457200"/>
-          <a:lstStyle/>
-          <a:p>
-            <a:pPr algn="l"/>
-            <a:r>
-              <a:rPr sz="1800" b="1">
-                <a:solidFill>
-                  <a:srgbClr val="FFFFFF"/>
-                </a:solidFill>
-                <a:latin typeface="Yu Gothic UI"/>
-              </a:rPr>
-              <a:t>  2.  市場背景・課題認識</a:t>
-            </a:r>
-          </a:p>
-        </p:txBody>
-      </p:sp>
-      <p:sp>
-        <p:nvSpPr>
-          <p:cNvPr id="3" name="TextBox 2"/>
-          <p:cNvSpPr txBox="1"/>
-          <p:nvPr/>
-        </p:nvSpPr>
-        <p:spPr>
-          <a:xfrm>
-            <a:off x="0" y="6446520"/>
-            <a:ext cx="12191695" cy="365760"/>
-          </a:xfrm>
-          <a:prstGeom prst="rect">
-            <a:avLst/>
-          </a:prstGeom>
-          <a:noFill/>
-        </p:spPr>
-        <p:txBody>
-          <a:bodyPr wrap="none">
-            <a:spAutoFit/>
-          </a:bodyPr>
-          <a:lstStyle/>
-          <a:p>
-            <a:pPr algn="ctr"/>
-            <a:r>
-              <a:rPr sz="900" b="0">
-                <a:solidFill>
-                  <a:srgbClr val="71717A"/>
-                </a:solidFill>
-                <a:latin typeface="Yu Gothic UI"/>
-              </a:rPr>
-              <a:t>走ログ (Hashilog) 事業提案書  v1.0  /  RBS  /  hashilog2024@gmail.com</a:t>
-            </a:r>
-          </a:p>
-        </p:txBody>
-      </p:sp>
-      <p:sp>
-        <p:nvSpPr>
-          <p:cNvPr id="4" name="TextBox 3"/>
-          <p:cNvSpPr txBox="1"/>
-          <p:nvPr/>
-        </p:nvSpPr>
-        <p:spPr>
-          <a:xfrm>
-            <a:off x="640080" y="777240"/>
-            <a:ext cx="10972800" cy="640080"/>
-          </a:xfrm>
-          <a:prstGeom prst="rect">
-            <a:avLst/>
-          </a:prstGeom>
-          <a:noFill/>
-        </p:spPr>
-        <p:txBody>
-          <a:bodyPr wrap="none">
-            <a:spAutoFit/>
-          </a:bodyPr>
-          <a:lstStyle/>
-          <a:p>
-            <a:pPr algn="l"/>
-            <a:r>
-              <a:rPr sz="1400" b="0">
-                <a:solidFill>
-                  <a:srgbClr val="3F3F46"/>
-                </a:solidFill>
-                <a:latin typeface="Yu Gothic UI"/>
-              </a:rPr>
-              <a:t>国内のサーキットは 30 か所以上、参加層は数万人規模。30〜50 代男性が中心で可処分所得が高い。</a:t>
-            </a:r>
-          </a:p>
-        </p:txBody>
-      </p:sp>
-      <p:sp>
-        <p:nvSpPr>
-          <p:cNvPr id="5" name="TextBox 4"/>
-          <p:cNvSpPr txBox="1"/>
-          <p:nvPr/>
-        </p:nvSpPr>
-        <p:spPr>
-          <a:xfrm>
-            <a:off x="640080" y="1463040"/>
-            <a:ext cx="10972800" cy="4937760"/>
-          </a:xfrm>
-          <a:prstGeom prst="rect">
-            <a:avLst/>
-          </a:prstGeom>
-          <a:noFill/>
-        </p:spPr>
-        <p:txBody>
-          <a:bodyPr wrap="none">
-            <a:spAutoFit/>
-          </a:bodyPr>
-          <a:lstStyle/>
-          <a:p>
-            <a:pPr algn="l"/>
-            <a:r>
-              <a:rPr sz="1500" b="0">
-                <a:solidFill>
-                  <a:srgbClr val="18181B"/>
-                </a:solidFill>
-                <a:latin typeface="Yu Gothic UI"/>
-              </a:rPr>
-              <a:t>・ ガレージのホワイトボード、個人ブログ、SNS のスクショ、LINE グループ。走行データはバラバラ。</a:t>
-            </a:r>
-          </a:p>
-          <a:p>
-            <a:pPr algn="l"/>
-            <a:r>
-              <a:rPr sz="1500" b="0">
-                <a:solidFill>
-                  <a:srgbClr val="18181B"/>
-                </a:solidFill>
-                <a:latin typeface="Yu Gothic UI"/>
-              </a:rPr>
-              <a:t>・ サーキット間で形式バラバラ、車両・タイヤ情報が紐づかない。</a:t>
-            </a:r>
-          </a:p>
-          <a:p>
-            <a:pPr algn="l"/>
-            <a:r>
-              <a:rPr sz="1500" b="0">
-                <a:solidFill>
-                  <a:srgbClr val="18181B"/>
-                </a:solidFill>
-                <a:latin typeface="Yu Gothic UI"/>
-              </a:rPr>
-              <a:t>・ 走行会の Excel は主催者依存、横断比較ができない。</a:t>
-            </a:r>
-          </a:p>
-          <a:p>
-            <a:pPr algn="l"/>
-            <a:r>
-              <a:rPr sz="1500" b="0">
-                <a:solidFill>
-                  <a:srgbClr val="18181B"/>
-                </a:solidFill>
-                <a:latin typeface="Yu Gothic UI"/>
-              </a:rPr>
-              <a:t>・ → 走ログは「検索可能なフォーマット」と「エビデンス文化」で課題を解決。</a:t>
-            </a:r>
-          </a:p>
-        </p:txBody>
-      </p:sp>
-    </p:spTree>
-  </p:cSld>
-  <p:clrMapOvr>
-    <a:masterClrMapping/>
-  </p:clrMapOvr>
-</p:sld>
-</file>
-
-<file path=ppt/slides/slide5.xml><?xml version="1.0" encoding="utf-8"?>
-<p:sld xmlns:a="http://schemas.openxmlformats.org/drawingml/2006/main" xmlns:p="http://schemas.openxmlformats.org/presentationml/2006/main" xmlns:r="http://schemas.openxmlformats.org/officeDocument/2006/relationships">
-  <p:cSld>
-    <p:spTree>
-      <p:nvGrpSpPr>
-        <p:cNvPr id="1" name=""/>
-        <p:cNvGrpSpPr/>
-        <p:nvPr/>
-      </p:nvGrpSpPr>
-      <p:grpSpPr/>
-      <p:sp>
-        <p:nvSpPr>
-          <p:cNvPr id="2" name="Rectangle 1"/>
-          <p:cNvSpPr/>
-          <p:nvPr/>
-        </p:nvSpPr>
-        <p:spPr>
-          <a:xfrm>
-            <a:off x="0" y="0"/>
-            <a:ext cx="12191695" cy="502920"/>
-          </a:xfrm>
-          <a:prstGeom prst="rect">
-            <a:avLst/>
-          </a:prstGeom>
-          <a:solidFill>
-            <a:srgbClr val="E10600"/>
-          </a:solidFill>
-          <a:ln>
-            <a:noFill/>
-          </a:ln>
-        </p:spPr>
-        <p:style>
-          <a:lnRef idx="1">
-            <a:schemeClr val="accent1"/>
-          </a:lnRef>
-          <a:fillRef idx="3">
-            <a:schemeClr val="accent1"/>
-          </a:fillRef>
-          <a:effectRef idx="2">
-            <a:schemeClr val="accent1"/>
-          </a:effectRef>
-          <a:fontRef idx="minor">
-            <a:schemeClr val="lt1"/>
-          </a:fontRef>
-        </p:style>
-        <p:txBody>
-          <a:bodyPr rtlCol="0" anchor="ctr" lIns="457200"/>
-          <a:lstStyle/>
-          <a:p>
-            <a:pPr algn="l"/>
-            <a:r>
-              <a:rPr sz="1800" b="1">
-                <a:solidFill>
-                  <a:srgbClr val="FFFFFF"/>
-                </a:solidFill>
-                <a:latin typeface="Yu Gothic UI"/>
-              </a:rPr>
-              <a:t>  3.  サービスフロー</a:t>
-            </a:r>
-          </a:p>
-        </p:txBody>
-      </p:sp>
-      <p:sp>
-        <p:nvSpPr>
-          <p:cNvPr id="3" name="TextBox 2"/>
-          <p:cNvSpPr txBox="1"/>
-          <p:nvPr/>
-        </p:nvSpPr>
-        <p:spPr>
-          <a:xfrm>
-            <a:off x="0" y="6446520"/>
-            <a:ext cx="12191695" cy="365760"/>
-          </a:xfrm>
-          <a:prstGeom prst="rect">
-            <a:avLst/>
-          </a:prstGeom>
-          <a:noFill/>
-        </p:spPr>
-        <p:txBody>
-          <a:bodyPr wrap="none">
-            <a:spAutoFit/>
-          </a:bodyPr>
-          <a:lstStyle/>
-          <a:p>
-            <a:pPr algn="ctr"/>
-            <a:r>
-              <a:rPr sz="900" b="0">
-                <a:solidFill>
-                  <a:srgbClr val="71717A"/>
-                </a:solidFill>
-                <a:latin typeface="Yu Gothic UI"/>
-              </a:rPr>
-              <a:t>走ログ (Hashilog) 事業提案書  v1.0  /  RBS  /  hashilog2024@gmail.com</a:t>
-            </a:r>
-          </a:p>
-        </p:txBody>
-      </p:sp>
-      <p:sp>
-        <p:nvSpPr>
-          <p:cNvPr id="4" name="TextBox 3"/>
-          <p:cNvSpPr txBox="1"/>
-          <p:nvPr/>
-        </p:nvSpPr>
-        <p:spPr>
-          <a:xfrm>
-            <a:off x="640080" y="914400"/>
-            <a:ext cx="10972800" cy="4937760"/>
-          </a:xfrm>
-          <a:prstGeom prst="rect">
-            <a:avLst/>
-          </a:prstGeom>
-          <a:noFill/>
-        </p:spPr>
-        <p:txBody>
-          <a:bodyPr wrap="none">
-            <a:spAutoFit/>
-          </a:bodyPr>
-          <a:lstStyle/>
-          <a:p>
-            <a:pPr algn="l"/>
-            <a:r>
-              <a:rPr sz="1500" b="0">
-                <a:solidFill>
-                  <a:srgbClr val="18181B"/>
-                </a:solidFill>
-                <a:latin typeface="Yu Gothic UI"/>
-              </a:rPr>
-              <a:t>・ 1. 無料サインアップ (メール+パスワード)</a:t>
-            </a:r>
-          </a:p>
-          <a:p>
-            <a:pPr algn="l"/>
-            <a:r>
-              <a:rPr sz="1500" b="0">
-                <a:solidFill>
-                  <a:srgbClr val="18181B"/>
-                </a:solidFill>
-                <a:latin typeface="Yu Gothic UI"/>
-              </a:rPr>
-              <a:t>・ 2. マイガレージに愛車を登録 (改造内容・写真)</a:t>
-            </a:r>
-          </a:p>
-          <a:p>
-            <a:pPr algn="l"/>
-            <a:r>
-              <a:rPr sz="1500" b="0">
-                <a:solidFill>
-                  <a:srgbClr val="18181B"/>
-                </a:solidFill>
-                <a:latin typeface="Yu Gothic UI"/>
-              </a:rPr>
-              <a:t>・ 3. タイム投稿: サーキット・タイム・タイヤ・天候・路面・気温・路温・最高速・写真</a:t>
-            </a:r>
-          </a:p>
-          <a:p>
-            <a:pPr algn="l"/>
-            <a:r>
-              <a:rPr sz="1500" b="0">
-                <a:solidFill>
-                  <a:srgbClr val="18181B"/>
-                </a:solidFill>
-                <a:latin typeface="Yu Gothic UI"/>
-              </a:rPr>
-              <a:t>・ 4. ランキング自動反映、SNS でワンクリックシェア</a:t>
-            </a:r>
-          </a:p>
-          <a:p>
-            <a:pPr algn="l"/>
-            <a:r>
-              <a:rPr sz="1500" b="0">
-                <a:solidFill>
-                  <a:srgbClr val="18181B"/>
-                </a:solidFill>
-                <a:latin typeface="Yu Gothic UI"/>
-              </a:rPr>
-              <a:t>・ 5. サーキット運営者は公式アカウントで走行会告知・自施設ページ更新</a:t>
-            </a:r>
-          </a:p>
-        </p:txBody>
-      </p:sp>
-    </p:spTree>
-  </p:cSld>
-  <p:clrMapOvr>
-    <a:masterClrMapping/>
-  </p:clrMapOvr>
-</p:sld>
-</file>
-
-<file path=ppt/slides/slide6.xml><?xml version="1.0" encoding="utf-8"?>
-<p:sld xmlns:a="http://schemas.openxmlformats.org/drawingml/2006/main" xmlns:p="http://schemas.openxmlformats.org/presentationml/2006/main" xmlns:r="http://schemas.openxmlformats.org/officeDocument/2006/relationships">
-  <p:cSld>
-    <p:spTree>
-      <p:nvGrpSpPr>
-        <p:cNvPr id="1" name=""/>
-        <p:cNvGrpSpPr/>
-        <p:nvPr/>
-      </p:nvGrpSpPr>
-      <p:grpSpPr/>
-      <p:sp>
-        <p:nvSpPr>
-          <p:cNvPr id="2" name="Rectangle 1"/>
-          <p:cNvSpPr/>
-          <p:nvPr/>
-        </p:nvSpPr>
-        <p:spPr>
-          <a:xfrm>
-            <a:off x="0" y="0"/>
-            <a:ext cx="12191695" cy="502920"/>
-          </a:xfrm>
-          <a:prstGeom prst="rect">
-            <a:avLst/>
-          </a:prstGeom>
-          <a:solidFill>
-            <a:srgbClr val="E10600"/>
-          </a:solidFill>
-          <a:ln>
-            <a:noFill/>
-          </a:ln>
-        </p:spPr>
-        <p:style>
-          <a:lnRef idx="1">
-            <a:schemeClr val="accent1"/>
-          </a:lnRef>
-          <a:fillRef idx="3">
-            <a:schemeClr val="accent1"/>
-          </a:fillRef>
-          <a:effectRef idx="2">
-            <a:schemeClr val="accent1"/>
-          </a:effectRef>
-          <a:fontRef idx="minor">
-            <a:schemeClr val="lt1"/>
-          </a:fontRef>
-        </p:style>
-        <p:txBody>
-          <a:bodyPr rtlCol="0" anchor="ctr" lIns="457200"/>
-          <a:lstStyle/>
-          <a:p>
-            <a:pPr algn="l"/>
-            <a:r>
-              <a:rPr sz="1800" b="1">
-                <a:solidFill>
-                  <a:srgbClr val="FFFFFF"/>
-                </a:solidFill>
-                <a:latin typeface="Yu Gothic UI"/>
-              </a:rPr>
-              <a:t>  4.  実装済み機能 (1/3) ユーザー / 愛車</a:t>
-            </a:r>
-          </a:p>
-        </p:txBody>
-      </p:sp>
-      <p:sp>
-        <p:nvSpPr>
-          <p:cNvPr id="3" name="TextBox 2"/>
-          <p:cNvSpPr txBox="1"/>
-          <p:nvPr/>
-        </p:nvSpPr>
-        <p:spPr>
-          <a:xfrm>
-            <a:off x="0" y="6446520"/>
-            <a:ext cx="12191695" cy="365760"/>
-          </a:xfrm>
-          <a:prstGeom prst="rect">
-            <a:avLst/>
-          </a:prstGeom>
-          <a:noFill/>
-        </p:spPr>
-        <p:txBody>
-          <a:bodyPr wrap="none">
-            <a:spAutoFit/>
-          </a:bodyPr>
-          <a:lstStyle/>
-          <a:p>
-            <a:pPr algn="ctr"/>
-            <a:r>
-              <a:rPr sz="900" b="0">
-                <a:solidFill>
-                  <a:srgbClr val="71717A"/>
-                </a:solidFill>
-                <a:latin typeface="Yu Gothic UI"/>
-              </a:rPr>
-              <a:t>走ログ (Hashilog) 事業提案書  v1.0  /  RBS  /  hashilog2024@gmail.com</a:t>
-            </a:r>
-          </a:p>
-        </p:txBody>
-      </p:sp>
-      <p:sp>
-        <p:nvSpPr>
-          <p:cNvPr id="4" name="TextBox 3"/>
-          <p:cNvSpPr txBox="1"/>
-          <p:nvPr/>
-        </p:nvSpPr>
-        <p:spPr>
-          <a:xfrm>
-            <a:off x="640080" y="777240"/>
-            <a:ext cx="10972800" cy="640080"/>
-          </a:xfrm>
-          <a:prstGeom prst="rect">
-            <a:avLst/>
-          </a:prstGeom>
-          <a:noFill/>
-        </p:spPr>
-        <p:txBody>
-          <a:bodyPr wrap="none">
-            <a:spAutoFit/>
-          </a:bodyPr>
-          <a:lstStyle/>
-          <a:p>
-            <a:pPr algn="l"/>
-            <a:r>
-              <a:rPr sz="1400" b="0">
-                <a:solidFill>
-                  <a:srgbClr val="3F3F46"/>
-                </a:solidFill>
-                <a:latin typeface="Yu Gothic UI"/>
-              </a:rPr>
-              <a:t>「設計だけ」ではなく、すでに本番稼働しているプロダクト。</a:t>
-            </a:r>
-          </a:p>
-        </p:txBody>
-      </p:sp>
-      <p:sp>
-        <p:nvSpPr>
-          <p:cNvPr id="5" name="TextBox 4"/>
-          <p:cNvSpPr txBox="1"/>
-          <p:nvPr/>
-        </p:nvSpPr>
-        <p:spPr>
-          <a:xfrm>
-            <a:off x="640080" y="1463040"/>
-            <a:ext cx="5486400" cy="4572000"/>
-          </a:xfrm>
-          <a:prstGeom prst="rect">
-            <a:avLst/>
-          </a:prstGeom>
-          <a:noFill/>
-        </p:spPr>
-        <p:txBody>
-          <a:bodyPr wrap="none">
-            <a:spAutoFit/>
-          </a:bodyPr>
-          <a:lstStyle/>
-          <a:p>
-            <a:pPr algn="l"/>
-            <a:r>
-              <a:rPr sz="1800" b="1">
-                <a:solidFill>
-                  <a:srgbClr val="E10600"/>
-                </a:solidFill>
-                <a:latin typeface="Yu Gothic UI"/>
-              </a:rPr>
-              <a:t>ユーザー機能</a:t>
-            </a:r>
-          </a:p>
-          <a:p>
-            <a:pPr algn="l"/>
-            <a:r>
-              <a:rPr sz="1300" b="0">
-                <a:solidFill>
-                  <a:srgbClr val="18181B"/>
-                </a:solidFill>
-                <a:latin typeface="Yu Gothic UI"/>
-              </a:rPr>
-              <a:t>・ メール+パスワード認証、確認、リセット</a:t>
-            </a:r>
-          </a:p>
-          <a:p>
-            <a:pPr algn="l"/>
-            <a:r>
-              <a:rPr sz="1300" b="0">
-                <a:solidFill>
-                  <a:srgbClr val="18181B"/>
-                </a:solidFill>
-                <a:latin typeface="Yu Gothic UI"/>
-              </a:rPr>
-              <a:t>・ プロフィール: 表示名・自己紹介・都道府県・アバター</a:t>
-            </a:r>
-          </a:p>
-          <a:p>
-            <a:pPr algn="l"/>
-            <a:r>
-              <a:rPr sz="1300" b="0">
-                <a:solidFill>
-                  <a:srgbClr val="18181B"/>
-                </a:solidFill>
-                <a:latin typeface="Yu Gothic UI"/>
-              </a:rPr>
-              <a:t>・ SNS リンク: X / Insta / Threads / FB / YT / TikTok</a:t>
-            </a:r>
-          </a:p>
-          <a:p>
-            <a:pPr algn="l"/>
-            <a:r>
-              <a:rPr sz="1300" b="0">
-                <a:solidFill>
-                  <a:srgbClr val="18181B"/>
-                </a:solidFill>
-                <a:latin typeface="Yu Gothic UI"/>
-              </a:rPr>
-              <a:t>・ 退会で関連データ完全削除 (個人情報保護法対応)</a:t>
-            </a:r>
-          </a:p>
-        </p:txBody>
-      </p:sp>
-      <p:sp>
-        <p:nvSpPr>
-          <p:cNvPr id="6" name="TextBox 5"/>
-          <p:cNvSpPr txBox="1"/>
-          <p:nvPr/>
-        </p:nvSpPr>
-        <p:spPr>
-          <a:xfrm>
-            <a:off x="6400800" y="1463040"/>
-            <a:ext cx="5486400" cy="4572000"/>
-          </a:xfrm>
-          <a:prstGeom prst="rect">
-            <a:avLst/>
-          </a:prstGeom>
-          <a:noFill/>
-        </p:spPr>
-        <p:txBody>
-          <a:bodyPr wrap="none">
-            <a:spAutoFit/>
-          </a:bodyPr>
-          <a:lstStyle/>
-          <a:p>
-            <a:pPr algn="l"/>
-            <a:r>
-              <a:rPr sz="1800" b="1">
-                <a:solidFill>
-                  <a:srgbClr val="E10600"/>
-                </a:solidFill>
-                <a:latin typeface="Yu Gothic UI"/>
-              </a:rPr>
-              <a:t>マイガレージ (愛車)</a:t>
-            </a:r>
-          </a:p>
-          <a:p>
-            <a:pPr algn="l"/>
-            <a:r>
-              <a:rPr sz="1300" b="0">
-                <a:solidFill>
-                  <a:srgbClr val="18181B"/>
-                </a:solidFill>
-                <a:latin typeface="Yu Gothic UI"/>
-              </a:rPr>
-              <a:t>・ 複数台登録 (メーカー / モデル / 年式 / 馬力 / 重量)</a:t>
-            </a:r>
-          </a:p>
-          <a:p>
-            <a:pPr algn="l"/>
-            <a:r>
-              <a:rPr sz="1300" b="0">
-                <a:solidFill>
-                  <a:srgbClr val="18181B"/>
-                </a:solidFill>
-                <a:latin typeface="Yu Gothic UI"/>
-              </a:rPr>
-              <a:t>・ 改造内容: 足回り・エンジン・駆動系・ブレーキ・外装・内装</a:t>
-            </a:r>
-          </a:p>
-          <a:p>
-            <a:pPr algn="l"/>
-            <a:r>
-              <a:rPr sz="1300" b="0">
-                <a:solidFill>
-                  <a:srgbClr val="18181B"/>
-                </a:solidFill>
-                <a:latin typeface="Yu Gothic UI"/>
-              </a:rPr>
-              <a:t>・ 写真ギャラリー (カバー + 複数枚)</a:t>
-            </a:r>
-          </a:p>
-        </p:txBody>
-      </p:sp>
-    </p:spTree>
-  </p:cSld>
-  <p:clrMapOvr>
-    <a:masterClrMapping/>
-  </p:clrMapOvr>
-</p:sld>
-</file>
-
-<file path=ppt/slides/slide7.xml><?xml version="1.0" encoding="utf-8"?>
-<p:sld xmlns:a="http://schemas.openxmlformats.org/drawingml/2006/main" xmlns:p="http://schemas.openxmlformats.org/presentationml/2006/main" xmlns:r="http://schemas.openxmlformats.org/officeDocument/2006/relationships">
-  <p:cSld>
-    <p:spTree>
-      <p:nvGrpSpPr>
-        <p:cNvPr id="1" name=""/>
-        <p:cNvGrpSpPr/>
-        <p:nvPr/>
-      </p:nvGrpSpPr>
-      <p:grpSpPr/>
-      <p:sp>
-        <p:nvSpPr>
-          <p:cNvPr id="2" name="Rectangle 1"/>
-          <p:cNvSpPr/>
-          <p:nvPr/>
-        </p:nvSpPr>
-        <p:spPr>
-          <a:xfrm>
-            <a:off x="0" y="0"/>
-            <a:ext cx="12191695" cy="502920"/>
-          </a:xfrm>
-          <a:prstGeom prst="rect">
-            <a:avLst/>
-          </a:prstGeom>
-          <a:solidFill>
-            <a:srgbClr val="E10600"/>
-          </a:solidFill>
-          <a:ln>
-            <a:noFill/>
-          </a:ln>
-        </p:spPr>
-        <p:style>
-          <a:lnRef idx="1">
-            <a:schemeClr val="accent1"/>
-          </a:lnRef>
-          <a:fillRef idx="3">
-            <a:schemeClr val="accent1"/>
-          </a:fillRef>
-          <a:effectRef idx="2">
-            <a:schemeClr val="accent1"/>
-          </a:effectRef>
-          <a:fontRef idx="minor">
-            <a:schemeClr val="lt1"/>
-          </a:fontRef>
-        </p:style>
-        <p:txBody>
-          <a:bodyPr rtlCol="0" anchor="ctr" lIns="457200"/>
-          <a:lstStyle/>
-          <a:p>
-            <a:pPr algn="l"/>
-            <a:r>
-              <a:rPr sz="1800" b="1">
-                <a:solidFill>
-                  <a:srgbClr val="FFFFFF"/>
-                </a:solidFill>
-                <a:latin typeface="Yu Gothic UI"/>
-              </a:rPr>
-              <a:t>  4.  実装済み機能 (2/3) タイム投稿 (中核)</a:t>
-            </a:r>
-          </a:p>
-        </p:txBody>
-      </p:sp>
-      <p:sp>
-        <p:nvSpPr>
-          <p:cNvPr id="3" name="TextBox 2"/>
-          <p:cNvSpPr txBox="1"/>
-          <p:nvPr/>
-        </p:nvSpPr>
-        <p:spPr>
-          <a:xfrm>
-            <a:off x="0" y="6446520"/>
-            <a:ext cx="12191695" cy="365760"/>
-          </a:xfrm>
-          <a:prstGeom prst="rect">
-            <a:avLst/>
-          </a:prstGeom>
-          <a:noFill/>
-        </p:spPr>
-        <p:txBody>
-          <a:bodyPr wrap="none">
-            <a:spAutoFit/>
-          </a:bodyPr>
-          <a:lstStyle/>
-          <a:p>
-            <a:pPr algn="ctr"/>
-            <a:r>
-              <a:rPr sz="900" b="0">
-                <a:solidFill>
-                  <a:srgbClr val="71717A"/>
-                </a:solidFill>
-                <a:latin typeface="Yu Gothic UI"/>
-              </a:rPr>
-              <a:t>走ログ (Hashilog) 事業提案書  v1.0  /  RBS  /  hashilog2024@gmail.com</a:t>
-            </a:r>
-          </a:p>
-        </p:txBody>
-      </p:sp>
-      <p:sp>
-        <p:nvSpPr>
-          <p:cNvPr id="4" name="TextBox 3"/>
-          <p:cNvSpPr txBox="1"/>
-          <p:nvPr/>
-        </p:nvSpPr>
-        <p:spPr>
-          <a:xfrm>
-            <a:off x="640080" y="914400"/>
-            <a:ext cx="5486400" cy="4572000"/>
-          </a:xfrm>
-          <a:prstGeom prst="rect">
-            <a:avLst/>
-          </a:prstGeom>
-          <a:noFill/>
-        </p:spPr>
-        <p:txBody>
-          <a:bodyPr wrap="none">
-            <a:spAutoFit/>
-          </a:bodyPr>
-          <a:lstStyle/>
-          <a:p>
-            <a:pPr algn="l"/>
-            <a:r>
-              <a:rPr sz="1800" b="1">
-                <a:solidFill>
-                  <a:srgbClr val="E10600"/>
-                </a:solidFill>
-                <a:latin typeface="Yu Gothic UI"/>
-              </a:rPr>
-              <a:t>記録項目</a:t>
-            </a:r>
-          </a:p>
-          <a:p>
-            <a:pPr algn="l"/>
-            <a:r>
-              <a:rPr sz="1300" b="0">
-                <a:solidFill>
-                  <a:srgbClr val="18181B"/>
-                </a:solidFill>
-                <a:latin typeface="Yu Gothic UI"/>
-              </a:rPr>
-              <a:t>・ 総合タイム、セクター 1〜4 個別、最高速</a:t>
-            </a:r>
-          </a:p>
-          <a:p>
-            <a:pPr algn="l"/>
-            <a:r>
-              <a:rPr sz="1300" b="0">
-                <a:solidFill>
-                  <a:srgbClr val="18181B"/>
-                </a:solidFill>
-                <a:latin typeface="Yu Gothic UI"/>
-              </a:rPr>
-              <a:t>・ 天候 (晴/曇/雨/大雨/雪/変)、路面 (Dry/Damp/Wet)</a:t>
-            </a:r>
-          </a:p>
-          <a:p>
-            <a:pPr algn="l"/>
-            <a:r>
-              <a:rPr sz="1300" b="0">
-                <a:solidFill>
-                  <a:srgbClr val="18181B"/>
-                </a:solidFill>
-                <a:latin typeface="Yu Gothic UI"/>
-              </a:rPr>
-              <a:t>・ 気温・路温</a:t>
-            </a:r>
-          </a:p>
-          <a:p>
-            <a:pPr algn="l"/>
-            <a:r>
-              <a:rPr sz="1300" b="0">
-                <a:solidFill>
-                  <a:srgbClr val="18181B"/>
-                </a:solidFill>
-                <a:latin typeface="Yu Gothic UI"/>
-              </a:rPr>
-              <a:t>・ 走行日・メモ (走行会名、感想)</a:t>
-            </a:r>
-          </a:p>
-        </p:txBody>
-      </p:sp>
-      <p:sp>
-        <p:nvSpPr>
-          <p:cNvPr id="5" name="TextBox 4"/>
-          <p:cNvSpPr txBox="1"/>
-          <p:nvPr/>
-        </p:nvSpPr>
-        <p:spPr>
-          <a:xfrm>
-            <a:off x="6400800" y="914400"/>
-            <a:ext cx="5486400" cy="4572000"/>
-          </a:xfrm>
-          <a:prstGeom prst="rect">
-            <a:avLst/>
-          </a:prstGeom>
-          <a:noFill/>
-        </p:spPr>
-        <p:txBody>
-          <a:bodyPr wrap="none">
-            <a:spAutoFit/>
-          </a:bodyPr>
-          <a:lstStyle/>
-          <a:p>
-            <a:pPr algn="l"/>
-            <a:r>
-              <a:rPr sz="1800" b="1">
-                <a:solidFill>
-                  <a:srgbClr val="E10600"/>
-                </a:solidFill>
-                <a:latin typeface="Yu Gothic UI"/>
-              </a:rPr>
-              <a:t>タイヤ (差別化)</a:t>
-            </a:r>
-          </a:p>
-          <a:p>
-            <a:pPr algn="l"/>
-            <a:r>
-              <a:rPr sz="1300" b="0">
-                <a:solidFill>
-                  <a:srgbClr val="18181B"/>
-                </a:solidFill>
-                <a:latin typeface="Yu Gothic UI"/>
-              </a:rPr>
-              <a:t>・ ブランド × 銘柄 ドロップダウン + 「その他」手入力</a:t>
-            </a:r>
-          </a:p>
-          <a:p>
-            <a:pPr algn="l"/>
-            <a:r>
-              <a:rPr sz="1300" b="0">
-                <a:solidFill>
-                  <a:srgbClr val="18181B"/>
-                </a:solidFill>
-                <a:latin typeface="Yu Gothic UI"/>
-              </a:rPr>
-              <a:t>・ 前後で別銘柄に対応 (チェックボックス切替)</a:t>
-            </a:r>
-          </a:p>
-          <a:p>
-            <a:pPr algn="l"/>
-            <a:r>
-              <a:rPr sz="1300" b="0">
-                <a:solidFill>
-                  <a:srgbClr val="18181B"/>
-                </a:solidFill>
-                <a:latin typeface="Yu Gothic UI"/>
-              </a:rPr>
-              <a:t>・ 前後別サイズ記録 (例: F:245/40 R:265/35)</a:t>
-            </a:r>
-          </a:p>
-          <a:p>
-            <a:pPr algn="l"/>
-            <a:r>
-              <a:rPr sz="1300" b="0">
-                <a:solidFill>
-                  <a:srgbClr val="18181B"/>
-                </a:solidFill>
-                <a:latin typeface="Yu Gothic UI"/>
-              </a:rPr>
-              <a:t>・ ユーザー入力銘柄は自動でリスト追加</a:t>
-            </a:r>
-          </a:p>
-          <a:p>
-            <a:pPr algn="l"/>
-            <a:r>
-              <a:rPr sz="1300" b="0">
-                <a:solidFill>
-                  <a:srgbClr val="18181B"/>
-                </a:solidFill>
-                <a:latin typeface="Yu Gothic UI"/>
-              </a:rPr>
-              <a:t>・ エビデンス写真複数枚添付</a:t>
-            </a:r>
-          </a:p>
-        </p:txBody>
-      </p:sp>
-    </p:spTree>
-  </p:cSld>
-  <p:clrMapOvr>
-    <a:masterClrMapping/>
-  </p:clrMapOvr>
-</p:sld>
-</file>
-
-<file path=ppt/slides/slide8.xml><?xml version="1.0" encoding="utf-8"?>
-<p:sld xmlns:a="http://schemas.openxmlformats.org/drawingml/2006/main" xmlns:p="http://schemas.openxmlformats.org/presentationml/2006/main" xmlns:r="http://schemas.openxmlformats.org/officeDocument/2006/relationships">
-  <p:cSld>
-    <p:spTree>
-      <p:nvGrpSpPr>
-        <p:cNvPr id="1" name=""/>
-        <p:cNvGrpSpPr/>
-        <p:nvPr/>
-      </p:nvGrpSpPr>
-      <p:grpSpPr/>
-      <p:sp>
-        <p:nvSpPr>
-          <p:cNvPr id="2" name="Rectangle 1"/>
-          <p:cNvSpPr/>
-          <p:nvPr/>
-        </p:nvSpPr>
-        <p:spPr>
-          <a:xfrm>
-            <a:off x="0" y="0"/>
-            <a:ext cx="12191695" cy="502920"/>
-          </a:xfrm>
-          <a:prstGeom prst="rect">
-            <a:avLst/>
-          </a:prstGeom>
-          <a:solidFill>
-            <a:srgbClr val="E10600"/>
-          </a:solidFill>
-          <a:ln>
-            <a:noFill/>
-          </a:ln>
-        </p:spPr>
-        <p:style>
-          <a:lnRef idx="1">
-            <a:schemeClr val="accent1"/>
-          </a:lnRef>
-          <a:fillRef idx="3">
-            <a:schemeClr val="accent1"/>
-          </a:fillRef>
-          <a:effectRef idx="2">
-            <a:schemeClr val="accent1"/>
-          </a:effectRef>
-          <a:fontRef idx="minor">
-            <a:schemeClr val="lt1"/>
-          </a:fontRef>
-        </p:style>
-        <p:txBody>
-          <a:bodyPr rtlCol="0" anchor="ctr" lIns="457200"/>
-          <a:lstStyle/>
-          <a:p>
-            <a:pPr algn="l"/>
-            <a:r>
-              <a:rPr sz="1800" b="1">
-                <a:solidFill>
-                  <a:srgbClr val="FFFFFF"/>
-                </a:solidFill>
-                <a:latin typeface="Yu Gothic UI"/>
-              </a:rPr>
-              <a:t>  4.  実装済み機能 (3/3) ランキング / B2B / 信頼性</a:t>
-            </a:r>
-          </a:p>
-        </p:txBody>
-      </p:sp>
-      <p:sp>
-        <p:nvSpPr>
-          <p:cNvPr id="3" name="TextBox 2"/>
-          <p:cNvSpPr txBox="1"/>
-          <p:nvPr/>
-        </p:nvSpPr>
-        <p:spPr>
-          <a:xfrm>
-            <a:off x="0" y="6446520"/>
-            <a:ext cx="12191695" cy="365760"/>
-          </a:xfrm>
-          <a:prstGeom prst="rect">
-            <a:avLst/>
-          </a:prstGeom>
-          <a:noFill/>
-        </p:spPr>
-        <p:txBody>
-          <a:bodyPr wrap="none">
-            <a:spAutoFit/>
-          </a:bodyPr>
-          <a:lstStyle/>
-          <a:p>
-            <a:pPr algn="ctr"/>
-            <a:r>
-              <a:rPr sz="900" b="0">
-                <a:solidFill>
-                  <a:srgbClr val="71717A"/>
-                </a:solidFill>
-                <a:latin typeface="Yu Gothic UI"/>
-              </a:rPr>
-              <a:t>走ログ (Hashilog) 事業提案書  v1.0  /  RBS  /  hashilog2024@gmail.com</a:t>
-            </a:r>
-          </a:p>
-        </p:txBody>
-      </p:sp>
-      <p:sp>
-        <p:nvSpPr>
-          <p:cNvPr id="4" name="TextBox 3"/>
-          <p:cNvSpPr txBox="1"/>
-          <p:nvPr/>
-        </p:nvSpPr>
-        <p:spPr>
-          <a:xfrm>
-            <a:off x="640080" y="914400"/>
-            <a:ext cx="5486400" cy="4572000"/>
-          </a:xfrm>
-          <a:prstGeom prst="rect">
-            <a:avLst/>
-          </a:prstGeom>
-          <a:noFill/>
-        </p:spPr>
-        <p:txBody>
-          <a:bodyPr wrap="none">
-            <a:spAutoFit/>
-          </a:bodyPr>
-          <a:lstStyle/>
-          <a:p>
-            <a:pPr algn="l"/>
-            <a:r>
-              <a:rPr sz="1800" b="1">
-                <a:solidFill>
-                  <a:srgbClr val="E10600"/>
-                </a:solidFill>
-                <a:latin typeface="Yu Gothic UI"/>
-              </a:rPr>
-              <a:t>閲覧・横断機能</a:t>
-            </a:r>
-          </a:p>
-          <a:p>
-            <a:pPr algn="l"/>
-            <a:r>
-              <a:rPr sz="1300" b="0">
-                <a:solidFill>
-                  <a:srgbClr val="18181B"/>
-                </a:solidFill>
-                <a:latin typeface="Yu Gothic UI"/>
-              </a:rPr>
-              <a:t>・ サーキット × 車種 × タイヤで多次元フィルター</a:t>
-            </a:r>
-          </a:p>
-          <a:p>
-            <a:pPr algn="l"/>
-            <a:r>
-              <a:rPr sz="1300" b="0">
-                <a:solidFill>
-                  <a:srgbClr val="18181B"/>
-                </a:solidFill>
-                <a:latin typeface="Yu Gothic UI"/>
-              </a:rPr>
-              <a:t>・ 全国 25+ サーキット登録済み</a:t>
-            </a:r>
-          </a:p>
-          <a:p>
-            <a:pPr algn="l"/>
-            <a:r>
-              <a:rPr sz="1300" b="0">
-                <a:solidFill>
-                  <a:srgbClr val="18181B"/>
-                </a:solidFill>
-                <a:latin typeface="Yu Gothic UI"/>
-              </a:rPr>
-              <a:t>・ サーキット詳細にタイムランキング &amp; イベント告知</a:t>
-            </a:r>
-          </a:p>
-          <a:p>
-            <a:pPr algn="l"/>
-            <a:r>
-              <a:rPr sz="1300" b="0">
-                <a:solidFill>
-                  <a:srgbClr val="18181B"/>
-                </a:solidFill>
-                <a:latin typeface="Yu Gothic UI"/>
-              </a:rPr>
-              <a:t>・ OGP/Twitter Card / JSON-LD 構造化データ完備</a:t>
-            </a:r>
-          </a:p>
-          <a:p>
-            <a:pPr algn="l"/>
-            <a:r>
-              <a:rPr sz="1300" b="0">
-                <a:solidFill>
-                  <a:srgbClr val="18181B"/>
-                </a:solidFill>
-                <a:latin typeface="Yu Gothic UI"/>
-              </a:rPr>
-              <a:t>・ PWA / モバイル最適化</a:t>
-            </a:r>
-          </a:p>
-        </p:txBody>
-      </p:sp>
-      <p:sp>
-        <p:nvSpPr>
-          <p:cNvPr id="5" name="TextBox 4"/>
-          <p:cNvSpPr txBox="1"/>
-          <p:nvPr/>
-        </p:nvSpPr>
-        <p:spPr>
-          <a:xfrm>
-            <a:off x="6400800" y="914400"/>
-            <a:ext cx="5486400" cy="4572000"/>
-          </a:xfrm>
-          <a:prstGeom prst="rect">
-            <a:avLst/>
-          </a:prstGeom>
-          <a:noFill/>
-        </p:spPr>
-        <p:txBody>
-          <a:bodyPr wrap="none">
-            <a:spAutoFit/>
-          </a:bodyPr>
-          <a:lstStyle/>
-          <a:p>
-            <a:pPr algn="l"/>
-            <a:r>
-              <a:rPr sz="1800" b="1">
-                <a:solidFill>
-                  <a:srgbClr val="E10600"/>
-                </a:solidFill>
-                <a:latin typeface="Yu Gothic UI"/>
-              </a:rPr>
-              <a:t>B2B / 運用</a:t>
-            </a:r>
-          </a:p>
-          <a:p>
-            <a:pPr algn="l"/>
-            <a:r>
-              <a:rPr sz="1300" b="0">
-                <a:solidFill>
-                  <a:srgbClr val="18181B"/>
-                </a:solidFill>
-                <a:latin typeface="Yu Gothic UI"/>
-              </a:rPr>
-              <a:t>・ サーキット運営者: 公式アカウントで自施設編集</a:t>
-            </a:r>
-          </a:p>
-          <a:p>
-            <a:pPr algn="l"/>
-            <a:r>
-              <a:rPr sz="1300" b="0">
-                <a:solidFill>
-                  <a:srgbClr val="18181B"/>
-                </a:solidFill>
-                <a:latin typeface="Yu Gothic UI"/>
-              </a:rPr>
-              <a:t>・ 走行会・レース・お知らせ告知</a:t>
-            </a:r>
-          </a:p>
-          <a:p>
-            <a:pPr algn="l"/>
-            <a:r>
-              <a:rPr sz="1300" b="0">
-                <a:solidFill>
-                  <a:srgbClr val="18181B"/>
-                </a:solidFill>
-                <a:latin typeface="Yu Gothic UI"/>
-              </a:rPr>
-              <a:t>・ 通報・モデレーション機能</a:t>
-            </a:r>
-          </a:p>
-          <a:p>
-            <a:pPr algn="l"/>
-            <a:r>
-              <a:rPr sz="1300" b="0">
-                <a:solidFill>
-                  <a:srgbClr val="18181B"/>
-                </a:solidFill>
-                <a:latin typeface="Yu Gothic UI"/>
-              </a:rPr>
-              <a:t>・ Vercel + Supabase Tokyo (国内データ保管)</a:t>
-            </a:r>
-          </a:p>
-          <a:p>
-            <a:pPr algn="l"/>
-            <a:r>
-              <a:rPr sz="1300" b="0">
-                <a:solidFill>
-                  <a:srgbClr val="18181B"/>
-                </a:solidFill>
-                <a:latin typeface="Yu Gothic UI"/>
-              </a:rPr>
-              <a:t>・ /api/health 死活監視、Cloudflare Web Analytics</a:t>
+              <a:t>・ 共同企画記事・アンケート協力</a:t>
             </a:r>
           </a:p>
         </p:txBody>
@@ -9254,7 +7916,7 @@
         <p:spPr>
           <a:xfrm>
             <a:off x="0" y="0"/>
-            <a:ext cx="12191695" cy="502920"/>
+            <a:ext cx="12191695" cy="868680"/>
           </a:xfrm>
           <a:prstGeom prst="rect">
             <a:avLst/>
@@ -9281,25 +7943,49 @@
           </a:fontRef>
         </p:style>
         <p:txBody>
-          <a:bodyPr rtlCol="0" anchor="ctr" lIns="457200"/>
+          <a:bodyPr rtlCol="0" anchor="ctr" lIns="502920" tIns="164592"/>
           <a:lstStyle/>
           <a:p>
             <a:pPr algn="l"/>
             <a:r>
-              <a:rPr sz="1800" b="1">
+              <a:rPr sz="2200" b="1">
                 <a:solidFill>
                   <a:srgbClr val="FFFFFF"/>
                 </a:solidFill>
                 <a:latin typeface="Yu Gothic UI"/>
               </a:rPr>
-              <a:t>  5.  ターゲット (ドライバー)</a:t>
-            </a:r>
-          </a:p>
-        </p:txBody>
-      </p:sp>
-      <p:sp>
-        <p:nvSpPr>
-          <p:cNvPr id="3" name="TextBox 2"/>
+              <a:t>8.  ロードマップ</a:t>
+            </a:r>
+          </a:p>
+        </p:txBody>
+      </p:sp>
+      <p:pic>
+        <p:nvPicPr>
+          <p:cNvPr id="3" name="Picture 2" descr="logo.png"/>
+          <p:cNvPicPr>
+            <a:picLocks noChangeAspect="1"/>
+          </p:cNvPicPr>
+          <p:nvPr/>
+        </p:nvPicPr>
+        <p:blipFill>
+          <a:blip r:embed="rId2"/>
+          <a:stretch>
+            <a:fillRect/>
+          </a:stretch>
+        </p:blipFill>
+        <p:spPr>
+          <a:xfrm>
+            <a:off x="11094123" y="228600"/>
+            <a:ext cx="777532" cy="411480"/>
+          </a:xfrm>
+          <a:prstGeom prst="rect">
+            <a:avLst/>
+          </a:prstGeom>
+        </p:spPr>
+      </p:pic>
+      <p:sp>
+        <p:nvSpPr>
+          <p:cNvPr id="4" name="TextBox 3"/>
           <p:cNvSpPr txBox="1"/>
           <p:nvPr/>
         </p:nvSpPr>
@@ -9327,21 +8013,21 @@
                 </a:solidFill>
                 <a:latin typeface="Yu Gothic UI"/>
               </a:rPr>
-              <a:t>走ログ (Hashilog) 事業提案書  v1.0  /  RBS  /  hashilog2024@gmail.com</a:t>
-            </a:r>
-          </a:p>
-        </p:txBody>
-      </p:sp>
-      <p:sp>
-        <p:nvSpPr>
-          <p:cNvPr id="4" name="TextBox 3"/>
+              <a:t>走ログ (Hashilog)  v1.0  /  RBS  /  hashilog2024@gmail.com  /  https://hashilog.jp</a:t>
+            </a:r>
+          </a:p>
+        </p:txBody>
+      </p:sp>
+      <p:sp>
+        <p:nvSpPr>
+          <p:cNvPr id="5" name="TextBox 4"/>
           <p:cNvSpPr txBox="1"/>
           <p:nvPr/>
         </p:nvSpPr>
         <p:spPr>
           <a:xfrm>
-            <a:off x="640080" y="777240"/>
-            <a:ext cx="10972800" cy="640080"/>
+            <a:off x="640080" y="1280160"/>
+            <a:ext cx="5486400" cy="548640"/>
           </a:xfrm>
           <a:prstGeom prst="rect">
             <a:avLst/>
@@ -9356,273 +8042,354 @@
           <a:p>
             <a:pPr algn="l"/>
             <a:r>
-              <a:rPr sz="1400" b="0">
-                <a:solidFill>
-                  <a:srgbClr val="3F3F46"/>
-                </a:solidFill>
-                <a:latin typeface="Yu Gothic UI"/>
-              </a:rPr>
-              <a:t>メインユーザー像。可処分所得が高くロイヤリティの高い層。</a:t>
-            </a:r>
-          </a:p>
-        </p:txBody>
-      </p:sp>
-      <p:graphicFrame>
-        <p:nvGraphicFramePr>
-          <p:cNvPr id="5" name="Table 4"/>
-          <p:cNvGraphicFramePr>
-            <a:graphicFrameLocks noGrp="1"/>
-          </p:cNvGraphicFramePr>
+              <a:rPr sz="1800" b="1">
+                <a:solidFill>
+                  <a:srgbClr val="E10600"/>
+                </a:solidFill>
+                <a:latin typeface="Yu Gothic UI"/>
+              </a:rPr>
+              <a:t>完了済み (2026年5月)</a:t>
+            </a:r>
+          </a:p>
+        </p:txBody>
+      </p:sp>
+      <p:sp>
+        <p:nvSpPr>
+          <p:cNvPr id="6" name="TextBox 5"/>
+          <p:cNvSpPr txBox="1"/>
           <p:nvPr/>
-        </p:nvGraphicFramePr>
-        <p:xfrm>
-          <a:off x="640080" y="1463040"/>
-          <a:ext cx="10881360" cy="2057400"/>
-        </p:xfrm>
-        <a:graphic>
-          <a:graphicData uri="http://schemas.openxmlformats.org/drawingml/2006/table">
-            <a:tbl>
-              <a:tblPr firstRow="1" bandRow="1">
-                <a:tableStyleId>{5C22544A-7EE6-4342-B048-85BDC9FD1C3A}</a:tableStyleId>
-              </a:tblPr>
-              <a:tblGrid>
-                <a:gridCol w="5440680"/>
-                <a:gridCol w="5440680"/>
-              </a:tblGrid>
-              <a:tr h="411480">
-                <a:tc>
-                  <a:txBody>
-                    <a:bodyPr/>
-                    <a:lstStyle/>
-                    <a:p>
-                      <a:r>
-                        <a:rPr sz="1200" b="1">
-                          <a:solidFill>
-                            <a:srgbClr val="18181B"/>
-                          </a:solidFill>
-                          <a:latin typeface="Yu Gothic UI"/>
-                        </a:rPr>
-                        <a:t>ペルソナ</a:t>
-                      </a:r>
-                    </a:p>
-                  </a:txBody>
-                  <a:tcPr>
-                    <a:solidFill>
-                      <a:srgbClr val="FAFAFA"/>
-                    </a:solidFill>
-                  </a:tcPr>
-                </a:tc>
-                <a:tc>
-                  <a:txBody>
-                    <a:bodyPr/>
-                    <a:lstStyle/>
-                    <a:p>
-                      <a:r>
-                        <a:rPr sz="1200" b="1">
-                          <a:solidFill>
-                            <a:srgbClr val="18181B"/>
-                          </a:solidFill>
-                          <a:latin typeface="Yu Gothic UI"/>
-                        </a:rPr>
-                        <a:t>特徴</a:t>
-                      </a:r>
-                    </a:p>
-                  </a:txBody>
-                  <a:tcPr>
-                    <a:solidFill>
-                      <a:srgbClr val="FAFAFA"/>
-                    </a:solidFill>
-                  </a:tcPr>
-                </a:tc>
-              </a:tr>
-              <a:tr h="411480">
-                <a:tc>
-                  <a:txBody>
-                    <a:bodyPr/>
-                    <a:lstStyle/>
-                    <a:p>
-                      <a:r>
-                        <a:rPr sz="1100" b="0">
-                          <a:solidFill>
-                            <a:srgbClr val="18181B"/>
-                          </a:solidFill>
-                          <a:latin typeface="Yu Gothic UI"/>
-                        </a:rPr>
-                        <a:t>タイムアタッカー</a:t>
-                      </a:r>
-                    </a:p>
-                  </a:txBody>
-                  <a:tcPr>
-                    <a:solidFill>
-                      <a:srgbClr val="FFFFFF"/>
-                    </a:solidFill>
-                  </a:tcPr>
-                </a:tc>
-                <a:tc>
-                  <a:txBody>
-                    <a:bodyPr/>
-                    <a:lstStyle/>
-                    <a:p>
-                      <a:r>
-                        <a:rPr sz="1100" b="0">
-                          <a:solidFill>
-                            <a:srgbClr val="18181B"/>
-                          </a:solidFill>
-                          <a:latin typeface="Yu Gothic UI"/>
-                        </a:rPr>
-                        <a:t>30〜50 代、年 10〜30 走行日、車両・タイヤに数十〜百万単位の投資</a:t>
-                      </a:r>
-                    </a:p>
-                  </a:txBody>
-                  <a:tcPr>
-                    <a:solidFill>
-                      <a:srgbClr val="FFFFFF"/>
-                    </a:solidFill>
-                  </a:tcPr>
-                </a:tc>
-              </a:tr>
-              <a:tr h="411480">
-                <a:tc>
-                  <a:txBody>
-                    <a:bodyPr/>
-                    <a:lstStyle/>
-                    <a:p>
-                      <a:r>
-                        <a:rPr sz="1100" b="0">
-                          <a:solidFill>
-                            <a:srgbClr val="18181B"/>
-                          </a:solidFill>
-                          <a:latin typeface="Yu Gothic UI"/>
-                        </a:rPr>
-                        <a:t>走行会レギュラー</a:t>
-                      </a:r>
-                    </a:p>
-                  </a:txBody>
-                  <a:tcPr>
-                    <a:solidFill>
-                      <a:srgbClr val="FFFFFF"/>
-                    </a:solidFill>
-                  </a:tcPr>
-                </a:tc>
-                <a:tc>
-                  <a:txBody>
-                    <a:bodyPr/>
-                    <a:lstStyle/>
-                    <a:p>
-                      <a:r>
-                        <a:rPr sz="1100" b="0">
-                          <a:solidFill>
-                            <a:srgbClr val="18181B"/>
-                          </a:solidFill>
-                          <a:latin typeface="Yu Gothic UI"/>
-                        </a:rPr>
-                        <a:t>月 1〜2 回、自己ベスト更新がモチベーション、エビデンス共有志向</a:t>
-                      </a:r>
-                    </a:p>
-                  </a:txBody>
-                  <a:tcPr>
-                    <a:solidFill>
-                      <a:srgbClr val="FFFFFF"/>
-                    </a:solidFill>
-                  </a:tcPr>
-                </a:tc>
-              </a:tr>
-              <a:tr h="411480">
-                <a:tc>
-                  <a:txBody>
-                    <a:bodyPr/>
-                    <a:lstStyle/>
-                    <a:p>
-                      <a:r>
-                        <a:rPr sz="1100" b="0">
-                          <a:solidFill>
-                            <a:srgbClr val="18181B"/>
-                          </a:solidFill>
-                          <a:latin typeface="Yu Gothic UI"/>
-                        </a:rPr>
-                        <a:t>若手ドライバー</a:t>
-                      </a:r>
-                    </a:p>
-                  </a:txBody>
-                  <a:tcPr>
-                    <a:solidFill>
-                      <a:srgbClr val="FFFFFF"/>
-                    </a:solidFill>
-                  </a:tcPr>
-                </a:tc>
-                <a:tc>
-                  <a:txBody>
-                    <a:bodyPr/>
-                    <a:lstStyle/>
-                    <a:p>
-                      <a:r>
-                        <a:rPr sz="1100" b="0">
-                          <a:solidFill>
-                            <a:srgbClr val="18181B"/>
-                          </a:solidFill>
-                          <a:latin typeface="Yu Gothic UI"/>
-                        </a:rPr>
-                        <a:t>20 代、SNS ネイティブ、発信意欲旺盛、先輩のセッティング参考</a:t>
-                      </a:r>
-                    </a:p>
-                  </a:txBody>
-                  <a:tcPr>
-                    <a:solidFill>
-                      <a:srgbClr val="FFFFFF"/>
-                    </a:solidFill>
-                  </a:tcPr>
-                </a:tc>
-              </a:tr>
-              <a:tr h="411480">
-                <a:tc>
-                  <a:txBody>
-                    <a:bodyPr/>
-                    <a:lstStyle/>
-                    <a:p>
-                      <a:r>
-                        <a:rPr sz="1100" b="0">
-                          <a:solidFill>
-                            <a:srgbClr val="18181B"/>
-                          </a:solidFill>
-                          <a:latin typeface="Yu Gothic UI"/>
-                        </a:rPr>
-                        <a:t>耐久・チーム参戦</a:t>
-                      </a:r>
-                    </a:p>
-                  </a:txBody>
-                  <a:tcPr>
-                    <a:solidFill>
-                      <a:srgbClr val="FFFFFF"/>
-                    </a:solidFill>
-                  </a:tcPr>
-                </a:tc>
-                <a:tc>
-                  <a:txBody>
-                    <a:bodyPr/>
-                    <a:lstStyle/>
-                    <a:p>
-                      <a:r>
-                        <a:rPr sz="1100" b="0">
-                          <a:solidFill>
-                            <a:srgbClr val="18181B"/>
-                          </a:solidFill>
-                          <a:latin typeface="Yu Gothic UI"/>
-                        </a:rPr>
-                        <a:t>チーム単位で複数アカウント、同一車両のドライバー比較</a:t>
-                      </a:r>
-                    </a:p>
-                  </a:txBody>
-                  <a:tcPr>
-                    <a:solidFill>
-                      <a:srgbClr val="FFFFFF"/>
-                    </a:solidFill>
-                  </a:tcPr>
-                </a:tc>
-              </a:tr>
-            </a:tbl>
-          </a:graphicData>
-        </a:graphic>
-      </p:graphicFrame>
+        </p:nvSpPr>
+        <p:spPr>
+          <a:xfrm>
+            <a:off x="640080" y="1828800"/>
+            <a:ext cx="5486400" cy="4114800"/>
+          </a:xfrm>
+          <a:prstGeom prst="rect">
+            <a:avLst/>
+          </a:prstGeom>
+          <a:noFill/>
+        </p:spPr>
+        <p:txBody>
+          <a:bodyPr wrap="none">
+            <a:spAutoFit/>
+          </a:bodyPr>
+          <a:lstStyle/>
+          <a:p>
+            <a:pPr algn="l">
+              <a:lnSpc>
+                <a:spcPct val="120000"/>
+              </a:lnSpc>
+            </a:pPr>
+            <a:r>
+              <a:rPr sz="1300" b="0">
+                <a:solidFill>
+                  <a:srgbClr val="18181B"/>
+                </a:solidFill>
+                <a:latin typeface="Yu Gothic UI"/>
+              </a:rPr>
+              <a:t>・ 認証 / プロフィール / SNS 連携</a:t>
+            </a:r>
+          </a:p>
+          <a:p>
+            <a:pPr algn="l">
+              <a:lnSpc>
+                <a:spcPct val="120000"/>
+              </a:lnSpc>
+            </a:pPr>
+            <a:r>
+              <a:rPr sz="1300" b="0">
+                <a:solidFill>
+                  <a:srgbClr val="18181B"/>
+                </a:solidFill>
+                <a:latin typeface="Yu Gothic UI"/>
+              </a:rPr>
+              <a:t>・ 愛車登録・改造履歴</a:t>
+            </a:r>
+          </a:p>
+          <a:p>
+            <a:pPr algn="l">
+              <a:lnSpc>
+                <a:spcPct val="120000"/>
+              </a:lnSpc>
+            </a:pPr>
+            <a:r>
+              <a:rPr sz="1300" b="0">
+                <a:solidFill>
+                  <a:srgbClr val="18181B"/>
+                </a:solidFill>
+                <a:latin typeface="Yu Gothic UI"/>
+              </a:rPr>
+              <a:t>・ タイム投稿 (前後別タイヤ含む)</a:t>
+            </a:r>
+          </a:p>
+          <a:p>
+            <a:pPr algn="l">
+              <a:lnSpc>
+                <a:spcPct val="120000"/>
+              </a:lnSpc>
+            </a:pPr>
+            <a:r>
+              <a:rPr sz="1300" b="0">
+                <a:solidFill>
+                  <a:srgbClr val="18181B"/>
+                </a:solidFill>
+                <a:latin typeface="Yu Gothic UI"/>
+              </a:rPr>
+              <a:t>・ ランキング・多次元フィルター</a:t>
+            </a:r>
+          </a:p>
+          <a:p>
+            <a:pPr algn="l">
+              <a:lnSpc>
+                <a:spcPct val="120000"/>
+              </a:lnSpc>
+            </a:pPr>
+            <a:r>
+              <a:rPr sz="1300" b="0">
+                <a:solidFill>
+                  <a:srgbClr val="18181B"/>
+                </a:solidFill>
+                <a:latin typeface="Yu Gothic UI"/>
+              </a:rPr>
+              <a:t>・ サーキット 25+ 登録 / 運営者管理</a:t>
+            </a:r>
+          </a:p>
+          <a:p>
+            <a:pPr algn="l">
+              <a:lnSpc>
+                <a:spcPct val="120000"/>
+              </a:lnSpc>
+            </a:pPr>
+            <a:r>
+              <a:rPr sz="1300" b="0">
+                <a:solidFill>
+                  <a:srgbClr val="18181B"/>
+                </a:solidFill>
+                <a:latin typeface="Yu Gothic UI"/>
+              </a:rPr>
+              <a:t>・ 通報・モデレーション</a:t>
+            </a:r>
+          </a:p>
+          <a:p>
+            <a:pPr algn="l">
+              <a:lnSpc>
+                <a:spcPct val="120000"/>
+              </a:lnSpc>
+            </a:pPr>
+            <a:r>
+              <a:rPr sz="1300" b="0">
+                <a:solidFill>
+                  <a:srgbClr val="18181B"/>
+                </a:solidFill>
+                <a:latin typeface="Yu Gothic UI"/>
+              </a:rPr>
+              <a:t>・ PWA / SEO / 構造化データ</a:t>
+            </a:r>
+          </a:p>
+          <a:p>
+            <a:pPr algn="l">
+              <a:lnSpc>
+                <a:spcPct val="120000"/>
+              </a:lnSpc>
+            </a:pPr>
+            <a:r>
+              <a:rPr sz="1300" b="0">
+                <a:solidFill>
+                  <a:srgbClr val="18181B"/>
+                </a:solidFill>
+                <a:latin typeface="Yu Gothic UI"/>
+              </a:rPr>
+              <a:t>・ 規約・プライバシー・特商法整備</a:t>
+            </a:r>
+          </a:p>
+        </p:txBody>
+      </p:sp>
+      <p:sp>
+        <p:nvSpPr>
+          <p:cNvPr id="7" name="TextBox 6"/>
+          <p:cNvSpPr txBox="1"/>
+          <p:nvPr/>
+        </p:nvSpPr>
+        <p:spPr>
+          <a:xfrm>
+            <a:off x="6400800" y="1280160"/>
+            <a:ext cx="5486400" cy="548640"/>
+          </a:xfrm>
+          <a:prstGeom prst="rect">
+            <a:avLst/>
+          </a:prstGeom>
+          <a:noFill/>
+        </p:spPr>
+        <p:txBody>
+          <a:bodyPr wrap="none">
+            <a:spAutoFit/>
+          </a:bodyPr>
+          <a:lstStyle/>
+          <a:p>
+            <a:pPr algn="l"/>
+            <a:r>
+              <a:rPr sz="1800" b="1">
+                <a:solidFill>
+                  <a:srgbClr val="E10600"/>
+                </a:solidFill>
+                <a:latin typeface="Yu Gothic UI"/>
+              </a:rPr>
+              <a:t>短期〜中期 (3〜12 か月)</a:t>
+            </a:r>
+          </a:p>
+        </p:txBody>
+      </p:sp>
+      <p:sp>
+        <p:nvSpPr>
+          <p:cNvPr id="8" name="TextBox 7"/>
+          <p:cNvSpPr txBox="1"/>
+          <p:nvPr/>
+        </p:nvSpPr>
+        <p:spPr>
+          <a:xfrm>
+            <a:off x="6400800" y="1828800"/>
+            <a:ext cx="5486400" cy="4114800"/>
+          </a:xfrm>
+          <a:prstGeom prst="rect">
+            <a:avLst/>
+          </a:prstGeom>
+          <a:noFill/>
+        </p:spPr>
+        <p:txBody>
+          <a:bodyPr wrap="none">
+            <a:spAutoFit/>
+          </a:bodyPr>
+          <a:lstStyle/>
+          <a:p>
+            <a:pPr algn="l">
+              <a:lnSpc>
+                <a:spcPct val="120000"/>
+              </a:lnSpc>
+            </a:pPr>
+            <a:r>
+              <a:rPr sz="1300" b="0">
+                <a:solidFill>
+                  <a:srgbClr val="18181B"/>
+                </a:solidFill>
+                <a:latin typeface="Yu Gothic UI"/>
+              </a:rPr>
+              <a:t>・ ベストタイム推移グラフ</a:t>
+            </a:r>
+          </a:p>
+          <a:p>
+            <a:pPr algn="l">
+              <a:lnSpc>
+                <a:spcPct val="120000"/>
+              </a:lnSpc>
+            </a:pPr>
+            <a:r>
+              <a:rPr sz="1300" b="0">
+                <a:solidFill>
+                  <a:srgbClr val="18181B"/>
+                </a:solidFill>
+                <a:latin typeface="Yu Gothic UI"/>
+              </a:rPr>
+              <a:t>・ 同一車種比較ダッシュボード</a:t>
+            </a:r>
+          </a:p>
+          <a:p>
+            <a:pPr algn="l">
+              <a:lnSpc>
+                <a:spcPct val="120000"/>
+              </a:lnSpc>
+            </a:pPr>
+            <a:r>
+              <a:rPr sz="1300" b="0">
+                <a:solidFill>
+                  <a:srgbClr val="18181B"/>
+                </a:solidFill>
+                <a:latin typeface="Yu Gothic UI"/>
+              </a:rPr>
+              <a:t>・ 走行会・イベントカレンダー (横断)</a:t>
+            </a:r>
+          </a:p>
+          <a:p>
+            <a:pPr algn="l">
+              <a:lnSpc>
+                <a:spcPct val="120000"/>
+              </a:lnSpc>
+            </a:pPr>
+            <a:r>
+              <a:rPr sz="1300" b="0">
+                <a:solidFill>
+                  <a:srgbClr val="18181B"/>
+                </a:solidFill>
+                <a:latin typeface="Yu Gothic UI"/>
+              </a:rPr>
+              <a:t>・ 通知機能 (記録更新・フォロー)</a:t>
+            </a:r>
+          </a:p>
+          <a:p>
+            <a:pPr algn="l">
+              <a:lnSpc>
+                <a:spcPct val="120000"/>
+              </a:lnSpc>
+            </a:pPr>
+            <a:r>
+              <a:rPr sz="1300" b="0">
+                <a:solidFill>
+                  <a:srgbClr val="18181B"/>
+                </a:solidFill>
+                <a:latin typeface="Yu Gothic UI"/>
+              </a:rPr>
+              <a:t>・ メーカー向け管理コンソール</a:t>
+            </a:r>
+          </a:p>
+          <a:p>
+            <a:pPr algn="l">
+              <a:lnSpc>
+                <a:spcPct val="120000"/>
+              </a:lnSpc>
+            </a:pPr>
+            <a:r>
+              <a:rPr sz="1300" b="0">
+                <a:solidFill>
+                  <a:srgbClr val="18181B"/>
+                </a:solidFill>
+                <a:latin typeface="Yu Gothic UI"/>
+              </a:rPr>
+              <a:t>・ チームアカウント / API 公開</a:t>
+            </a:r>
+          </a:p>
+          <a:p>
+            <a:pPr algn="l">
+              <a:lnSpc>
+                <a:spcPct val="120000"/>
+              </a:lnSpc>
+            </a:pPr>
+            <a:r>
+              <a:rPr sz="1300" b="0">
+                <a:solidFill>
+                  <a:srgbClr val="18181B"/>
+                </a:solidFill>
+                <a:latin typeface="Yu Gothic UI"/>
+              </a:rPr>
+              <a:t>・ 動画オンボードアップロード</a:t>
+            </a:r>
+          </a:p>
+          <a:p>
+            <a:pPr algn="l">
+              <a:lnSpc>
+                <a:spcPct val="120000"/>
+              </a:lnSpc>
+            </a:pPr>
+            <a:r>
+              <a:rPr sz="1300" b="0">
+                <a:solidFill>
+                  <a:srgbClr val="18181B"/>
+                </a:solidFill>
+                <a:latin typeface="Yu Gothic UI"/>
+              </a:rPr>
+              <a:t>・ AI 走行ライン分析 (将来)</a:t>
+            </a:r>
+          </a:p>
+        </p:txBody>
+      </p:sp>
     </p:spTree>
   </p:cSld>
   <p:clrMapOvr>
